--- a/Scripts_R100_Materiales/Planning/Docs/IT_DEV_PLANNING.pptx
+++ b/Scripts_R100_Materiales/Planning/Docs/IT_DEV_PLANNING.pptx
@@ -5,17 +5,22 @@
     <p:sldMasterId id="2147483648" r:id="rId1"/>
   </p:sldMasterIdLst>
   <p:notesMasterIdLst>
-    <p:notesMasterId r:id="rId10"/>
+    <p:notesMasterId r:id="rId15"/>
   </p:notesMasterIdLst>
   <p:sldIdLst>
     <p:sldId id="344" r:id="rId2"/>
-    <p:sldId id="402" r:id="rId3"/>
-    <p:sldId id="398" r:id="rId4"/>
-    <p:sldId id="401" r:id="rId5"/>
-    <p:sldId id="403" r:id="rId6"/>
-    <p:sldId id="404" r:id="rId7"/>
-    <p:sldId id="399" r:id="rId8"/>
-    <p:sldId id="400" r:id="rId9"/>
+    <p:sldId id="409" r:id="rId3"/>
+    <p:sldId id="408" r:id="rId4"/>
+    <p:sldId id="406" r:id="rId5"/>
+    <p:sldId id="407" r:id="rId6"/>
+    <p:sldId id="405" r:id="rId7"/>
+    <p:sldId id="402" r:id="rId8"/>
+    <p:sldId id="398" r:id="rId9"/>
+    <p:sldId id="401" r:id="rId10"/>
+    <p:sldId id="403" r:id="rId11"/>
+    <p:sldId id="404" r:id="rId12"/>
+    <p:sldId id="399" r:id="rId13"/>
+    <p:sldId id="400" r:id="rId14"/>
   </p:sldIdLst>
   <p:sldSz cx="9144000" cy="6858000" type="screen4x3"/>
   <p:notesSz cx="6858000" cy="9144000"/>
@@ -215,7 +220,7 @@
           <a:p>
             <a:fld id="{A17B1792-3256-4E77-8442-3E205CD69EF5}" type="datetimeFigureOut">
               <a:rPr lang="en-US" smtClean="0"/>
-              <a:t>4/30/2021</a:t>
+              <a:t>5/14/2021</a:t>
             </a:fld>
             <a:endParaRPr lang="en-US"/>
           </a:p>
@@ -661,7 +666,7 @@
           <a:p>
             <a:fld id="{07558649-2619-44F9-8F30-2D6466E57529}" type="datetimeFigureOut">
               <a:rPr lang="en-US" smtClean="0"/>
-              <a:t>4/30/2021</a:t>
+              <a:t>5/14/2021</a:t>
             </a:fld>
             <a:endParaRPr lang="en-US"/>
           </a:p>
@@ -829,7 +834,7 @@
           <a:p>
             <a:fld id="{07558649-2619-44F9-8F30-2D6466E57529}" type="datetimeFigureOut">
               <a:rPr lang="en-US" smtClean="0"/>
-              <a:t>4/30/2021</a:t>
+              <a:t>5/14/2021</a:t>
             </a:fld>
             <a:endParaRPr lang="en-US"/>
           </a:p>
@@ -1007,7 +1012,7 @@
           <a:p>
             <a:fld id="{07558649-2619-44F9-8F30-2D6466E57529}" type="datetimeFigureOut">
               <a:rPr lang="en-US" smtClean="0"/>
-              <a:t>4/30/2021</a:t>
+              <a:t>5/14/2021</a:t>
             </a:fld>
             <a:endParaRPr lang="en-US"/>
           </a:p>
@@ -1175,7 +1180,7 @@
           <a:p>
             <a:fld id="{07558649-2619-44F9-8F30-2D6466E57529}" type="datetimeFigureOut">
               <a:rPr lang="en-US" smtClean="0"/>
-              <a:t>4/30/2021</a:t>
+              <a:t>5/14/2021</a:t>
             </a:fld>
             <a:endParaRPr lang="en-US"/>
           </a:p>
@@ -1420,7 +1425,7 @@
           <a:p>
             <a:fld id="{07558649-2619-44F9-8F30-2D6466E57529}" type="datetimeFigureOut">
               <a:rPr lang="en-US" smtClean="0"/>
-              <a:t>4/30/2021</a:t>
+              <a:t>5/14/2021</a:t>
             </a:fld>
             <a:endParaRPr lang="en-US"/>
           </a:p>
@@ -1705,7 +1710,7 @@
           <a:p>
             <a:fld id="{07558649-2619-44F9-8F30-2D6466E57529}" type="datetimeFigureOut">
               <a:rPr lang="en-US" smtClean="0"/>
-              <a:t>4/30/2021</a:t>
+              <a:t>5/14/2021</a:t>
             </a:fld>
             <a:endParaRPr lang="en-US"/>
           </a:p>
@@ -2124,7 +2129,7 @@
           <a:p>
             <a:fld id="{07558649-2619-44F9-8F30-2D6466E57529}" type="datetimeFigureOut">
               <a:rPr lang="en-US" smtClean="0"/>
-              <a:t>4/30/2021</a:t>
+              <a:t>5/14/2021</a:t>
             </a:fld>
             <a:endParaRPr lang="en-US"/>
           </a:p>
@@ -2241,7 +2246,7 @@
           <a:p>
             <a:fld id="{07558649-2619-44F9-8F30-2D6466E57529}" type="datetimeFigureOut">
               <a:rPr lang="en-US" smtClean="0"/>
-              <a:t>4/30/2021</a:t>
+              <a:t>5/14/2021</a:t>
             </a:fld>
             <a:endParaRPr lang="en-US"/>
           </a:p>
@@ -2336,7 +2341,7 @@
           <a:p>
             <a:fld id="{07558649-2619-44F9-8F30-2D6466E57529}" type="datetimeFigureOut">
               <a:rPr lang="en-US" smtClean="0"/>
-              <a:t>4/30/2021</a:t>
+              <a:t>5/14/2021</a:t>
             </a:fld>
             <a:endParaRPr lang="en-US"/>
           </a:p>
@@ -2611,7 +2616,7 @@
           <a:p>
             <a:fld id="{07558649-2619-44F9-8F30-2D6466E57529}" type="datetimeFigureOut">
               <a:rPr lang="en-US" smtClean="0"/>
-              <a:t>4/30/2021</a:t>
+              <a:t>5/14/2021</a:t>
             </a:fld>
             <a:endParaRPr lang="en-US"/>
           </a:p>
@@ -2863,7 +2868,7 @@
           <a:p>
             <a:fld id="{07558649-2619-44F9-8F30-2D6466E57529}" type="datetimeFigureOut">
               <a:rPr lang="en-US" smtClean="0"/>
-              <a:t>4/30/2021</a:t>
+              <a:t>5/14/2021</a:t>
             </a:fld>
             <a:endParaRPr lang="en-US"/>
           </a:p>
@@ -3083,7 +3088,7 @@
           <a:p>
             <a:fld id="{07558649-2619-44F9-8F30-2D6466E57529}" type="datetimeFigureOut">
               <a:rPr lang="en-US" smtClean="0"/>
-              <a:t>4/30/2021</a:t>
+              <a:t>5/14/2021</a:t>
             </a:fld>
             <a:endParaRPr lang="en-US"/>
           </a:p>
@@ -3500,7 +3505,7 @@
               <a:rPr lang="es-MX" b="1" dirty="0">
                 <a:latin typeface="Century Gothic" panose="020B0502020202020204" pitchFamily="34" charset="0"/>
               </a:rPr>
-              <a:t>26/04/2021 – 30/04/2021</a:t>
+              <a:t>11/05/2021 – 14/05/2021</a:t>
             </a:r>
             <a:endParaRPr lang="es-MX" dirty="0">
               <a:latin typeface="Century Gothic" panose="020B0502020202020204" pitchFamily="34" charset="0"/>
@@ -3512,6 +3517,1735 @@
     <p:extLst>
       <p:ext uri="{BB962C8B-B14F-4D97-AF65-F5344CB8AC3E}">
         <p14:creationId xmlns:p14="http://schemas.microsoft.com/office/powerpoint/2010/main" val="1449075767"/>
+      </p:ext>
+    </p:extLst>
+  </p:cSld>
+  <p:clrMapOvr>
+    <a:masterClrMapping/>
+  </p:clrMapOvr>
+</p:sld>
+</file>
+
+<file path=ppt/slides/slide10.xml><?xml version="1.0" encoding="utf-8"?>
+<p:sld xmlns:a="http://schemas.openxmlformats.org/drawingml/2006/main" xmlns:r="http://schemas.openxmlformats.org/officeDocument/2006/relationships" xmlns:p="http://schemas.openxmlformats.org/presentationml/2006/main">
+  <p:cSld>
+    <p:spTree>
+      <p:nvGrpSpPr>
+        <p:cNvPr id="1" name=""/>
+        <p:cNvGrpSpPr/>
+        <p:nvPr/>
+      </p:nvGrpSpPr>
+      <p:grpSpPr>
+        <a:xfrm>
+          <a:off x="0" y="0"/>
+          <a:ext cx="0" cy="0"/>
+          <a:chOff x="0" y="0"/>
+          <a:chExt cx="0" cy="0"/>
+        </a:xfrm>
+      </p:grpSpPr>
+      <p:pic>
+        <p:nvPicPr>
+          <p:cNvPr id="5" name="Imagen 4" descr="Interfaz de usuario gráfica, Aplicación, Tabla, Excel&#10;&#10;Descripción generada automáticamente">
+            <a:extLst>
+              <a:ext uri="{FF2B5EF4-FFF2-40B4-BE49-F238E27FC236}">
+                <a16:creationId xmlns:a16="http://schemas.microsoft.com/office/drawing/2014/main" id="{70EE0B7D-6150-45FB-A817-BB56EDD19E84}"/>
+              </a:ext>
+            </a:extLst>
+          </p:cNvPr>
+          <p:cNvPicPr>
+            <a:picLocks noChangeAspect="1"/>
+          </p:cNvPicPr>
+          <p:nvPr/>
+        </p:nvPicPr>
+        <p:blipFill>
+          <a:blip r:embed="rId2">
+            <a:extLst>
+              <a:ext uri="{28A0092B-C50C-407E-A947-70E740481C1C}">
+                <a14:useLocalDpi xmlns:a14="http://schemas.microsoft.com/office/drawing/2010/main" val="0"/>
+              </a:ext>
+            </a:extLst>
+          </a:blip>
+          <a:stretch>
+            <a:fillRect/>
+          </a:stretch>
+        </p:blipFill>
+        <p:spPr>
+          <a:xfrm>
+            <a:off x="1187624" y="1843084"/>
+            <a:ext cx="7848869" cy="4898284"/>
+          </a:xfrm>
+          <a:prstGeom prst="rect">
+            <a:avLst/>
+          </a:prstGeom>
+        </p:spPr>
+      </p:pic>
+      <p:sp>
+        <p:nvSpPr>
+          <p:cNvPr id="8" name="Title 1"/>
+          <p:cNvSpPr txBox="1">
+            <a:spLocks/>
+          </p:cNvSpPr>
+          <p:nvPr/>
+        </p:nvSpPr>
+        <p:spPr>
+          <a:xfrm>
+            <a:off x="1087408" y="274638"/>
+            <a:ext cx="7229008" cy="634082"/>
+          </a:xfrm>
+          <a:prstGeom prst="rect">
+            <a:avLst/>
+          </a:prstGeom>
+        </p:spPr>
+        <p:txBody>
+          <a:bodyPr/>
+          <a:lstStyle>
+            <a:lvl1pPr algn="ctr" defTabSz="914400" rtl="0" eaLnBrk="1" latinLnBrk="0" hangingPunct="1">
+              <a:spcBef>
+                <a:spcPct val="0"/>
+              </a:spcBef>
+              <a:buNone/>
+              <a:defRPr sz="4400" kern="1200">
+                <a:solidFill>
+                  <a:schemeClr val="tx1"/>
+                </a:solidFill>
+                <a:latin typeface="+mj-lt"/>
+                <a:ea typeface="+mj-ea"/>
+                <a:cs typeface="+mj-cs"/>
+              </a:defRPr>
+            </a:lvl1pPr>
+          </a:lstStyle>
+          <a:p>
+            <a:pPr algn="l"/>
+            <a:r>
+              <a:rPr lang="es-ES" sz="2000" dirty="0">
+                <a:solidFill>
+                  <a:srgbClr val="3F1900"/>
+                </a:solidFill>
+              </a:rPr>
+              <a:t>Pantalla Planning</a:t>
+            </a:r>
+            <a:endParaRPr lang="en-US" sz="2000" dirty="0">
+              <a:solidFill>
+                <a:srgbClr val="3F1900"/>
+              </a:solidFill>
+            </a:endParaRPr>
+          </a:p>
+        </p:txBody>
+      </p:sp>
+      <p:sp>
+        <p:nvSpPr>
+          <p:cNvPr id="4" name="Content Placeholder 3"/>
+          <p:cNvSpPr txBox="1">
+            <a:spLocks/>
+          </p:cNvSpPr>
+          <p:nvPr/>
+        </p:nvSpPr>
+        <p:spPr>
+          <a:xfrm>
+            <a:off x="1331640" y="1196753"/>
+            <a:ext cx="7488832" cy="5137780"/>
+          </a:xfrm>
+          <a:prstGeom prst="rect">
+            <a:avLst/>
+          </a:prstGeom>
+        </p:spPr>
+        <p:txBody>
+          <a:bodyPr>
+            <a:normAutofit/>
+          </a:bodyPr>
+          <a:lstStyle>
+            <a:lvl1pPr marL="342900" indent="-342900" algn="l" defTabSz="914400" rtl="0" eaLnBrk="1" latinLnBrk="0" hangingPunct="1">
+              <a:spcBef>
+                <a:spcPct val="20000"/>
+              </a:spcBef>
+              <a:buFont typeface="Arial" panose="020B0604020202020204" pitchFamily="34" charset="0"/>
+              <a:buChar char="•"/>
+              <a:defRPr sz="3200" kern="1200">
+                <a:solidFill>
+                  <a:schemeClr val="tx1"/>
+                </a:solidFill>
+                <a:latin typeface="+mn-lt"/>
+                <a:ea typeface="+mn-ea"/>
+                <a:cs typeface="+mn-cs"/>
+              </a:defRPr>
+            </a:lvl1pPr>
+            <a:lvl2pPr marL="742950" indent="-285750" algn="l" defTabSz="914400" rtl="0" eaLnBrk="1" latinLnBrk="0" hangingPunct="1">
+              <a:spcBef>
+                <a:spcPct val="20000"/>
+              </a:spcBef>
+              <a:buFont typeface="Arial" panose="020B0604020202020204" pitchFamily="34" charset="0"/>
+              <a:buChar char="–"/>
+              <a:defRPr sz="2800" kern="1200">
+                <a:solidFill>
+                  <a:schemeClr val="tx1"/>
+                </a:solidFill>
+                <a:latin typeface="+mn-lt"/>
+                <a:ea typeface="+mn-ea"/>
+                <a:cs typeface="+mn-cs"/>
+              </a:defRPr>
+            </a:lvl2pPr>
+            <a:lvl3pPr marL="1143000" indent="-228600" algn="l" defTabSz="914400" rtl="0" eaLnBrk="1" latinLnBrk="0" hangingPunct="1">
+              <a:spcBef>
+                <a:spcPct val="20000"/>
+              </a:spcBef>
+              <a:buFont typeface="Arial" panose="020B0604020202020204" pitchFamily="34" charset="0"/>
+              <a:buChar char="•"/>
+              <a:defRPr sz="2400" kern="1200">
+                <a:solidFill>
+                  <a:schemeClr val="tx1"/>
+                </a:solidFill>
+                <a:latin typeface="+mn-lt"/>
+                <a:ea typeface="+mn-ea"/>
+                <a:cs typeface="+mn-cs"/>
+              </a:defRPr>
+            </a:lvl3pPr>
+            <a:lvl4pPr marL="1600200" indent="-228600" algn="l" defTabSz="914400" rtl="0" eaLnBrk="1" latinLnBrk="0" hangingPunct="1">
+              <a:spcBef>
+                <a:spcPct val="20000"/>
+              </a:spcBef>
+              <a:buFont typeface="Arial" panose="020B0604020202020204" pitchFamily="34" charset="0"/>
+              <a:buChar char="–"/>
+              <a:defRPr sz="2000" kern="1200">
+                <a:solidFill>
+                  <a:schemeClr val="tx1"/>
+                </a:solidFill>
+                <a:latin typeface="+mn-lt"/>
+                <a:ea typeface="+mn-ea"/>
+                <a:cs typeface="+mn-cs"/>
+              </a:defRPr>
+            </a:lvl4pPr>
+            <a:lvl5pPr marL="2057400" indent="-228600" algn="l" defTabSz="914400" rtl="0" eaLnBrk="1" latinLnBrk="0" hangingPunct="1">
+              <a:spcBef>
+                <a:spcPct val="20000"/>
+              </a:spcBef>
+              <a:buFont typeface="Arial" panose="020B0604020202020204" pitchFamily="34" charset="0"/>
+              <a:buChar char="»"/>
+              <a:defRPr sz="2000" kern="1200">
+                <a:solidFill>
+                  <a:schemeClr val="tx1"/>
+                </a:solidFill>
+                <a:latin typeface="+mn-lt"/>
+                <a:ea typeface="+mn-ea"/>
+                <a:cs typeface="+mn-cs"/>
+              </a:defRPr>
+            </a:lvl5pPr>
+            <a:lvl6pPr marL="2514600" indent="-228600" algn="l" defTabSz="914400" rtl="0" eaLnBrk="1" latinLnBrk="0" hangingPunct="1">
+              <a:spcBef>
+                <a:spcPct val="20000"/>
+              </a:spcBef>
+              <a:buFont typeface="Arial" panose="020B0604020202020204" pitchFamily="34" charset="0"/>
+              <a:buChar char="•"/>
+              <a:defRPr sz="2000" kern="1200">
+                <a:solidFill>
+                  <a:schemeClr val="tx1"/>
+                </a:solidFill>
+                <a:latin typeface="+mn-lt"/>
+                <a:ea typeface="+mn-ea"/>
+                <a:cs typeface="+mn-cs"/>
+              </a:defRPr>
+            </a:lvl6pPr>
+            <a:lvl7pPr marL="2971800" indent="-228600" algn="l" defTabSz="914400" rtl="0" eaLnBrk="1" latinLnBrk="0" hangingPunct="1">
+              <a:spcBef>
+                <a:spcPct val="20000"/>
+              </a:spcBef>
+              <a:buFont typeface="Arial" panose="020B0604020202020204" pitchFamily="34" charset="0"/>
+              <a:buChar char="•"/>
+              <a:defRPr sz="2000" kern="1200">
+                <a:solidFill>
+                  <a:schemeClr val="tx1"/>
+                </a:solidFill>
+                <a:latin typeface="+mn-lt"/>
+                <a:ea typeface="+mn-ea"/>
+                <a:cs typeface="+mn-cs"/>
+              </a:defRPr>
+            </a:lvl7pPr>
+            <a:lvl8pPr marL="3429000" indent="-228600" algn="l" defTabSz="914400" rtl="0" eaLnBrk="1" latinLnBrk="0" hangingPunct="1">
+              <a:spcBef>
+                <a:spcPct val="20000"/>
+              </a:spcBef>
+              <a:buFont typeface="Arial" panose="020B0604020202020204" pitchFamily="34" charset="0"/>
+              <a:buChar char="•"/>
+              <a:defRPr sz="2000" kern="1200">
+                <a:solidFill>
+                  <a:schemeClr val="tx1"/>
+                </a:solidFill>
+                <a:latin typeface="+mn-lt"/>
+                <a:ea typeface="+mn-ea"/>
+                <a:cs typeface="+mn-cs"/>
+              </a:defRPr>
+            </a:lvl8pPr>
+            <a:lvl9pPr marL="3886200" indent="-228600" algn="l" defTabSz="914400" rtl="0" eaLnBrk="1" latinLnBrk="0" hangingPunct="1">
+              <a:spcBef>
+                <a:spcPct val="20000"/>
+              </a:spcBef>
+              <a:buFont typeface="Arial" panose="020B0604020202020204" pitchFamily="34" charset="0"/>
+              <a:buChar char="•"/>
+              <a:defRPr sz="2000" kern="1200">
+                <a:solidFill>
+                  <a:schemeClr val="tx1"/>
+                </a:solidFill>
+                <a:latin typeface="+mn-lt"/>
+                <a:ea typeface="+mn-ea"/>
+                <a:cs typeface="+mn-cs"/>
+              </a:defRPr>
+            </a:lvl9pPr>
+          </a:lstStyle>
+          <a:p>
+            <a:pPr marL="0" indent="0" algn="just">
+              <a:buFont typeface="Arial" panose="020B0604020202020204" pitchFamily="34" charset="0"/>
+              <a:buNone/>
+            </a:pPr>
+            <a:endParaRPr lang="en-US" sz="2000" i="1"/>
+          </a:p>
+        </p:txBody>
+      </p:sp>
+      <p:sp>
+        <p:nvSpPr>
+          <p:cNvPr id="10" name="Rectangle 9"/>
+          <p:cNvSpPr/>
+          <p:nvPr/>
+        </p:nvSpPr>
+        <p:spPr>
+          <a:xfrm>
+            <a:off x="1115615" y="1054477"/>
+            <a:ext cx="7920879" cy="830997"/>
+          </a:xfrm>
+          <a:prstGeom prst="rect">
+            <a:avLst/>
+          </a:prstGeom>
+        </p:spPr>
+        <p:txBody>
+          <a:bodyPr wrap="square">
+            <a:spAutoFit/>
+          </a:bodyPr>
+          <a:lstStyle/>
+          <a:p>
+            <a:pPr>
+              <a:buFont typeface="Arial" panose="020B0604020202020204" pitchFamily="34" charset="0"/>
+              <a:buChar char="•"/>
+            </a:pPr>
+            <a:r>
+              <a:rPr lang="es-ES" sz="1200" b="1" i="0" dirty="0">
+                <a:solidFill>
+                  <a:srgbClr val="222222"/>
+                </a:solidFill>
+                <a:effectLst/>
+                <a:latin typeface="Segoe UI" panose="020B0502040204020203" pitchFamily="34" charset="0"/>
+              </a:rPr>
+              <a:t> Acción Clonar Orden: </a:t>
+            </a:r>
+            <a:r>
+              <a:rPr lang="es-ES" sz="1200" i="0" dirty="0">
+                <a:solidFill>
+                  <a:srgbClr val="222222"/>
+                </a:solidFill>
+                <a:effectLst/>
+                <a:latin typeface="Segoe UI" panose="020B0502040204020203" pitchFamily="34" charset="0"/>
+              </a:rPr>
+              <a:t>Una vez</a:t>
+            </a:r>
+            <a:r>
+              <a:rPr lang="es-ES" sz="1200" dirty="0">
+                <a:solidFill>
+                  <a:srgbClr val="222222"/>
+                </a:solidFill>
+                <a:latin typeface="Segoe UI" panose="020B0502040204020203" pitchFamily="34" charset="0"/>
+              </a:rPr>
+              <a:t> </a:t>
+            </a:r>
+            <a:r>
+              <a:rPr lang="es-ES" sz="1200" i="0" dirty="0">
+                <a:solidFill>
+                  <a:srgbClr val="222222"/>
+                </a:solidFill>
+                <a:effectLst/>
+                <a:latin typeface="Segoe UI" panose="020B0502040204020203" pitchFamily="34" charset="0"/>
+              </a:rPr>
+              <a:t>cargada la información de la orden que desea </a:t>
+            </a:r>
+            <a:r>
+              <a:rPr lang="es-ES" sz="1200" dirty="0">
+                <a:solidFill>
+                  <a:srgbClr val="222222"/>
+                </a:solidFill>
+                <a:latin typeface="Segoe UI" panose="020B0502040204020203" pitchFamily="34" charset="0"/>
+              </a:rPr>
+              <a:t>Clonar, </a:t>
+            </a:r>
+            <a:r>
+              <a:rPr lang="es-ES" sz="1200" b="1" dirty="0">
+                <a:solidFill>
+                  <a:srgbClr val="222222"/>
+                </a:solidFill>
+                <a:latin typeface="Segoe UI" panose="020B0502040204020203" pitchFamily="34" charset="0"/>
+              </a:rPr>
+              <a:t>1.- </a:t>
+            </a:r>
+            <a:r>
+              <a:rPr lang="es-ES" sz="1200" dirty="0">
+                <a:solidFill>
+                  <a:srgbClr val="222222"/>
+                </a:solidFill>
+                <a:latin typeface="Segoe UI" panose="020B0502040204020203" pitchFamily="34" charset="0"/>
+              </a:rPr>
+              <a:t>Dar Click sobre el </a:t>
+            </a:r>
+            <a:r>
+              <a:rPr lang="es-ES" sz="1200" b="1" i="0" dirty="0">
+                <a:solidFill>
+                  <a:srgbClr val="222222"/>
+                </a:solidFill>
+                <a:effectLst/>
+                <a:latin typeface="Segoe UI" panose="020B0502040204020203" pitchFamily="34" charset="0"/>
+              </a:rPr>
+              <a:t>Botón con icono de (ADN) </a:t>
+            </a:r>
+            <a:r>
+              <a:rPr lang="es-ES" sz="1200" i="0" dirty="0">
+                <a:solidFill>
+                  <a:srgbClr val="222222"/>
+                </a:solidFill>
+                <a:effectLst/>
+                <a:latin typeface="Segoe UI" panose="020B0502040204020203" pitchFamily="34" charset="0"/>
+              </a:rPr>
+              <a:t>esto limpiara la información de los campos que no se necesitan para crear una nueva orden marcados en recuadro verde y nos habilitara los campos que pueden cambiar para la orden que desea crear marcados en recuadro rojo </a:t>
+            </a:r>
+            <a:r>
+              <a:rPr lang="es-ES" sz="1200" b="1" i="0" dirty="0">
+                <a:solidFill>
+                  <a:srgbClr val="222222"/>
+                </a:solidFill>
+                <a:effectLst/>
+                <a:latin typeface="Segoe UI" panose="020B0502040204020203" pitchFamily="34" charset="0"/>
+              </a:rPr>
+              <a:t>2.- </a:t>
+            </a:r>
+            <a:r>
+              <a:rPr lang="es-ES" sz="1200" i="0" dirty="0">
+                <a:solidFill>
+                  <a:srgbClr val="222222"/>
+                </a:solidFill>
+                <a:effectLst/>
+                <a:latin typeface="Segoe UI" panose="020B0502040204020203" pitchFamily="34" charset="0"/>
+              </a:rPr>
+              <a:t>Para guardar la información dar Click en el </a:t>
+            </a:r>
+            <a:r>
+              <a:rPr lang="es-ES" sz="1200" b="1" i="0" dirty="0">
+                <a:solidFill>
+                  <a:srgbClr val="222222"/>
+                </a:solidFill>
+                <a:effectLst/>
+                <a:latin typeface="Segoe UI" panose="020B0502040204020203" pitchFamily="34" charset="0"/>
+              </a:rPr>
+              <a:t>Botón con icono(Disquete).</a:t>
+            </a:r>
+            <a:endParaRPr lang="es-ES" sz="1200" b="0" i="0" dirty="0">
+              <a:solidFill>
+                <a:srgbClr val="222222"/>
+              </a:solidFill>
+              <a:effectLst/>
+              <a:latin typeface="Segoe UI" panose="020B0502040204020203" pitchFamily="34" charset="0"/>
+            </a:endParaRPr>
+          </a:p>
+        </p:txBody>
+      </p:sp>
+      <p:sp>
+        <p:nvSpPr>
+          <p:cNvPr id="7" name="Rectángulo 6">
+            <a:extLst>
+              <a:ext uri="{FF2B5EF4-FFF2-40B4-BE49-F238E27FC236}">
+                <a16:creationId xmlns:a16="http://schemas.microsoft.com/office/drawing/2014/main" id="{F522F756-74C2-4FEF-9B51-87138DDE6496}"/>
+              </a:ext>
+            </a:extLst>
+          </p:cNvPr>
+          <p:cNvSpPr/>
+          <p:nvPr/>
+        </p:nvSpPr>
+        <p:spPr>
+          <a:xfrm>
+            <a:off x="2267744" y="2027750"/>
+            <a:ext cx="288032" cy="249122"/>
+          </a:xfrm>
+          <a:prstGeom prst="rect">
+            <a:avLst/>
+          </a:prstGeom>
+          <a:noFill/>
+          <a:ln>
+            <a:solidFill>
+              <a:srgbClr val="FF0000"/>
+            </a:solidFill>
+          </a:ln>
+        </p:spPr>
+        <p:style>
+          <a:lnRef idx="2">
+            <a:schemeClr val="accent1">
+              <a:shade val="50000"/>
+            </a:schemeClr>
+          </a:lnRef>
+          <a:fillRef idx="1">
+            <a:schemeClr val="accent1"/>
+          </a:fillRef>
+          <a:effectRef idx="0">
+            <a:schemeClr val="accent1"/>
+          </a:effectRef>
+          <a:fontRef idx="minor">
+            <a:schemeClr val="lt1"/>
+          </a:fontRef>
+        </p:style>
+        <p:txBody>
+          <a:bodyPr rtlCol="0" anchor="ctr"/>
+          <a:lstStyle/>
+          <a:p>
+            <a:pPr algn="ctr"/>
+            <a:endParaRPr lang="en-US"/>
+          </a:p>
+        </p:txBody>
+      </p:sp>
+      <p:sp>
+        <p:nvSpPr>
+          <p:cNvPr id="9" name="Rectángulo 8">
+            <a:extLst>
+              <a:ext uri="{FF2B5EF4-FFF2-40B4-BE49-F238E27FC236}">
+                <a16:creationId xmlns:a16="http://schemas.microsoft.com/office/drawing/2014/main" id="{1884257A-27C4-4F93-AE66-DE7AEBB5201C}"/>
+              </a:ext>
+            </a:extLst>
+          </p:cNvPr>
+          <p:cNvSpPr/>
+          <p:nvPr/>
+        </p:nvSpPr>
+        <p:spPr>
+          <a:xfrm>
+            <a:off x="5796136" y="2996952"/>
+            <a:ext cx="3240358" cy="3479857"/>
+          </a:xfrm>
+          <a:prstGeom prst="rect">
+            <a:avLst/>
+          </a:prstGeom>
+          <a:noFill/>
+          <a:ln>
+            <a:solidFill>
+              <a:srgbClr val="FF0000"/>
+            </a:solidFill>
+          </a:ln>
+        </p:spPr>
+        <p:style>
+          <a:lnRef idx="2">
+            <a:schemeClr val="accent1">
+              <a:shade val="50000"/>
+            </a:schemeClr>
+          </a:lnRef>
+          <a:fillRef idx="1">
+            <a:schemeClr val="accent1"/>
+          </a:fillRef>
+          <a:effectRef idx="0">
+            <a:schemeClr val="accent1"/>
+          </a:effectRef>
+          <a:fontRef idx="minor">
+            <a:schemeClr val="lt1"/>
+          </a:fontRef>
+        </p:style>
+        <p:txBody>
+          <a:bodyPr rtlCol="0" anchor="ctr"/>
+          <a:lstStyle/>
+          <a:p>
+            <a:pPr algn="ctr"/>
+            <a:endParaRPr lang="en-US"/>
+          </a:p>
+        </p:txBody>
+      </p:sp>
+      <p:sp>
+        <p:nvSpPr>
+          <p:cNvPr id="11" name="Rectángulo 10">
+            <a:extLst>
+              <a:ext uri="{FF2B5EF4-FFF2-40B4-BE49-F238E27FC236}">
+                <a16:creationId xmlns:a16="http://schemas.microsoft.com/office/drawing/2014/main" id="{0C50197D-BFBE-40DD-9437-3EE15B6815E8}"/>
+              </a:ext>
+            </a:extLst>
+          </p:cNvPr>
+          <p:cNvSpPr/>
+          <p:nvPr/>
+        </p:nvSpPr>
+        <p:spPr>
+          <a:xfrm>
+            <a:off x="2987824" y="2492896"/>
+            <a:ext cx="1152128" cy="288032"/>
+          </a:xfrm>
+          <a:prstGeom prst="rect">
+            <a:avLst/>
+          </a:prstGeom>
+          <a:noFill/>
+          <a:ln>
+            <a:solidFill>
+              <a:srgbClr val="FF0000"/>
+            </a:solidFill>
+          </a:ln>
+        </p:spPr>
+        <p:style>
+          <a:lnRef idx="2">
+            <a:schemeClr val="accent1">
+              <a:shade val="50000"/>
+            </a:schemeClr>
+          </a:lnRef>
+          <a:fillRef idx="1">
+            <a:schemeClr val="accent1"/>
+          </a:fillRef>
+          <a:effectRef idx="0">
+            <a:schemeClr val="accent1"/>
+          </a:effectRef>
+          <a:fontRef idx="minor">
+            <a:schemeClr val="lt1"/>
+          </a:fontRef>
+        </p:style>
+        <p:txBody>
+          <a:bodyPr rtlCol="0" anchor="ctr"/>
+          <a:lstStyle/>
+          <a:p>
+            <a:pPr algn="ctr"/>
+            <a:endParaRPr lang="en-US"/>
+          </a:p>
+        </p:txBody>
+      </p:sp>
+      <p:sp>
+        <p:nvSpPr>
+          <p:cNvPr id="12" name="Rectángulo 11">
+            <a:extLst>
+              <a:ext uri="{FF2B5EF4-FFF2-40B4-BE49-F238E27FC236}">
+                <a16:creationId xmlns:a16="http://schemas.microsoft.com/office/drawing/2014/main" id="{F88DE048-1B7F-4F7D-9245-482714354D4E}"/>
+              </a:ext>
+            </a:extLst>
+          </p:cNvPr>
+          <p:cNvSpPr/>
+          <p:nvPr/>
+        </p:nvSpPr>
+        <p:spPr>
+          <a:xfrm>
+            <a:off x="4139952" y="2780928"/>
+            <a:ext cx="2088232" cy="216024"/>
+          </a:xfrm>
+          <a:prstGeom prst="rect">
+            <a:avLst/>
+          </a:prstGeom>
+          <a:noFill/>
+          <a:ln>
+            <a:solidFill>
+              <a:srgbClr val="FF0000"/>
+            </a:solidFill>
+          </a:ln>
+        </p:spPr>
+        <p:style>
+          <a:lnRef idx="2">
+            <a:schemeClr val="accent1">
+              <a:shade val="50000"/>
+            </a:schemeClr>
+          </a:lnRef>
+          <a:fillRef idx="1">
+            <a:schemeClr val="accent1"/>
+          </a:fillRef>
+          <a:effectRef idx="0">
+            <a:schemeClr val="accent1"/>
+          </a:effectRef>
+          <a:fontRef idx="minor">
+            <a:schemeClr val="lt1"/>
+          </a:fontRef>
+        </p:style>
+        <p:txBody>
+          <a:bodyPr rtlCol="0" anchor="ctr"/>
+          <a:lstStyle/>
+          <a:p>
+            <a:pPr algn="ctr"/>
+            <a:endParaRPr lang="en-US"/>
+          </a:p>
+        </p:txBody>
+      </p:sp>
+      <p:sp>
+        <p:nvSpPr>
+          <p:cNvPr id="13" name="Rectángulo 12">
+            <a:extLst>
+              <a:ext uri="{FF2B5EF4-FFF2-40B4-BE49-F238E27FC236}">
+                <a16:creationId xmlns:a16="http://schemas.microsoft.com/office/drawing/2014/main" id="{5E0379D7-A0B6-4216-8EDD-305A1CE6F711}"/>
+              </a:ext>
+            </a:extLst>
+          </p:cNvPr>
+          <p:cNvSpPr/>
+          <p:nvPr/>
+        </p:nvSpPr>
+        <p:spPr>
+          <a:xfrm>
+            <a:off x="1259631" y="2492896"/>
+            <a:ext cx="1728191" cy="288032"/>
+          </a:xfrm>
+          <a:prstGeom prst="rect">
+            <a:avLst/>
+          </a:prstGeom>
+          <a:noFill/>
+          <a:ln>
+            <a:solidFill>
+              <a:srgbClr val="00B050"/>
+            </a:solidFill>
+          </a:ln>
+        </p:spPr>
+        <p:style>
+          <a:lnRef idx="2">
+            <a:schemeClr val="accent1">
+              <a:shade val="50000"/>
+            </a:schemeClr>
+          </a:lnRef>
+          <a:fillRef idx="1">
+            <a:schemeClr val="accent1"/>
+          </a:fillRef>
+          <a:effectRef idx="0">
+            <a:schemeClr val="accent1"/>
+          </a:effectRef>
+          <a:fontRef idx="minor">
+            <a:schemeClr val="lt1"/>
+          </a:fontRef>
+        </p:style>
+        <p:txBody>
+          <a:bodyPr rtlCol="0" anchor="ctr"/>
+          <a:lstStyle/>
+          <a:p>
+            <a:pPr algn="ctr"/>
+            <a:endParaRPr lang="en-US" dirty="0">
+              <a:highlight>
+                <a:srgbClr val="FFFF00"/>
+              </a:highlight>
+            </a:endParaRPr>
+          </a:p>
+        </p:txBody>
+      </p:sp>
+      <p:sp>
+        <p:nvSpPr>
+          <p:cNvPr id="14" name="Rectángulo 13">
+            <a:extLst>
+              <a:ext uri="{FF2B5EF4-FFF2-40B4-BE49-F238E27FC236}">
+                <a16:creationId xmlns:a16="http://schemas.microsoft.com/office/drawing/2014/main" id="{10CB6F9D-CC32-4522-9A35-4A0FD979FE3D}"/>
+              </a:ext>
+            </a:extLst>
+          </p:cNvPr>
+          <p:cNvSpPr/>
+          <p:nvPr/>
+        </p:nvSpPr>
+        <p:spPr>
+          <a:xfrm>
+            <a:off x="1259629" y="2780928"/>
+            <a:ext cx="1080123" cy="216024"/>
+          </a:xfrm>
+          <a:prstGeom prst="rect">
+            <a:avLst/>
+          </a:prstGeom>
+          <a:noFill/>
+          <a:ln>
+            <a:solidFill>
+              <a:srgbClr val="00B050"/>
+            </a:solidFill>
+          </a:ln>
+        </p:spPr>
+        <p:style>
+          <a:lnRef idx="2">
+            <a:schemeClr val="accent1">
+              <a:shade val="50000"/>
+            </a:schemeClr>
+          </a:lnRef>
+          <a:fillRef idx="1">
+            <a:schemeClr val="accent1"/>
+          </a:fillRef>
+          <a:effectRef idx="0">
+            <a:schemeClr val="accent1"/>
+          </a:effectRef>
+          <a:fontRef idx="minor">
+            <a:schemeClr val="lt1"/>
+          </a:fontRef>
+        </p:style>
+        <p:txBody>
+          <a:bodyPr rtlCol="0" anchor="ctr"/>
+          <a:lstStyle/>
+          <a:p>
+            <a:pPr algn="ctr"/>
+            <a:endParaRPr lang="en-US" dirty="0">
+              <a:highlight>
+                <a:srgbClr val="FFFF00"/>
+              </a:highlight>
+            </a:endParaRPr>
+          </a:p>
+        </p:txBody>
+      </p:sp>
+    </p:spTree>
+    <p:extLst>
+      <p:ext uri="{BB962C8B-B14F-4D97-AF65-F5344CB8AC3E}">
+        <p14:creationId xmlns:p14="http://schemas.microsoft.com/office/powerpoint/2010/main" val="1307672231"/>
+      </p:ext>
+    </p:extLst>
+  </p:cSld>
+  <p:clrMapOvr>
+    <a:masterClrMapping/>
+  </p:clrMapOvr>
+</p:sld>
+</file>
+
+<file path=ppt/slides/slide11.xml><?xml version="1.0" encoding="utf-8"?>
+<p:sld xmlns:a="http://schemas.openxmlformats.org/drawingml/2006/main" xmlns:r="http://schemas.openxmlformats.org/officeDocument/2006/relationships" xmlns:p="http://schemas.openxmlformats.org/presentationml/2006/main">
+  <p:cSld>
+    <p:spTree>
+      <p:nvGrpSpPr>
+        <p:cNvPr id="1" name=""/>
+        <p:cNvGrpSpPr/>
+        <p:nvPr/>
+      </p:nvGrpSpPr>
+      <p:grpSpPr>
+        <a:xfrm>
+          <a:off x="0" y="0"/>
+          <a:ext cx="0" cy="0"/>
+          <a:chOff x="0" y="0"/>
+          <a:chExt cx="0" cy="0"/>
+        </a:xfrm>
+      </p:grpSpPr>
+      <p:pic>
+        <p:nvPicPr>
+          <p:cNvPr id="3" name="Imagen 2" descr="Interfaz de usuario gráfica, Aplicación, Tabla&#10;&#10;Descripción generada automáticamente">
+            <a:extLst>
+              <a:ext uri="{FF2B5EF4-FFF2-40B4-BE49-F238E27FC236}">
+                <a16:creationId xmlns:a16="http://schemas.microsoft.com/office/drawing/2014/main" id="{D48E1C84-F2FC-406E-B145-2F488C5B91F8}"/>
+              </a:ext>
+            </a:extLst>
+          </p:cNvPr>
+          <p:cNvPicPr>
+            <a:picLocks noChangeAspect="1"/>
+          </p:cNvPicPr>
+          <p:nvPr/>
+        </p:nvPicPr>
+        <p:blipFill>
+          <a:blip r:embed="rId2">
+            <a:extLst>
+              <a:ext uri="{28A0092B-C50C-407E-A947-70E740481C1C}">
+                <a14:useLocalDpi xmlns:a14="http://schemas.microsoft.com/office/drawing/2010/main" val="0"/>
+              </a:ext>
+            </a:extLst>
+          </a:blip>
+          <a:stretch>
+            <a:fillRect/>
+          </a:stretch>
+        </p:blipFill>
+        <p:spPr>
+          <a:xfrm>
+            <a:off x="1187624" y="1516143"/>
+            <a:ext cx="7812360" cy="5153218"/>
+          </a:xfrm>
+          <a:prstGeom prst="rect">
+            <a:avLst/>
+          </a:prstGeom>
+        </p:spPr>
+      </p:pic>
+      <p:sp>
+        <p:nvSpPr>
+          <p:cNvPr id="8" name="Title 1"/>
+          <p:cNvSpPr txBox="1">
+            <a:spLocks/>
+          </p:cNvSpPr>
+          <p:nvPr/>
+        </p:nvSpPr>
+        <p:spPr>
+          <a:xfrm>
+            <a:off x="1087408" y="274638"/>
+            <a:ext cx="7229008" cy="634082"/>
+          </a:xfrm>
+          <a:prstGeom prst="rect">
+            <a:avLst/>
+          </a:prstGeom>
+        </p:spPr>
+        <p:txBody>
+          <a:bodyPr/>
+          <a:lstStyle>
+            <a:lvl1pPr algn="ctr" defTabSz="914400" rtl="0" eaLnBrk="1" latinLnBrk="0" hangingPunct="1">
+              <a:spcBef>
+                <a:spcPct val="0"/>
+              </a:spcBef>
+              <a:buNone/>
+              <a:defRPr sz="4400" kern="1200">
+                <a:solidFill>
+                  <a:schemeClr val="tx1"/>
+                </a:solidFill>
+                <a:latin typeface="+mj-lt"/>
+                <a:ea typeface="+mj-ea"/>
+                <a:cs typeface="+mj-cs"/>
+              </a:defRPr>
+            </a:lvl1pPr>
+          </a:lstStyle>
+          <a:p>
+            <a:pPr algn="l"/>
+            <a:r>
+              <a:rPr lang="es-ES" sz="2000" dirty="0">
+                <a:solidFill>
+                  <a:srgbClr val="3F1900"/>
+                </a:solidFill>
+              </a:rPr>
+              <a:t>Pantalla Planning</a:t>
+            </a:r>
+            <a:endParaRPr lang="en-US" sz="2000" dirty="0">
+              <a:solidFill>
+                <a:srgbClr val="3F1900"/>
+              </a:solidFill>
+            </a:endParaRPr>
+          </a:p>
+        </p:txBody>
+      </p:sp>
+      <p:sp>
+        <p:nvSpPr>
+          <p:cNvPr id="4" name="Content Placeholder 3"/>
+          <p:cNvSpPr txBox="1">
+            <a:spLocks/>
+          </p:cNvSpPr>
+          <p:nvPr/>
+        </p:nvSpPr>
+        <p:spPr>
+          <a:xfrm>
+            <a:off x="1331640" y="1196753"/>
+            <a:ext cx="7488832" cy="5137780"/>
+          </a:xfrm>
+          <a:prstGeom prst="rect">
+            <a:avLst/>
+          </a:prstGeom>
+        </p:spPr>
+        <p:txBody>
+          <a:bodyPr>
+            <a:normAutofit/>
+          </a:bodyPr>
+          <a:lstStyle>
+            <a:lvl1pPr marL="342900" indent="-342900" algn="l" defTabSz="914400" rtl="0" eaLnBrk="1" latinLnBrk="0" hangingPunct="1">
+              <a:spcBef>
+                <a:spcPct val="20000"/>
+              </a:spcBef>
+              <a:buFont typeface="Arial" panose="020B0604020202020204" pitchFamily="34" charset="0"/>
+              <a:buChar char="•"/>
+              <a:defRPr sz="3200" kern="1200">
+                <a:solidFill>
+                  <a:schemeClr val="tx1"/>
+                </a:solidFill>
+                <a:latin typeface="+mn-lt"/>
+                <a:ea typeface="+mn-ea"/>
+                <a:cs typeface="+mn-cs"/>
+              </a:defRPr>
+            </a:lvl1pPr>
+            <a:lvl2pPr marL="742950" indent="-285750" algn="l" defTabSz="914400" rtl="0" eaLnBrk="1" latinLnBrk="0" hangingPunct="1">
+              <a:spcBef>
+                <a:spcPct val="20000"/>
+              </a:spcBef>
+              <a:buFont typeface="Arial" panose="020B0604020202020204" pitchFamily="34" charset="0"/>
+              <a:buChar char="–"/>
+              <a:defRPr sz="2800" kern="1200">
+                <a:solidFill>
+                  <a:schemeClr val="tx1"/>
+                </a:solidFill>
+                <a:latin typeface="+mn-lt"/>
+                <a:ea typeface="+mn-ea"/>
+                <a:cs typeface="+mn-cs"/>
+              </a:defRPr>
+            </a:lvl2pPr>
+            <a:lvl3pPr marL="1143000" indent="-228600" algn="l" defTabSz="914400" rtl="0" eaLnBrk="1" latinLnBrk="0" hangingPunct="1">
+              <a:spcBef>
+                <a:spcPct val="20000"/>
+              </a:spcBef>
+              <a:buFont typeface="Arial" panose="020B0604020202020204" pitchFamily="34" charset="0"/>
+              <a:buChar char="•"/>
+              <a:defRPr sz="2400" kern="1200">
+                <a:solidFill>
+                  <a:schemeClr val="tx1"/>
+                </a:solidFill>
+                <a:latin typeface="+mn-lt"/>
+                <a:ea typeface="+mn-ea"/>
+                <a:cs typeface="+mn-cs"/>
+              </a:defRPr>
+            </a:lvl3pPr>
+            <a:lvl4pPr marL="1600200" indent="-228600" algn="l" defTabSz="914400" rtl="0" eaLnBrk="1" latinLnBrk="0" hangingPunct="1">
+              <a:spcBef>
+                <a:spcPct val="20000"/>
+              </a:spcBef>
+              <a:buFont typeface="Arial" panose="020B0604020202020204" pitchFamily="34" charset="0"/>
+              <a:buChar char="–"/>
+              <a:defRPr sz="2000" kern="1200">
+                <a:solidFill>
+                  <a:schemeClr val="tx1"/>
+                </a:solidFill>
+                <a:latin typeface="+mn-lt"/>
+                <a:ea typeface="+mn-ea"/>
+                <a:cs typeface="+mn-cs"/>
+              </a:defRPr>
+            </a:lvl4pPr>
+            <a:lvl5pPr marL="2057400" indent="-228600" algn="l" defTabSz="914400" rtl="0" eaLnBrk="1" latinLnBrk="0" hangingPunct="1">
+              <a:spcBef>
+                <a:spcPct val="20000"/>
+              </a:spcBef>
+              <a:buFont typeface="Arial" panose="020B0604020202020204" pitchFamily="34" charset="0"/>
+              <a:buChar char="»"/>
+              <a:defRPr sz="2000" kern="1200">
+                <a:solidFill>
+                  <a:schemeClr val="tx1"/>
+                </a:solidFill>
+                <a:latin typeface="+mn-lt"/>
+                <a:ea typeface="+mn-ea"/>
+                <a:cs typeface="+mn-cs"/>
+              </a:defRPr>
+            </a:lvl5pPr>
+            <a:lvl6pPr marL="2514600" indent="-228600" algn="l" defTabSz="914400" rtl="0" eaLnBrk="1" latinLnBrk="0" hangingPunct="1">
+              <a:spcBef>
+                <a:spcPct val="20000"/>
+              </a:spcBef>
+              <a:buFont typeface="Arial" panose="020B0604020202020204" pitchFamily="34" charset="0"/>
+              <a:buChar char="•"/>
+              <a:defRPr sz="2000" kern="1200">
+                <a:solidFill>
+                  <a:schemeClr val="tx1"/>
+                </a:solidFill>
+                <a:latin typeface="+mn-lt"/>
+                <a:ea typeface="+mn-ea"/>
+                <a:cs typeface="+mn-cs"/>
+              </a:defRPr>
+            </a:lvl6pPr>
+            <a:lvl7pPr marL="2971800" indent="-228600" algn="l" defTabSz="914400" rtl="0" eaLnBrk="1" latinLnBrk="0" hangingPunct="1">
+              <a:spcBef>
+                <a:spcPct val="20000"/>
+              </a:spcBef>
+              <a:buFont typeface="Arial" panose="020B0604020202020204" pitchFamily="34" charset="0"/>
+              <a:buChar char="•"/>
+              <a:defRPr sz="2000" kern="1200">
+                <a:solidFill>
+                  <a:schemeClr val="tx1"/>
+                </a:solidFill>
+                <a:latin typeface="+mn-lt"/>
+                <a:ea typeface="+mn-ea"/>
+                <a:cs typeface="+mn-cs"/>
+              </a:defRPr>
+            </a:lvl7pPr>
+            <a:lvl8pPr marL="3429000" indent="-228600" algn="l" defTabSz="914400" rtl="0" eaLnBrk="1" latinLnBrk="0" hangingPunct="1">
+              <a:spcBef>
+                <a:spcPct val="20000"/>
+              </a:spcBef>
+              <a:buFont typeface="Arial" panose="020B0604020202020204" pitchFamily="34" charset="0"/>
+              <a:buChar char="•"/>
+              <a:defRPr sz="2000" kern="1200">
+                <a:solidFill>
+                  <a:schemeClr val="tx1"/>
+                </a:solidFill>
+                <a:latin typeface="+mn-lt"/>
+                <a:ea typeface="+mn-ea"/>
+                <a:cs typeface="+mn-cs"/>
+              </a:defRPr>
+            </a:lvl8pPr>
+            <a:lvl9pPr marL="3886200" indent="-228600" algn="l" defTabSz="914400" rtl="0" eaLnBrk="1" latinLnBrk="0" hangingPunct="1">
+              <a:spcBef>
+                <a:spcPct val="20000"/>
+              </a:spcBef>
+              <a:buFont typeface="Arial" panose="020B0604020202020204" pitchFamily="34" charset="0"/>
+              <a:buChar char="•"/>
+              <a:defRPr sz="2000" kern="1200">
+                <a:solidFill>
+                  <a:schemeClr val="tx1"/>
+                </a:solidFill>
+                <a:latin typeface="+mn-lt"/>
+                <a:ea typeface="+mn-ea"/>
+                <a:cs typeface="+mn-cs"/>
+              </a:defRPr>
+            </a:lvl9pPr>
+          </a:lstStyle>
+          <a:p>
+            <a:pPr marL="0" indent="0" algn="just">
+              <a:buFont typeface="Arial" panose="020B0604020202020204" pitchFamily="34" charset="0"/>
+              <a:buNone/>
+            </a:pPr>
+            <a:endParaRPr lang="en-US" sz="2000" i="1"/>
+          </a:p>
+        </p:txBody>
+      </p:sp>
+      <p:sp>
+        <p:nvSpPr>
+          <p:cNvPr id="10" name="Rectangle 9"/>
+          <p:cNvSpPr/>
+          <p:nvPr/>
+        </p:nvSpPr>
+        <p:spPr>
+          <a:xfrm>
+            <a:off x="1115615" y="1054477"/>
+            <a:ext cx="7920879" cy="461665"/>
+          </a:xfrm>
+          <a:prstGeom prst="rect">
+            <a:avLst/>
+          </a:prstGeom>
+        </p:spPr>
+        <p:txBody>
+          <a:bodyPr wrap="square">
+            <a:spAutoFit/>
+          </a:bodyPr>
+          <a:lstStyle/>
+          <a:p>
+            <a:pPr>
+              <a:buFont typeface="Arial" panose="020B0604020202020204" pitchFamily="34" charset="0"/>
+              <a:buChar char="•"/>
+            </a:pPr>
+            <a:r>
+              <a:rPr lang="es-ES" sz="1200" b="1" i="0" dirty="0">
+                <a:solidFill>
+                  <a:srgbClr val="222222"/>
+                </a:solidFill>
+                <a:effectLst/>
+                <a:latin typeface="Segoe UI" panose="020B0502040204020203" pitchFamily="34" charset="0"/>
+              </a:rPr>
+              <a:t> Acción Eliminar Orden: </a:t>
+            </a:r>
+            <a:r>
+              <a:rPr lang="es-ES" sz="1200" i="0" dirty="0">
+                <a:solidFill>
+                  <a:srgbClr val="222222"/>
+                </a:solidFill>
+                <a:effectLst/>
+                <a:latin typeface="Segoe UI" panose="020B0502040204020203" pitchFamily="34" charset="0"/>
+              </a:rPr>
+              <a:t>Una vez</a:t>
+            </a:r>
+            <a:r>
+              <a:rPr lang="es-ES" sz="1200" dirty="0">
+                <a:solidFill>
+                  <a:srgbClr val="222222"/>
+                </a:solidFill>
+                <a:latin typeface="Segoe UI" panose="020B0502040204020203" pitchFamily="34" charset="0"/>
+              </a:rPr>
+              <a:t> </a:t>
+            </a:r>
+            <a:r>
+              <a:rPr lang="es-ES" sz="1200" i="0" dirty="0">
+                <a:solidFill>
+                  <a:srgbClr val="222222"/>
+                </a:solidFill>
+                <a:effectLst/>
+                <a:latin typeface="Segoe UI" panose="020B0502040204020203" pitchFamily="34" charset="0"/>
+              </a:rPr>
+              <a:t>cargada la información de la orden que desea Eliminar</a:t>
+            </a:r>
+            <a:r>
+              <a:rPr lang="es-ES" sz="1200" dirty="0">
+                <a:solidFill>
+                  <a:srgbClr val="222222"/>
+                </a:solidFill>
+                <a:latin typeface="Segoe UI" panose="020B0502040204020203" pitchFamily="34" charset="0"/>
+              </a:rPr>
+              <a:t>, </a:t>
+            </a:r>
+            <a:r>
+              <a:rPr lang="es-ES" sz="1200" b="1" dirty="0">
+                <a:solidFill>
+                  <a:srgbClr val="222222"/>
+                </a:solidFill>
+                <a:latin typeface="Segoe UI" panose="020B0502040204020203" pitchFamily="34" charset="0"/>
+              </a:rPr>
+              <a:t>1.- </a:t>
+            </a:r>
+            <a:r>
+              <a:rPr lang="es-ES" sz="1200" dirty="0">
+                <a:solidFill>
+                  <a:srgbClr val="222222"/>
+                </a:solidFill>
+                <a:latin typeface="Segoe UI" panose="020B0502040204020203" pitchFamily="34" charset="0"/>
+              </a:rPr>
+              <a:t>Dar Click sobre el </a:t>
+            </a:r>
+            <a:r>
+              <a:rPr lang="es-ES" sz="1200" b="1" i="0" dirty="0">
+                <a:solidFill>
+                  <a:srgbClr val="222222"/>
+                </a:solidFill>
+                <a:effectLst/>
+                <a:latin typeface="Segoe UI" panose="020B0502040204020203" pitchFamily="34" charset="0"/>
+              </a:rPr>
+              <a:t>Botón con icono de (X) </a:t>
+            </a:r>
+            <a:r>
+              <a:rPr lang="es-ES" sz="1200" i="0" dirty="0">
+                <a:solidFill>
+                  <a:srgbClr val="222222"/>
+                </a:solidFill>
+                <a:effectLst/>
+                <a:latin typeface="Segoe UI" panose="020B0502040204020203" pitchFamily="34" charset="0"/>
+              </a:rPr>
+              <a:t>esto permitirá Eliminar/Borrar la orden.</a:t>
+            </a:r>
+          </a:p>
+        </p:txBody>
+      </p:sp>
+      <p:sp>
+        <p:nvSpPr>
+          <p:cNvPr id="7" name="Rectángulo 6">
+            <a:extLst>
+              <a:ext uri="{FF2B5EF4-FFF2-40B4-BE49-F238E27FC236}">
+                <a16:creationId xmlns:a16="http://schemas.microsoft.com/office/drawing/2014/main" id="{F522F756-74C2-4FEF-9B51-87138DDE6496}"/>
+              </a:ext>
+            </a:extLst>
+          </p:cNvPr>
+          <p:cNvSpPr/>
+          <p:nvPr/>
+        </p:nvSpPr>
+        <p:spPr>
+          <a:xfrm>
+            <a:off x="1979712" y="1700808"/>
+            <a:ext cx="288032" cy="249122"/>
+          </a:xfrm>
+          <a:prstGeom prst="rect">
+            <a:avLst/>
+          </a:prstGeom>
+          <a:noFill/>
+          <a:ln>
+            <a:solidFill>
+              <a:srgbClr val="FF0000"/>
+            </a:solidFill>
+          </a:ln>
+        </p:spPr>
+        <p:style>
+          <a:lnRef idx="2">
+            <a:schemeClr val="accent1">
+              <a:shade val="50000"/>
+            </a:schemeClr>
+          </a:lnRef>
+          <a:fillRef idx="1">
+            <a:schemeClr val="accent1"/>
+          </a:fillRef>
+          <a:effectRef idx="0">
+            <a:schemeClr val="accent1"/>
+          </a:effectRef>
+          <a:fontRef idx="minor">
+            <a:schemeClr val="lt1"/>
+          </a:fontRef>
+        </p:style>
+        <p:txBody>
+          <a:bodyPr rtlCol="0" anchor="ctr"/>
+          <a:lstStyle/>
+          <a:p>
+            <a:pPr algn="ctr"/>
+            <a:endParaRPr lang="en-US"/>
+          </a:p>
+        </p:txBody>
+      </p:sp>
+    </p:spTree>
+    <p:extLst>
+      <p:ext uri="{BB962C8B-B14F-4D97-AF65-F5344CB8AC3E}">
+        <p14:creationId xmlns:p14="http://schemas.microsoft.com/office/powerpoint/2010/main" val="46686908"/>
+      </p:ext>
+    </p:extLst>
+  </p:cSld>
+  <p:clrMapOvr>
+    <a:masterClrMapping/>
+  </p:clrMapOvr>
+</p:sld>
+</file>
+
+<file path=ppt/slides/slide12.xml><?xml version="1.0" encoding="utf-8"?>
+<p:sld xmlns:a="http://schemas.openxmlformats.org/drawingml/2006/main" xmlns:r="http://schemas.openxmlformats.org/officeDocument/2006/relationships" xmlns:p="http://schemas.openxmlformats.org/presentationml/2006/main">
+  <p:cSld>
+    <p:spTree>
+      <p:nvGrpSpPr>
+        <p:cNvPr id="1" name=""/>
+        <p:cNvGrpSpPr/>
+        <p:nvPr/>
+      </p:nvGrpSpPr>
+      <p:grpSpPr>
+        <a:xfrm>
+          <a:off x="0" y="0"/>
+          <a:ext cx="0" cy="0"/>
+          <a:chOff x="0" y="0"/>
+          <a:chExt cx="0" cy="0"/>
+        </a:xfrm>
+      </p:grpSpPr>
+      <p:sp>
+        <p:nvSpPr>
+          <p:cNvPr id="5" name="Title 1"/>
+          <p:cNvSpPr txBox="1">
+            <a:spLocks/>
+          </p:cNvSpPr>
+          <p:nvPr/>
+        </p:nvSpPr>
+        <p:spPr>
+          <a:xfrm>
+            <a:off x="1187624" y="2564904"/>
+            <a:ext cx="7772400" cy="1470025"/>
+          </a:xfrm>
+          <a:prstGeom prst="rect">
+            <a:avLst/>
+          </a:prstGeom>
+        </p:spPr>
+        <p:txBody>
+          <a:bodyPr vert="horz" lIns="91440" tIns="45720" rIns="91440" bIns="45720" rtlCol="0" anchor="ctr">
+            <a:normAutofit/>
+          </a:bodyPr>
+          <a:lstStyle>
+            <a:lvl1pPr algn="ctr" defTabSz="914400" rtl="0" eaLnBrk="1" latinLnBrk="0" hangingPunct="1">
+              <a:spcBef>
+                <a:spcPct val="0"/>
+              </a:spcBef>
+              <a:buNone/>
+              <a:defRPr sz="4400" kern="1200">
+                <a:solidFill>
+                  <a:schemeClr val="tx1"/>
+                </a:solidFill>
+                <a:latin typeface="+mj-lt"/>
+                <a:ea typeface="+mj-ea"/>
+                <a:cs typeface="+mj-cs"/>
+              </a:defRPr>
+            </a:lvl1pPr>
+          </a:lstStyle>
+          <a:p>
+            <a:r>
+              <a:rPr lang="es-MX" b="1" dirty="0">
+                <a:latin typeface="Century Gothic" panose="020B0502020202020204" pitchFamily="34" charset="0"/>
+              </a:rPr>
+              <a:t>19/04/2021 – 23/04/2021</a:t>
+            </a:r>
+            <a:endParaRPr lang="es-MX" dirty="0">
+              <a:latin typeface="Century Gothic" panose="020B0502020202020204" pitchFamily="34" charset="0"/>
+            </a:endParaRPr>
+          </a:p>
+        </p:txBody>
+      </p:sp>
+    </p:spTree>
+    <p:extLst>
+      <p:ext uri="{BB962C8B-B14F-4D97-AF65-F5344CB8AC3E}">
+        <p14:creationId xmlns:p14="http://schemas.microsoft.com/office/powerpoint/2010/main" val="1388132571"/>
+      </p:ext>
+    </p:extLst>
+  </p:cSld>
+  <p:clrMapOvr>
+    <a:masterClrMapping/>
+  </p:clrMapOvr>
+</p:sld>
+</file>
+
+<file path=ppt/slides/slide13.xml><?xml version="1.0" encoding="utf-8"?>
+<p:sld xmlns:a="http://schemas.openxmlformats.org/drawingml/2006/main" xmlns:r="http://schemas.openxmlformats.org/officeDocument/2006/relationships" xmlns:p="http://schemas.openxmlformats.org/presentationml/2006/main">
+  <p:cSld>
+    <p:spTree>
+      <p:nvGrpSpPr>
+        <p:cNvPr id="1" name=""/>
+        <p:cNvGrpSpPr/>
+        <p:nvPr/>
+      </p:nvGrpSpPr>
+      <p:grpSpPr>
+        <a:xfrm>
+          <a:off x="0" y="0"/>
+          <a:ext cx="0" cy="0"/>
+          <a:chOff x="0" y="0"/>
+          <a:chExt cx="0" cy="0"/>
+        </a:xfrm>
+      </p:grpSpPr>
+      <p:sp>
+        <p:nvSpPr>
+          <p:cNvPr id="8" name="Title 1"/>
+          <p:cNvSpPr txBox="1">
+            <a:spLocks/>
+          </p:cNvSpPr>
+          <p:nvPr/>
+        </p:nvSpPr>
+        <p:spPr>
+          <a:xfrm>
+            <a:off x="1087408" y="274638"/>
+            <a:ext cx="7229008" cy="634082"/>
+          </a:xfrm>
+          <a:prstGeom prst="rect">
+            <a:avLst/>
+          </a:prstGeom>
+        </p:spPr>
+        <p:txBody>
+          <a:bodyPr/>
+          <a:lstStyle>
+            <a:lvl1pPr algn="ctr" defTabSz="914400" rtl="0" eaLnBrk="1" latinLnBrk="0" hangingPunct="1">
+              <a:spcBef>
+                <a:spcPct val="0"/>
+              </a:spcBef>
+              <a:buNone/>
+              <a:defRPr sz="4400" kern="1200">
+                <a:solidFill>
+                  <a:schemeClr val="tx1"/>
+                </a:solidFill>
+                <a:latin typeface="+mj-lt"/>
+                <a:ea typeface="+mj-ea"/>
+                <a:cs typeface="+mj-cs"/>
+              </a:defRPr>
+            </a:lvl1pPr>
+          </a:lstStyle>
+          <a:p>
+            <a:pPr algn="l"/>
+            <a:r>
+              <a:rPr lang="es-ES" sz="2000" dirty="0">
+                <a:solidFill>
+                  <a:srgbClr val="3F1900"/>
+                </a:solidFill>
+              </a:rPr>
+              <a:t>Pantalla Planning</a:t>
+            </a:r>
+            <a:endParaRPr lang="en-US" sz="2000" dirty="0">
+              <a:solidFill>
+                <a:srgbClr val="3F1900"/>
+              </a:solidFill>
+            </a:endParaRPr>
+          </a:p>
+        </p:txBody>
+      </p:sp>
+      <p:sp>
+        <p:nvSpPr>
+          <p:cNvPr id="4" name="Content Placeholder 3"/>
+          <p:cNvSpPr txBox="1">
+            <a:spLocks/>
+          </p:cNvSpPr>
+          <p:nvPr/>
+        </p:nvSpPr>
+        <p:spPr>
+          <a:xfrm>
+            <a:off x="1331640" y="1196753"/>
+            <a:ext cx="7488832" cy="5137780"/>
+          </a:xfrm>
+          <a:prstGeom prst="rect">
+            <a:avLst/>
+          </a:prstGeom>
+        </p:spPr>
+        <p:txBody>
+          <a:bodyPr>
+            <a:normAutofit/>
+          </a:bodyPr>
+          <a:lstStyle>
+            <a:lvl1pPr marL="342900" indent="-342900" algn="l" defTabSz="914400" rtl="0" eaLnBrk="1" latinLnBrk="0" hangingPunct="1">
+              <a:spcBef>
+                <a:spcPct val="20000"/>
+              </a:spcBef>
+              <a:buFont typeface="Arial" panose="020B0604020202020204" pitchFamily="34" charset="0"/>
+              <a:buChar char="•"/>
+              <a:defRPr sz="3200" kern="1200">
+                <a:solidFill>
+                  <a:schemeClr val="tx1"/>
+                </a:solidFill>
+                <a:latin typeface="+mn-lt"/>
+                <a:ea typeface="+mn-ea"/>
+                <a:cs typeface="+mn-cs"/>
+              </a:defRPr>
+            </a:lvl1pPr>
+            <a:lvl2pPr marL="742950" indent="-285750" algn="l" defTabSz="914400" rtl="0" eaLnBrk="1" latinLnBrk="0" hangingPunct="1">
+              <a:spcBef>
+                <a:spcPct val="20000"/>
+              </a:spcBef>
+              <a:buFont typeface="Arial" panose="020B0604020202020204" pitchFamily="34" charset="0"/>
+              <a:buChar char="–"/>
+              <a:defRPr sz="2800" kern="1200">
+                <a:solidFill>
+                  <a:schemeClr val="tx1"/>
+                </a:solidFill>
+                <a:latin typeface="+mn-lt"/>
+                <a:ea typeface="+mn-ea"/>
+                <a:cs typeface="+mn-cs"/>
+              </a:defRPr>
+            </a:lvl2pPr>
+            <a:lvl3pPr marL="1143000" indent="-228600" algn="l" defTabSz="914400" rtl="0" eaLnBrk="1" latinLnBrk="0" hangingPunct="1">
+              <a:spcBef>
+                <a:spcPct val="20000"/>
+              </a:spcBef>
+              <a:buFont typeface="Arial" panose="020B0604020202020204" pitchFamily="34" charset="0"/>
+              <a:buChar char="•"/>
+              <a:defRPr sz="2400" kern="1200">
+                <a:solidFill>
+                  <a:schemeClr val="tx1"/>
+                </a:solidFill>
+                <a:latin typeface="+mn-lt"/>
+                <a:ea typeface="+mn-ea"/>
+                <a:cs typeface="+mn-cs"/>
+              </a:defRPr>
+            </a:lvl3pPr>
+            <a:lvl4pPr marL="1600200" indent="-228600" algn="l" defTabSz="914400" rtl="0" eaLnBrk="1" latinLnBrk="0" hangingPunct="1">
+              <a:spcBef>
+                <a:spcPct val="20000"/>
+              </a:spcBef>
+              <a:buFont typeface="Arial" panose="020B0604020202020204" pitchFamily="34" charset="0"/>
+              <a:buChar char="–"/>
+              <a:defRPr sz="2000" kern="1200">
+                <a:solidFill>
+                  <a:schemeClr val="tx1"/>
+                </a:solidFill>
+                <a:latin typeface="+mn-lt"/>
+                <a:ea typeface="+mn-ea"/>
+                <a:cs typeface="+mn-cs"/>
+              </a:defRPr>
+            </a:lvl4pPr>
+            <a:lvl5pPr marL="2057400" indent="-228600" algn="l" defTabSz="914400" rtl="0" eaLnBrk="1" latinLnBrk="0" hangingPunct="1">
+              <a:spcBef>
+                <a:spcPct val="20000"/>
+              </a:spcBef>
+              <a:buFont typeface="Arial" panose="020B0604020202020204" pitchFamily="34" charset="0"/>
+              <a:buChar char="»"/>
+              <a:defRPr sz="2000" kern="1200">
+                <a:solidFill>
+                  <a:schemeClr val="tx1"/>
+                </a:solidFill>
+                <a:latin typeface="+mn-lt"/>
+                <a:ea typeface="+mn-ea"/>
+                <a:cs typeface="+mn-cs"/>
+              </a:defRPr>
+            </a:lvl5pPr>
+            <a:lvl6pPr marL="2514600" indent="-228600" algn="l" defTabSz="914400" rtl="0" eaLnBrk="1" latinLnBrk="0" hangingPunct="1">
+              <a:spcBef>
+                <a:spcPct val="20000"/>
+              </a:spcBef>
+              <a:buFont typeface="Arial" panose="020B0604020202020204" pitchFamily="34" charset="0"/>
+              <a:buChar char="•"/>
+              <a:defRPr sz="2000" kern="1200">
+                <a:solidFill>
+                  <a:schemeClr val="tx1"/>
+                </a:solidFill>
+                <a:latin typeface="+mn-lt"/>
+                <a:ea typeface="+mn-ea"/>
+                <a:cs typeface="+mn-cs"/>
+              </a:defRPr>
+            </a:lvl6pPr>
+            <a:lvl7pPr marL="2971800" indent="-228600" algn="l" defTabSz="914400" rtl="0" eaLnBrk="1" latinLnBrk="0" hangingPunct="1">
+              <a:spcBef>
+                <a:spcPct val="20000"/>
+              </a:spcBef>
+              <a:buFont typeface="Arial" panose="020B0604020202020204" pitchFamily="34" charset="0"/>
+              <a:buChar char="•"/>
+              <a:defRPr sz="2000" kern="1200">
+                <a:solidFill>
+                  <a:schemeClr val="tx1"/>
+                </a:solidFill>
+                <a:latin typeface="+mn-lt"/>
+                <a:ea typeface="+mn-ea"/>
+                <a:cs typeface="+mn-cs"/>
+              </a:defRPr>
+            </a:lvl7pPr>
+            <a:lvl8pPr marL="3429000" indent="-228600" algn="l" defTabSz="914400" rtl="0" eaLnBrk="1" latinLnBrk="0" hangingPunct="1">
+              <a:spcBef>
+                <a:spcPct val="20000"/>
+              </a:spcBef>
+              <a:buFont typeface="Arial" panose="020B0604020202020204" pitchFamily="34" charset="0"/>
+              <a:buChar char="•"/>
+              <a:defRPr sz="2000" kern="1200">
+                <a:solidFill>
+                  <a:schemeClr val="tx1"/>
+                </a:solidFill>
+                <a:latin typeface="+mn-lt"/>
+                <a:ea typeface="+mn-ea"/>
+                <a:cs typeface="+mn-cs"/>
+              </a:defRPr>
+            </a:lvl8pPr>
+            <a:lvl9pPr marL="3886200" indent="-228600" algn="l" defTabSz="914400" rtl="0" eaLnBrk="1" latinLnBrk="0" hangingPunct="1">
+              <a:spcBef>
+                <a:spcPct val="20000"/>
+              </a:spcBef>
+              <a:buFont typeface="Arial" panose="020B0604020202020204" pitchFamily="34" charset="0"/>
+              <a:buChar char="•"/>
+              <a:defRPr sz="2000" kern="1200">
+                <a:solidFill>
+                  <a:schemeClr val="tx1"/>
+                </a:solidFill>
+                <a:latin typeface="+mn-lt"/>
+                <a:ea typeface="+mn-ea"/>
+                <a:cs typeface="+mn-cs"/>
+              </a:defRPr>
+            </a:lvl9pPr>
+          </a:lstStyle>
+          <a:p>
+            <a:pPr marL="0" indent="0" algn="just">
+              <a:buFont typeface="Arial" panose="020B0604020202020204" pitchFamily="34" charset="0"/>
+              <a:buNone/>
+            </a:pPr>
+            <a:endParaRPr lang="en-US" sz="2000" i="1"/>
+          </a:p>
+        </p:txBody>
+      </p:sp>
+      <p:sp>
+        <p:nvSpPr>
+          <p:cNvPr id="10" name="Rectangle 9"/>
+          <p:cNvSpPr/>
+          <p:nvPr/>
+        </p:nvSpPr>
+        <p:spPr>
+          <a:xfrm>
+            <a:off x="1115615" y="1054477"/>
+            <a:ext cx="7920879" cy="1015663"/>
+          </a:xfrm>
+          <a:prstGeom prst="rect">
+            <a:avLst/>
+          </a:prstGeom>
+        </p:spPr>
+        <p:txBody>
+          <a:bodyPr wrap="square">
+            <a:spAutoFit/>
+          </a:bodyPr>
+          <a:lstStyle/>
+          <a:p>
+            <a:pPr>
+              <a:buFont typeface="Arial" panose="020B0604020202020204" pitchFamily="34" charset="0"/>
+              <a:buChar char="•"/>
+            </a:pPr>
+            <a:r>
+              <a:rPr lang="es-ES" sz="1200" b="0" i="0" dirty="0">
+                <a:solidFill>
+                  <a:srgbClr val="222222"/>
+                </a:solidFill>
+                <a:effectLst/>
+                <a:latin typeface="Segoe UI" panose="020B0502040204020203" pitchFamily="34" charset="0"/>
+              </a:rPr>
+              <a:t> Se inicio con el rediseño de la pantalla esto incluye cambios en lo visual como en lo funcional, en la imagen se presenta una propuesta de la nueva Vista, en la parte superior izquierda aparece </a:t>
+            </a:r>
+            <a:r>
+              <a:rPr lang="es-ES" sz="1200" i="0" dirty="0">
+                <a:solidFill>
+                  <a:srgbClr val="222222"/>
+                </a:solidFill>
+                <a:effectLst/>
+                <a:latin typeface="Segoe UI" panose="020B0502040204020203" pitchFamily="34" charset="0"/>
+              </a:rPr>
+              <a:t>un</a:t>
+            </a:r>
+            <a:r>
+              <a:rPr lang="es-ES" sz="1200" b="1" i="0" dirty="0">
+                <a:solidFill>
+                  <a:srgbClr val="222222"/>
+                </a:solidFill>
+                <a:effectLst/>
+                <a:latin typeface="Segoe UI" panose="020B0502040204020203" pitchFamily="34" charset="0"/>
+              </a:rPr>
+              <a:t> Botón con Icono de (+)</a:t>
+            </a:r>
+            <a:r>
+              <a:rPr lang="es-ES" sz="1200" b="0" i="0" dirty="0">
+                <a:solidFill>
+                  <a:srgbClr val="222222"/>
+                </a:solidFill>
+                <a:effectLst/>
+                <a:latin typeface="Segoe UI" panose="020B0502040204020203" pitchFamily="34" charset="0"/>
+              </a:rPr>
+              <a:t> el cual servirá para crear una orden, </a:t>
+            </a:r>
+            <a:r>
+              <a:rPr lang="es-ES" sz="1200" i="0" dirty="0">
+                <a:solidFill>
+                  <a:srgbClr val="222222"/>
+                </a:solidFill>
+                <a:effectLst/>
+                <a:latin typeface="Segoe UI" panose="020B0502040204020203" pitchFamily="34" charset="0"/>
+              </a:rPr>
+              <a:t>el</a:t>
+            </a:r>
+            <a:r>
+              <a:rPr lang="es-ES" sz="1200" b="1" i="0" dirty="0">
+                <a:solidFill>
+                  <a:srgbClr val="222222"/>
+                </a:solidFill>
+                <a:effectLst/>
+                <a:latin typeface="Segoe UI" panose="020B0502040204020203" pitchFamily="34" charset="0"/>
+              </a:rPr>
+              <a:t> Botón con icono de (Lápiz) </a:t>
+            </a:r>
+            <a:r>
+              <a:rPr lang="es-ES" sz="1200" b="0" i="0" dirty="0">
+                <a:solidFill>
+                  <a:srgbClr val="222222"/>
+                </a:solidFill>
+                <a:effectLst/>
+                <a:latin typeface="Segoe UI" panose="020B0502040204020203" pitchFamily="34" charset="0"/>
+              </a:rPr>
+              <a:t>servirá para Editar/Modificar una Orden, el </a:t>
+            </a:r>
+            <a:r>
+              <a:rPr lang="es-ES" sz="1200" b="1" i="0" dirty="0">
+                <a:solidFill>
+                  <a:srgbClr val="222222"/>
+                </a:solidFill>
+                <a:effectLst/>
+                <a:latin typeface="Segoe UI" panose="020B0502040204020203" pitchFamily="34" charset="0"/>
+              </a:rPr>
+              <a:t>Botón con icono(Lupa) </a:t>
+            </a:r>
+            <a:r>
+              <a:rPr lang="es-ES" sz="1200" b="0" i="0" dirty="0">
+                <a:solidFill>
+                  <a:srgbClr val="222222"/>
+                </a:solidFill>
+                <a:effectLst/>
+                <a:latin typeface="Segoe UI" panose="020B0502040204020203" pitchFamily="34" charset="0"/>
+              </a:rPr>
+              <a:t>permitirá realizar la Búsqueda de una orden y el </a:t>
+            </a:r>
+            <a:r>
+              <a:rPr lang="es-ES" sz="1200" b="1" i="0" dirty="0">
+                <a:solidFill>
+                  <a:srgbClr val="222222"/>
+                </a:solidFill>
+                <a:effectLst/>
+                <a:latin typeface="Segoe UI" panose="020B0502040204020203" pitchFamily="34" charset="0"/>
+              </a:rPr>
+              <a:t>Botón con icono(Disquete) </a:t>
+            </a:r>
+            <a:r>
+              <a:rPr lang="es-ES" sz="1200" b="0" i="0" dirty="0">
+                <a:solidFill>
+                  <a:srgbClr val="222222"/>
+                </a:solidFill>
+                <a:effectLst/>
+                <a:latin typeface="Segoe UI" panose="020B0502040204020203" pitchFamily="34" charset="0"/>
+              </a:rPr>
+              <a:t>que aparece en la parte superior derecha será para guardar la información de la orden</a:t>
+            </a:r>
+            <a:r>
+              <a:rPr lang="es-ES" sz="1200" dirty="0">
+                <a:solidFill>
+                  <a:srgbClr val="222222"/>
+                </a:solidFill>
+                <a:latin typeface="Segoe UI" panose="020B0502040204020203" pitchFamily="34" charset="0"/>
+              </a:rPr>
+              <a:t>.</a:t>
+            </a:r>
+            <a:endParaRPr lang="es-ES" sz="1200" b="0" i="0" dirty="0">
+              <a:solidFill>
+                <a:srgbClr val="222222"/>
+              </a:solidFill>
+              <a:effectLst/>
+              <a:latin typeface="Segoe UI" panose="020B0502040204020203" pitchFamily="34" charset="0"/>
+            </a:endParaRPr>
+          </a:p>
+        </p:txBody>
+      </p:sp>
+      <p:pic>
+        <p:nvPicPr>
+          <p:cNvPr id="3" name="Imagen 2" descr="Interfaz de usuario gráfica, Aplicación, Tabla, Excel&#10;&#10;Descripción generada automáticamente">
+            <a:extLst>
+              <a:ext uri="{FF2B5EF4-FFF2-40B4-BE49-F238E27FC236}">
+                <a16:creationId xmlns:a16="http://schemas.microsoft.com/office/drawing/2014/main" id="{DB444C37-12FF-49CB-BEE5-193A8CA5CBFB}"/>
+              </a:ext>
+            </a:extLst>
+          </p:cNvPr>
+          <p:cNvPicPr>
+            <a:picLocks noChangeAspect="1"/>
+          </p:cNvPicPr>
+          <p:nvPr/>
+        </p:nvPicPr>
+        <p:blipFill>
+          <a:blip r:embed="rId2">
+            <a:extLst>
+              <a:ext uri="{28A0092B-C50C-407E-A947-70E740481C1C}">
+                <a14:useLocalDpi xmlns:a14="http://schemas.microsoft.com/office/drawing/2010/main" val="0"/>
+              </a:ext>
+            </a:extLst>
+          </a:blip>
+          <a:stretch>
+            <a:fillRect/>
+          </a:stretch>
+        </p:blipFill>
+        <p:spPr>
+          <a:xfrm>
+            <a:off x="1115614" y="2070140"/>
+            <a:ext cx="7920879" cy="4743236"/>
+          </a:xfrm>
+          <a:prstGeom prst="rect">
+            <a:avLst/>
+          </a:prstGeom>
+        </p:spPr>
+      </p:pic>
+    </p:spTree>
+    <p:extLst>
+      <p:ext uri="{BB962C8B-B14F-4D97-AF65-F5344CB8AC3E}">
+        <p14:creationId xmlns:p14="http://schemas.microsoft.com/office/powerpoint/2010/main" val="2260937188"/>
       </p:ext>
     </p:extLst>
   </p:cSld>
@@ -3581,6 +5315,1714 @@
                   <a:srgbClr val="3F1900"/>
                 </a:solidFill>
               </a:rPr>
+              <a:t>Pantalla Labels</a:t>
+            </a:r>
+            <a:endParaRPr lang="en-US" sz="2000" dirty="0">
+              <a:solidFill>
+                <a:srgbClr val="3F1900"/>
+              </a:solidFill>
+            </a:endParaRPr>
+          </a:p>
+        </p:txBody>
+      </p:sp>
+      <p:sp>
+        <p:nvSpPr>
+          <p:cNvPr id="4" name="Content Placeholder 3"/>
+          <p:cNvSpPr txBox="1">
+            <a:spLocks/>
+          </p:cNvSpPr>
+          <p:nvPr/>
+        </p:nvSpPr>
+        <p:spPr>
+          <a:xfrm>
+            <a:off x="1331640" y="1196753"/>
+            <a:ext cx="7488832" cy="5137780"/>
+          </a:xfrm>
+          <a:prstGeom prst="rect">
+            <a:avLst/>
+          </a:prstGeom>
+        </p:spPr>
+        <p:txBody>
+          <a:bodyPr>
+            <a:normAutofit/>
+          </a:bodyPr>
+          <a:lstStyle>
+            <a:lvl1pPr marL="342900" indent="-342900" algn="l" defTabSz="914400" rtl="0" eaLnBrk="1" latinLnBrk="0" hangingPunct="1">
+              <a:spcBef>
+                <a:spcPct val="20000"/>
+              </a:spcBef>
+              <a:buFont typeface="Arial" panose="020B0604020202020204" pitchFamily="34" charset="0"/>
+              <a:buChar char="•"/>
+              <a:defRPr sz="3200" kern="1200">
+                <a:solidFill>
+                  <a:schemeClr val="tx1"/>
+                </a:solidFill>
+                <a:latin typeface="+mn-lt"/>
+                <a:ea typeface="+mn-ea"/>
+                <a:cs typeface="+mn-cs"/>
+              </a:defRPr>
+            </a:lvl1pPr>
+            <a:lvl2pPr marL="742950" indent="-285750" algn="l" defTabSz="914400" rtl="0" eaLnBrk="1" latinLnBrk="0" hangingPunct="1">
+              <a:spcBef>
+                <a:spcPct val="20000"/>
+              </a:spcBef>
+              <a:buFont typeface="Arial" panose="020B0604020202020204" pitchFamily="34" charset="0"/>
+              <a:buChar char="–"/>
+              <a:defRPr sz="2800" kern="1200">
+                <a:solidFill>
+                  <a:schemeClr val="tx1"/>
+                </a:solidFill>
+                <a:latin typeface="+mn-lt"/>
+                <a:ea typeface="+mn-ea"/>
+                <a:cs typeface="+mn-cs"/>
+              </a:defRPr>
+            </a:lvl2pPr>
+            <a:lvl3pPr marL="1143000" indent="-228600" algn="l" defTabSz="914400" rtl="0" eaLnBrk="1" latinLnBrk="0" hangingPunct="1">
+              <a:spcBef>
+                <a:spcPct val="20000"/>
+              </a:spcBef>
+              <a:buFont typeface="Arial" panose="020B0604020202020204" pitchFamily="34" charset="0"/>
+              <a:buChar char="•"/>
+              <a:defRPr sz="2400" kern="1200">
+                <a:solidFill>
+                  <a:schemeClr val="tx1"/>
+                </a:solidFill>
+                <a:latin typeface="+mn-lt"/>
+                <a:ea typeface="+mn-ea"/>
+                <a:cs typeface="+mn-cs"/>
+              </a:defRPr>
+            </a:lvl3pPr>
+            <a:lvl4pPr marL="1600200" indent="-228600" algn="l" defTabSz="914400" rtl="0" eaLnBrk="1" latinLnBrk="0" hangingPunct="1">
+              <a:spcBef>
+                <a:spcPct val="20000"/>
+              </a:spcBef>
+              <a:buFont typeface="Arial" panose="020B0604020202020204" pitchFamily="34" charset="0"/>
+              <a:buChar char="–"/>
+              <a:defRPr sz="2000" kern="1200">
+                <a:solidFill>
+                  <a:schemeClr val="tx1"/>
+                </a:solidFill>
+                <a:latin typeface="+mn-lt"/>
+                <a:ea typeface="+mn-ea"/>
+                <a:cs typeface="+mn-cs"/>
+              </a:defRPr>
+            </a:lvl4pPr>
+            <a:lvl5pPr marL="2057400" indent="-228600" algn="l" defTabSz="914400" rtl="0" eaLnBrk="1" latinLnBrk="0" hangingPunct="1">
+              <a:spcBef>
+                <a:spcPct val="20000"/>
+              </a:spcBef>
+              <a:buFont typeface="Arial" panose="020B0604020202020204" pitchFamily="34" charset="0"/>
+              <a:buChar char="»"/>
+              <a:defRPr sz="2000" kern="1200">
+                <a:solidFill>
+                  <a:schemeClr val="tx1"/>
+                </a:solidFill>
+                <a:latin typeface="+mn-lt"/>
+                <a:ea typeface="+mn-ea"/>
+                <a:cs typeface="+mn-cs"/>
+              </a:defRPr>
+            </a:lvl5pPr>
+            <a:lvl6pPr marL="2514600" indent="-228600" algn="l" defTabSz="914400" rtl="0" eaLnBrk="1" latinLnBrk="0" hangingPunct="1">
+              <a:spcBef>
+                <a:spcPct val="20000"/>
+              </a:spcBef>
+              <a:buFont typeface="Arial" panose="020B0604020202020204" pitchFamily="34" charset="0"/>
+              <a:buChar char="•"/>
+              <a:defRPr sz="2000" kern="1200">
+                <a:solidFill>
+                  <a:schemeClr val="tx1"/>
+                </a:solidFill>
+                <a:latin typeface="+mn-lt"/>
+                <a:ea typeface="+mn-ea"/>
+                <a:cs typeface="+mn-cs"/>
+              </a:defRPr>
+            </a:lvl6pPr>
+            <a:lvl7pPr marL="2971800" indent="-228600" algn="l" defTabSz="914400" rtl="0" eaLnBrk="1" latinLnBrk="0" hangingPunct="1">
+              <a:spcBef>
+                <a:spcPct val="20000"/>
+              </a:spcBef>
+              <a:buFont typeface="Arial" panose="020B0604020202020204" pitchFamily="34" charset="0"/>
+              <a:buChar char="•"/>
+              <a:defRPr sz="2000" kern="1200">
+                <a:solidFill>
+                  <a:schemeClr val="tx1"/>
+                </a:solidFill>
+                <a:latin typeface="+mn-lt"/>
+                <a:ea typeface="+mn-ea"/>
+                <a:cs typeface="+mn-cs"/>
+              </a:defRPr>
+            </a:lvl7pPr>
+            <a:lvl8pPr marL="3429000" indent="-228600" algn="l" defTabSz="914400" rtl="0" eaLnBrk="1" latinLnBrk="0" hangingPunct="1">
+              <a:spcBef>
+                <a:spcPct val="20000"/>
+              </a:spcBef>
+              <a:buFont typeface="Arial" panose="020B0604020202020204" pitchFamily="34" charset="0"/>
+              <a:buChar char="•"/>
+              <a:defRPr sz="2000" kern="1200">
+                <a:solidFill>
+                  <a:schemeClr val="tx1"/>
+                </a:solidFill>
+                <a:latin typeface="+mn-lt"/>
+                <a:ea typeface="+mn-ea"/>
+                <a:cs typeface="+mn-cs"/>
+              </a:defRPr>
+            </a:lvl8pPr>
+            <a:lvl9pPr marL="3886200" indent="-228600" algn="l" defTabSz="914400" rtl="0" eaLnBrk="1" latinLnBrk="0" hangingPunct="1">
+              <a:spcBef>
+                <a:spcPct val="20000"/>
+              </a:spcBef>
+              <a:buFont typeface="Arial" panose="020B0604020202020204" pitchFamily="34" charset="0"/>
+              <a:buChar char="•"/>
+              <a:defRPr sz="2000" kern="1200">
+                <a:solidFill>
+                  <a:schemeClr val="tx1"/>
+                </a:solidFill>
+                <a:latin typeface="+mn-lt"/>
+                <a:ea typeface="+mn-ea"/>
+                <a:cs typeface="+mn-cs"/>
+              </a:defRPr>
+            </a:lvl9pPr>
+          </a:lstStyle>
+          <a:p>
+            <a:pPr marL="0" indent="0" algn="just">
+              <a:buFont typeface="Arial" panose="020B0604020202020204" pitchFamily="34" charset="0"/>
+              <a:buNone/>
+            </a:pPr>
+            <a:endParaRPr lang="en-US" sz="2000" i="1"/>
+          </a:p>
+        </p:txBody>
+      </p:sp>
+      <p:sp>
+        <p:nvSpPr>
+          <p:cNvPr id="10" name="Rectangle 9"/>
+          <p:cNvSpPr/>
+          <p:nvPr/>
+        </p:nvSpPr>
+        <p:spPr>
+          <a:xfrm>
+            <a:off x="1115615" y="1054477"/>
+            <a:ext cx="7920879" cy="461665"/>
+          </a:xfrm>
+          <a:prstGeom prst="rect">
+            <a:avLst/>
+          </a:prstGeom>
+        </p:spPr>
+        <p:txBody>
+          <a:bodyPr wrap="square">
+            <a:spAutoFit/>
+          </a:bodyPr>
+          <a:lstStyle/>
+          <a:p>
+            <a:pPr>
+              <a:buFont typeface="Arial" panose="020B0604020202020204" pitchFamily="34" charset="0"/>
+              <a:buChar char="•"/>
+            </a:pPr>
+            <a:r>
+              <a:rPr lang="es-ES" sz="1200" b="1" dirty="0">
+                <a:solidFill>
+                  <a:srgbClr val="222222"/>
+                </a:solidFill>
+                <a:latin typeface="Segoe UI" panose="020B0502040204020203" pitchFamily="34" charset="0"/>
+              </a:rPr>
+              <a:t>Diseño de etiqueta para el cliente Faurecia: </a:t>
+            </a:r>
+            <a:r>
+              <a:rPr lang="es-ES" sz="1200" dirty="0">
+                <a:solidFill>
+                  <a:srgbClr val="222222"/>
+                </a:solidFill>
+                <a:latin typeface="Segoe UI" panose="020B0502040204020203" pitchFamily="34" charset="0"/>
+              </a:rPr>
+              <a:t>Los datos que se le agregaron a esta etiqueta son la Reference PO# que es único por numero de parte, Supplier y Nombre de la empresa.</a:t>
+            </a:r>
+            <a:endParaRPr lang="es-ES" sz="1200" i="0" dirty="0">
+              <a:solidFill>
+                <a:srgbClr val="222222"/>
+              </a:solidFill>
+              <a:effectLst/>
+              <a:latin typeface="Segoe UI" panose="020B0502040204020203" pitchFamily="34" charset="0"/>
+            </a:endParaRPr>
+          </a:p>
+        </p:txBody>
+      </p:sp>
+      <p:pic>
+        <p:nvPicPr>
+          <p:cNvPr id="5" name="Imagen 4" descr="Texto&#10;&#10;Descripción generada automáticamente">
+            <a:extLst>
+              <a:ext uri="{FF2B5EF4-FFF2-40B4-BE49-F238E27FC236}">
+                <a16:creationId xmlns:a16="http://schemas.microsoft.com/office/drawing/2014/main" id="{894FA0C5-9636-402A-9F39-928BAB80AAAF}"/>
+              </a:ext>
+            </a:extLst>
+          </p:cNvPr>
+          <p:cNvPicPr>
+            <a:picLocks noChangeAspect="1"/>
+          </p:cNvPicPr>
+          <p:nvPr/>
+        </p:nvPicPr>
+        <p:blipFill>
+          <a:blip r:embed="rId2" cstate="print">
+            <a:extLst>
+              <a:ext uri="{28A0092B-C50C-407E-A947-70E740481C1C}">
+                <a14:useLocalDpi xmlns:a14="http://schemas.microsoft.com/office/drawing/2010/main" val="0"/>
+              </a:ext>
+            </a:extLst>
+          </a:blip>
+          <a:stretch>
+            <a:fillRect/>
+          </a:stretch>
+        </p:blipFill>
+        <p:spPr>
+          <a:xfrm>
+            <a:off x="1115615" y="1628801"/>
+            <a:ext cx="7920880" cy="1617457"/>
+          </a:xfrm>
+          <a:prstGeom prst="rect">
+            <a:avLst/>
+          </a:prstGeom>
+        </p:spPr>
+      </p:pic>
+      <p:sp>
+        <p:nvSpPr>
+          <p:cNvPr id="9" name="Rectangle 9">
+            <a:extLst>
+              <a:ext uri="{FF2B5EF4-FFF2-40B4-BE49-F238E27FC236}">
+                <a16:creationId xmlns:a16="http://schemas.microsoft.com/office/drawing/2014/main" id="{F38DF09E-6770-4E75-B774-E678E6825E51}"/>
+              </a:ext>
+            </a:extLst>
+          </p:cNvPr>
+          <p:cNvSpPr/>
+          <p:nvPr/>
+        </p:nvSpPr>
+        <p:spPr>
+          <a:xfrm>
+            <a:off x="1115616" y="3501008"/>
+            <a:ext cx="7992888" cy="461665"/>
+          </a:xfrm>
+          <a:prstGeom prst="rect">
+            <a:avLst/>
+          </a:prstGeom>
+        </p:spPr>
+        <p:txBody>
+          <a:bodyPr wrap="square">
+            <a:spAutoFit/>
+          </a:bodyPr>
+          <a:lstStyle/>
+          <a:p>
+            <a:pPr>
+              <a:buFont typeface="Arial" panose="020B0604020202020204" pitchFamily="34" charset="0"/>
+              <a:buChar char="•"/>
+            </a:pPr>
+            <a:r>
+              <a:rPr lang="es-ES" sz="1200" b="1" dirty="0">
+                <a:solidFill>
+                  <a:srgbClr val="222222"/>
+                </a:solidFill>
+                <a:latin typeface="Segoe UI" panose="020B0502040204020203" pitchFamily="34" charset="0"/>
+              </a:rPr>
+              <a:t>Diseño de etiqueta para el cliente WPI: </a:t>
+            </a:r>
+            <a:r>
+              <a:rPr lang="es-ES" sz="1200" dirty="0">
+                <a:solidFill>
+                  <a:srgbClr val="222222"/>
+                </a:solidFill>
+                <a:latin typeface="Segoe UI" panose="020B0502040204020203" pitchFamily="34" charset="0"/>
+              </a:rPr>
+              <a:t>Los datos que se le agregaron a esta etiqueta son la PO# y Prefix que se pondrá al principio del Serial No.</a:t>
+            </a:r>
+            <a:endParaRPr lang="es-ES" sz="1200" b="1" i="0" dirty="0">
+              <a:solidFill>
+                <a:srgbClr val="222222"/>
+              </a:solidFill>
+              <a:effectLst/>
+              <a:latin typeface="Segoe UI" panose="020B0502040204020203" pitchFamily="34" charset="0"/>
+            </a:endParaRPr>
+          </a:p>
+        </p:txBody>
+      </p:sp>
+      <p:pic>
+        <p:nvPicPr>
+          <p:cNvPr id="7" name="Imagen 6" descr="Texto, Carta&#10;&#10;Descripción generada automáticamente">
+            <a:extLst>
+              <a:ext uri="{FF2B5EF4-FFF2-40B4-BE49-F238E27FC236}">
+                <a16:creationId xmlns:a16="http://schemas.microsoft.com/office/drawing/2014/main" id="{5CFCF4C3-165D-4210-917F-12B52DE156A6}"/>
+              </a:ext>
+            </a:extLst>
+          </p:cNvPr>
+          <p:cNvPicPr>
+            <a:picLocks noChangeAspect="1"/>
+          </p:cNvPicPr>
+          <p:nvPr/>
+        </p:nvPicPr>
+        <p:blipFill>
+          <a:blip r:embed="rId3" cstate="print">
+            <a:extLst>
+              <a:ext uri="{28A0092B-C50C-407E-A947-70E740481C1C}">
+                <a14:useLocalDpi xmlns:a14="http://schemas.microsoft.com/office/drawing/2010/main" val="0"/>
+              </a:ext>
+            </a:extLst>
+          </a:blip>
+          <a:stretch>
+            <a:fillRect/>
+          </a:stretch>
+        </p:blipFill>
+        <p:spPr>
+          <a:xfrm>
+            <a:off x="1115615" y="4026604"/>
+            <a:ext cx="7920879" cy="1562636"/>
+          </a:xfrm>
+          <a:prstGeom prst="rect">
+            <a:avLst/>
+          </a:prstGeom>
+        </p:spPr>
+      </p:pic>
+      <p:sp>
+        <p:nvSpPr>
+          <p:cNvPr id="11" name="Rectángulo 10">
+            <a:extLst>
+              <a:ext uri="{FF2B5EF4-FFF2-40B4-BE49-F238E27FC236}">
+                <a16:creationId xmlns:a16="http://schemas.microsoft.com/office/drawing/2014/main" id="{2F84058F-4060-4486-A0B8-22E7EF9E3111}"/>
+              </a:ext>
+            </a:extLst>
+          </p:cNvPr>
+          <p:cNvSpPr/>
+          <p:nvPr/>
+        </p:nvSpPr>
+        <p:spPr>
+          <a:xfrm>
+            <a:off x="3131840" y="4026604"/>
+            <a:ext cx="1080120" cy="626532"/>
+          </a:xfrm>
+          <a:prstGeom prst="rect">
+            <a:avLst/>
+          </a:prstGeom>
+          <a:noFill/>
+          <a:ln>
+            <a:solidFill>
+              <a:srgbClr val="FF0000"/>
+            </a:solidFill>
+          </a:ln>
+        </p:spPr>
+        <p:style>
+          <a:lnRef idx="2">
+            <a:schemeClr val="accent1">
+              <a:shade val="50000"/>
+            </a:schemeClr>
+          </a:lnRef>
+          <a:fillRef idx="1">
+            <a:schemeClr val="accent1"/>
+          </a:fillRef>
+          <a:effectRef idx="0">
+            <a:schemeClr val="accent1"/>
+          </a:effectRef>
+          <a:fontRef idx="minor">
+            <a:schemeClr val="lt1"/>
+          </a:fontRef>
+        </p:style>
+        <p:txBody>
+          <a:bodyPr rtlCol="0" anchor="ctr"/>
+          <a:lstStyle/>
+          <a:p>
+            <a:pPr algn="ctr"/>
+            <a:endParaRPr lang="en-US"/>
+          </a:p>
+        </p:txBody>
+      </p:sp>
+      <p:sp>
+        <p:nvSpPr>
+          <p:cNvPr id="14" name="Rectángulo 13">
+            <a:extLst>
+              <a:ext uri="{FF2B5EF4-FFF2-40B4-BE49-F238E27FC236}">
+                <a16:creationId xmlns:a16="http://schemas.microsoft.com/office/drawing/2014/main" id="{94E4DF5B-B672-493C-8180-665752B9D5D2}"/>
+              </a:ext>
+            </a:extLst>
+          </p:cNvPr>
+          <p:cNvSpPr/>
+          <p:nvPr/>
+        </p:nvSpPr>
+        <p:spPr>
+          <a:xfrm>
+            <a:off x="5940152" y="4797152"/>
+            <a:ext cx="288032" cy="216024"/>
+          </a:xfrm>
+          <a:prstGeom prst="rect">
+            <a:avLst/>
+          </a:prstGeom>
+          <a:noFill/>
+          <a:ln>
+            <a:solidFill>
+              <a:srgbClr val="FF0000"/>
+            </a:solidFill>
+          </a:ln>
+        </p:spPr>
+        <p:style>
+          <a:lnRef idx="2">
+            <a:schemeClr val="accent1">
+              <a:shade val="50000"/>
+            </a:schemeClr>
+          </a:lnRef>
+          <a:fillRef idx="1">
+            <a:schemeClr val="accent1"/>
+          </a:fillRef>
+          <a:effectRef idx="0">
+            <a:schemeClr val="accent1"/>
+          </a:effectRef>
+          <a:fontRef idx="minor">
+            <a:schemeClr val="lt1"/>
+          </a:fontRef>
+        </p:style>
+        <p:txBody>
+          <a:bodyPr rtlCol="0" anchor="ctr"/>
+          <a:lstStyle/>
+          <a:p>
+            <a:pPr algn="ctr"/>
+            <a:endParaRPr lang="en-US"/>
+          </a:p>
+        </p:txBody>
+      </p:sp>
+      <p:sp>
+        <p:nvSpPr>
+          <p:cNvPr id="15" name="Rectángulo 14">
+            <a:extLst>
+              <a:ext uri="{FF2B5EF4-FFF2-40B4-BE49-F238E27FC236}">
+                <a16:creationId xmlns:a16="http://schemas.microsoft.com/office/drawing/2014/main" id="{E59BB353-864E-4BBF-97BB-72D249FF4DD9}"/>
+              </a:ext>
+            </a:extLst>
+          </p:cNvPr>
+          <p:cNvSpPr/>
+          <p:nvPr/>
+        </p:nvSpPr>
+        <p:spPr>
+          <a:xfrm>
+            <a:off x="3923928" y="1628800"/>
+            <a:ext cx="792088" cy="587805"/>
+          </a:xfrm>
+          <a:prstGeom prst="rect">
+            <a:avLst/>
+          </a:prstGeom>
+          <a:noFill/>
+          <a:ln>
+            <a:solidFill>
+              <a:srgbClr val="FF0000"/>
+            </a:solidFill>
+          </a:ln>
+        </p:spPr>
+        <p:style>
+          <a:lnRef idx="2">
+            <a:schemeClr val="accent1">
+              <a:shade val="50000"/>
+            </a:schemeClr>
+          </a:lnRef>
+          <a:fillRef idx="1">
+            <a:schemeClr val="accent1"/>
+          </a:fillRef>
+          <a:effectRef idx="0">
+            <a:schemeClr val="accent1"/>
+          </a:effectRef>
+          <a:fontRef idx="minor">
+            <a:schemeClr val="lt1"/>
+          </a:fontRef>
+        </p:style>
+        <p:txBody>
+          <a:bodyPr rtlCol="0" anchor="ctr"/>
+          <a:lstStyle/>
+          <a:p>
+            <a:pPr algn="ctr"/>
+            <a:endParaRPr lang="en-US"/>
+          </a:p>
+        </p:txBody>
+      </p:sp>
+      <p:sp>
+        <p:nvSpPr>
+          <p:cNvPr id="16" name="Rectángulo 15">
+            <a:extLst>
+              <a:ext uri="{FF2B5EF4-FFF2-40B4-BE49-F238E27FC236}">
+                <a16:creationId xmlns:a16="http://schemas.microsoft.com/office/drawing/2014/main" id="{E8959118-419A-4A92-9C57-0585F07C37ED}"/>
+              </a:ext>
+            </a:extLst>
+          </p:cNvPr>
+          <p:cNvSpPr/>
+          <p:nvPr/>
+        </p:nvSpPr>
+        <p:spPr>
+          <a:xfrm>
+            <a:off x="2843808" y="1650341"/>
+            <a:ext cx="1008112" cy="587805"/>
+          </a:xfrm>
+          <a:prstGeom prst="rect">
+            <a:avLst/>
+          </a:prstGeom>
+          <a:noFill/>
+          <a:ln>
+            <a:solidFill>
+              <a:srgbClr val="FF0000"/>
+            </a:solidFill>
+          </a:ln>
+        </p:spPr>
+        <p:style>
+          <a:lnRef idx="2">
+            <a:schemeClr val="accent1">
+              <a:shade val="50000"/>
+            </a:schemeClr>
+          </a:lnRef>
+          <a:fillRef idx="1">
+            <a:schemeClr val="accent1"/>
+          </a:fillRef>
+          <a:effectRef idx="0">
+            <a:schemeClr val="accent1"/>
+          </a:effectRef>
+          <a:fontRef idx="minor">
+            <a:schemeClr val="lt1"/>
+          </a:fontRef>
+        </p:style>
+        <p:txBody>
+          <a:bodyPr rtlCol="0" anchor="ctr"/>
+          <a:lstStyle/>
+          <a:p>
+            <a:pPr algn="ctr"/>
+            <a:endParaRPr lang="en-US"/>
+          </a:p>
+        </p:txBody>
+      </p:sp>
+      <p:cxnSp>
+        <p:nvCxnSpPr>
+          <p:cNvPr id="17" name="Conector recto 16">
+            <a:extLst>
+              <a:ext uri="{FF2B5EF4-FFF2-40B4-BE49-F238E27FC236}">
+                <a16:creationId xmlns:a16="http://schemas.microsoft.com/office/drawing/2014/main" id="{FE15A47B-A4FD-491F-9142-055420DEBAF8}"/>
+              </a:ext>
+            </a:extLst>
+          </p:cNvPr>
+          <p:cNvCxnSpPr>
+            <a:cxnSpLocks/>
+          </p:cNvCxnSpPr>
+          <p:nvPr/>
+        </p:nvCxnSpPr>
+        <p:spPr>
+          <a:xfrm>
+            <a:off x="1403648" y="2413591"/>
+            <a:ext cx="1896718" cy="40579"/>
+          </a:xfrm>
+          <a:prstGeom prst="line">
+            <a:avLst/>
+          </a:prstGeom>
+          <a:ln w="28575">
+            <a:solidFill>
+              <a:srgbClr val="FF0000"/>
+            </a:solidFill>
+          </a:ln>
+        </p:spPr>
+        <p:style>
+          <a:lnRef idx="1">
+            <a:schemeClr val="accent1"/>
+          </a:lnRef>
+          <a:fillRef idx="0">
+            <a:schemeClr val="accent1"/>
+          </a:fillRef>
+          <a:effectRef idx="0">
+            <a:schemeClr val="accent1"/>
+          </a:effectRef>
+          <a:fontRef idx="minor">
+            <a:schemeClr val="tx1"/>
+          </a:fontRef>
+        </p:style>
+      </p:cxnSp>
+    </p:spTree>
+    <p:extLst>
+      <p:ext uri="{BB962C8B-B14F-4D97-AF65-F5344CB8AC3E}">
+        <p14:creationId xmlns:p14="http://schemas.microsoft.com/office/powerpoint/2010/main" val="535454351"/>
+      </p:ext>
+    </p:extLst>
+  </p:cSld>
+  <p:clrMapOvr>
+    <a:masterClrMapping/>
+  </p:clrMapOvr>
+</p:sld>
+</file>
+
+<file path=ppt/slides/slide3.xml><?xml version="1.0" encoding="utf-8"?>
+<p:sld xmlns:a="http://schemas.openxmlformats.org/drawingml/2006/main" xmlns:r="http://schemas.openxmlformats.org/officeDocument/2006/relationships" xmlns:p="http://schemas.openxmlformats.org/presentationml/2006/main">
+  <p:cSld>
+    <p:spTree>
+      <p:nvGrpSpPr>
+        <p:cNvPr id="1" name=""/>
+        <p:cNvGrpSpPr/>
+        <p:nvPr/>
+      </p:nvGrpSpPr>
+      <p:grpSpPr>
+        <a:xfrm>
+          <a:off x="0" y="0"/>
+          <a:ext cx="0" cy="0"/>
+          <a:chOff x="0" y="0"/>
+          <a:chExt cx="0" cy="0"/>
+        </a:xfrm>
+      </p:grpSpPr>
+      <p:sp>
+        <p:nvSpPr>
+          <p:cNvPr id="5" name="Title 1"/>
+          <p:cNvSpPr txBox="1">
+            <a:spLocks/>
+          </p:cNvSpPr>
+          <p:nvPr/>
+        </p:nvSpPr>
+        <p:spPr>
+          <a:xfrm>
+            <a:off x="1187624" y="2564904"/>
+            <a:ext cx="7772400" cy="1470025"/>
+          </a:xfrm>
+          <a:prstGeom prst="rect">
+            <a:avLst/>
+          </a:prstGeom>
+        </p:spPr>
+        <p:txBody>
+          <a:bodyPr vert="horz" lIns="91440" tIns="45720" rIns="91440" bIns="45720" rtlCol="0" anchor="ctr">
+            <a:normAutofit/>
+          </a:bodyPr>
+          <a:lstStyle>
+            <a:lvl1pPr algn="ctr" defTabSz="914400" rtl="0" eaLnBrk="1" latinLnBrk="0" hangingPunct="1">
+              <a:spcBef>
+                <a:spcPct val="0"/>
+              </a:spcBef>
+              <a:buNone/>
+              <a:defRPr sz="4400" kern="1200">
+                <a:solidFill>
+                  <a:schemeClr val="tx1"/>
+                </a:solidFill>
+                <a:latin typeface="+mj-lt"/>
+                <a:ea typeface="+mj-ea"/>
+                <a:cs typeface="+mj-cs"/>
+              </a:defRPr>
+            </a:lvl1pPr>
+          </a:lstStyle>
+          <a:p>
+            <a:r>
+              <a:rPr lang="es-MX" b="1" dirty="0">
+                <a:latin typeface="Century Gothic" panose="020B0502020202020204" pitchFamily="34" charset="0"/>
+              </a:rPr>
+              <a:t>03/05/2021 – 07/05/2021</a:t>
+            </a:r>
+            <a:endParaRPr lang="es-MX" dirty="0">
+              <a:latin typeface="Century Gothic" panose="020B0502020202020204" pitchFamily="34" charset="0"/>
+            </a:endParaRPr>
+          </a:p>
+        </p:txBody>
+      </p:sp>
+    </p:spTree>
+    <p:extLst>
+      <p:ext uri="{BB962C8B-B14F-4D97-AF65-F5344CB8AC3E}">
+        <p14:creationId xmlns:p14="http://schemas.microsoft.com/office/powerpoint/2010/main" val="2794023428"/>
+      </p:ext>
+    </p:extLst>
+  </p:cSld>
+  <p:clrMapOvr>
+    <a:masterClrMapping/>
+  </p:clrMapOvr>
+</p:sld>
+</file>
+
+<file path=ppt/slides/slide4.xml><?xml version="1.0" encoding="utf-8"?>
+<p:sld xmlns:a="http://schemas.openxmlformats.org/drawingml/2006/main" xmlns:r="http://schemas.openxmlformats.org/officeDocument/2006/relationships" xmlns:p="http://schemas.openxmlformats.org/presentationml/2006/main">
+  <p:cSld>
+    <p:spTree>
+      <p:nvGrpSpPr>
+        <p:cNvPr id="1" name=""/>
+        <p:cNvGrpSpPr/>
+        <p:nvPr/>
+      </p:nvGrpSpPr>
+      <p:grpSpPr>
+        <a:xfrm>
+          <a:off x="0" y="0"/>
+          <a:ext cx="0" cy="0"/>
+          <a:chOff x="0" y="0"/>
+          <a:chExt cx="0" cy="0"/>
+        </a:xfrm>
+      </p:grpSpPr>
+      <p:sp>
+        <p:nvSpPr>
+          <p:cNvPr id="8" name="Title 1"/>
+          <p:cNvSpPr txBox="1">
+            <a:spLocks/>
+          </p:cNvSpPr>
+          <p:nvPr/>
+        </p:nvSpPr>
+        <p:spPr>
+          <a:xfrm>
+            <a:off x="1087408" y="274638"/>
+            <a:ext cx="7229008" cy="634082"/>
+          </a:xfrm>
+          <a:prstGeom prst="rect">
+            <a:avLst/>
+          </a:prstGeom>
+        </p:spPr>
+        <p:txBody>
+          <a:bodyPr/>
+          <a:lstStyle>
+            <a:lvl1pPr algn="ctr" defTabSz="914400" rtl="0" eaLnBrk="1" latinLnBrk="0" hangingPunct="1">
+              <a:spcBef>
+                <a:spcPct val="0"/>
+              </a:spcBef>
+              <a:buNone/>
+              <a:defRPr sz="4400" kern="1200">
+                <a:solidFill>
+                  <a:schemeClr val="tx1"/>
+                </a:solidFill>
+                <a:latin typeface="+mj-lt"/>
+                <a:ea typeface="+mj-ea"/>
+                <a:cs typeface="+mj-cs"/>
+              </a:defRPr>
+            </a:lvl1pPr>
+          </a:lstStyle>
+          <a:p>
+            <a:pPr algn="l"/>
+            <a:r>
+              <a:rPr lang="es-ES" sz="2000" dirty="0">
+                <a:solidFill>
+                  <a:srgbClr val="3F1900"/>
+                </a:solidFill>
+              </a:rPr>
+              <a:t>Pantalla Labels</a:t>
+            </a:r>
+            <a:endParaRPr lang="en-US" sz="2000" dirty="0">
+              <a:solidFill>
+                <a:srgbClr val="3F1900"/>
+              </a:solidFill>
+            </a:endParaRPr>
+          </a:p>
+        </p:txBody>
+      </p:sp>
+      <p:sp>
+        <p:nvSpPr>
+          <p:cNvPr id="4" name="Content Placeholder 3"/>
+          <p:cNvSpPr txBox="1">
+            <a:spLocks/>
+          </p:cNvSpPr>
+          <p:nvPr/>
+        </p:nvSpPr>
+        <p:spPr>
+          <a:xfrm>
+            <a:off x="1331640" y="1196753"/>
+            <a:ext cx="7488832" cy="5137780"/>
+          </a:xfrm>
+          <a:prstGeom prst="rect">
+            <a:avLst/>
+          </a:prstGeom>
+        </p:spPr>
+        <p:txBody>
+          <a:bodyPr>
+            <a:normAutofit/>
+          </a:bodyPr>
+          <a:lstStyle>
+            <a:lvl1pPr marL="342900" indent="-342900" algn="l" defTabSz="914400" rtl="0" eaLnBrk="1" latinLnBrk="0" hangingPunct="1">
+              <a:spcBef>
+                <a:spcPct val="20000"/>
+              </a:spcBef>
+              <a:buFont typeface="Arial" panose="020B0604020202020204" pitchFamily="34" charset="0"/>
+              <a:buChar char="•"/>
+              <a:defRPr sz="3200" kern="1200">
+                <a:solidFill>
+                  <a:schemeClr val="tx1"/>
+                </a:solidFill>
+                <a:latin typeface="+mn-lt"/>
+                <a:ea typeface="+mn-ea"/>
+                <a:cs typeface="+mn-cs"/>
+              </a:defRPr>
+            </a:lvl1pPr>
+            <a:lvl2pPr marL="742950" indent="-285750" algn="l" defTabSz="914400" rtl="0" eaLnBrk="1" latinLnBrk="0" hangingPunct="1">
+              <a:spcBef>
+                <a:spcPct val="20000"/>
+              </a:spcBef>
+              <a:buFont typeface="Arial" panose="020B0604020202020204" pitchFamily="34" charset="0"/>
+              <a:buChar char="–"/>
+              <a:defRPr sz="2800" kern="1200">
+                <a:solidFill>
+                  <a:schemeClr val="tx1"/>
+                </a:solidFill>
+                <a:latin typeface="+mn-lt"/>
+                <a:ea typeface="+mn-ea"/>
+                <a:cs typeface="+mn-cs"/>
+              </a:defRPr>
+            </a:lvl2pPr>
+            <a:lvl3pPr marL="1143000" indent="-228600" algn="l" defTabSz="914400" rtl="0" eaLnBrk="1" latinLnBrk="0" hangingPunct="1">
+              <a:spcBef>
+                <a:spcPct val="20000"/>
+              </a:spcBef>
+              <a:buFont typeface="Arial" panose="020B0604020202020204" pitchFamily="34" charset="0"/>
+              <a:buChar char="•"/>
+              <a:defRPr sz="2400" kern="1200">
+                <a:solidFill>
+                  <a:schemeClr val="tx1"/>
+                </a:solidFill>
+                <a:latin typeface="+mn-lt"/>
+                <a:ea typeface="+mn-ea"/>
+                <a:cs typeface="+mn-cs"/>
+              </a:defRPr>
+            </a:lvl3pPr>
+            <a:lvl4pPr marL="1600200" indent="-228600" algn="l" defTabSz="914400" rtl="0" eaLnBrk="1" latinLnBrk="0" hangingPunct="1">
+              <a:spcBef>
+                <a:spcPct val="20000"/>
+              </a:spcBef>
+              <a:buFont typeface="Arial" panose="020B0604020202020204" pitchFamily="34" charset="0"/>
+              <a:buChar char="–"/>
+              <a:defRPr sz="2000" kern="1200">
+                <a:solidFill>
+                  <a:schemeClr val="tx1"/>
+                </a:solidFill>
+                <a:latin typeface="+mn-lt"/>
+                <a:ea typeface="+mn-ea"/>
+                <a:cs typeface="+mn-cs"/>
+              </a:defRPr>
+            </a:lvl4pPr>
+            <a:lvl5pPr marL="2057400" indent="-228600" algn="l" defTabSz="914400" rtl="0" eaLnBrk="1" latinLnBrk="0" hangingPunct="1">
+              <a:spcBef>
+                <a:spcPct val="20000"/>
+              </a:spcBef>
+              <a:buFont typeface="Arial" panose="020B0604020202020204" pitchFamily="34" charset="0"/>
+              <a:buChar char="»"/>
+              <a:defRPr sz="2000" kern="1200">
+                <a:solidFill>
+                  <a:schemeClr val="tx1"/>
+                </a:solidFill>
+                <a:latin typeface="+mn-lt"/>
+                <a:ea typeface="+mn-ea"/>
+                <a:cs typeface="+mn-cs"/>
+              </a:defRPr>
+            </a:lvl5pPr>
+            <a:lvl6pPr marL="2514600" indent="-228600" algn="l" defTabSz="914400" rtl="0" eaLnBrk="1" latinLnBrk="0" hangingPunct="1">
+              <a:spcBef>
+                <a:spcPct val="20000"/>
+              </a:spcBef>
+              <a:buFont typeface="Arial" panose="020B0604020202020204" pitchFamily="34" charset="0"/>
+              <a:buChar char="•"/>
+              <a:defRPr sz="2000" kern="1200">
+                <a:solidFill>
+                  <a:schemeClr val="tx1"/>
+                </a:solidFill>
+                <a:latin typeface="+mn-lt"/>
+                <a:ea typeface="+mn-ea"/>
+                <a:cs typeface="+mn-cs"/>
+              </a:defRPr>
+            </a:lvl6pPr>
+            <a:lvl7pPr marL="2971800" indent="-228600" algn="l" defTabSz="914400" rtl="0" eaLnBrk="1" latinLnBrk="0" hangingPunct="1">
+              <a:spcBef>
+                <a:spcPct val="20000"/>
+              </a:spcBef>
+              <a:buFont typeface="Arial" panose="020B0604020202020204" pitchFamily="34" charset="0"/>
+              <a:buChar char="•"/>
+              <a:defRPr sz="2000" kern="1200">
+                <a:solidFill>
+                  <a:schemeClr val="tx1"/>
+                </a:solidFill>
+                <a:latin typeface="+mn-lt"/>
+                <a:ea typeface="+mn-ea"/>
+                <a:cs typeface="+mn-cs"/>
+              </a:defRPr>
+            </a:lvl7pPr>
+            <a:lvl8pPr marL="3429000" indent="-228600" algn="l" defTabSz="914400" rtl="0" eaLnBrk="1" latinLnBrk="0" hangingPunct="1">
+              <a:spcBef>
+                <a:spcPct val="20000"/>
+              </a:spcBef>
+              <a:buFont typeface="Arial" panose="020B0604020202020204" pitchFamily="34" charset="0"/>
+              <a:buChar char="•"/>
+              <a:defRPr sz="2000" kern="1200">
+                <a:solidFill>
+                  <a:schemeClr val="tx1"/>
+                </a:solidFill>
+                <a:latin typeface="+mn-lt"/>
+                <a:ea typeface="+mn-ea"/>
+                <a:cs typeface="+mn-cs"/>
+              </a:defRPr>
+            </a:lvl8pPr>
+            <a:lvl9pPr marL="3886200" indent="-228600" algn="l" defTabSz="914400" rtl="0" eaLnBrk="1" latinLnBrk="0" hangingPunct="1">
+              <a:spcBef>
+                <a:spcPct val="20000"/>
+              </a:spcBef>
+              <a:buFont typeface="Arial" panose="020B0604020202020204" pitchFamily="34" charset="0"/>
+              <a:buChar char="•"/>
+              <a:defRPr sz="2000" kern="1200">
+                <a:solidFill>
+                  <a:schemeClr val="tx1"/>
+                </a:solidFill>
+                <a:latin typeface="+mn-lt"/>
+                <a:ea typeface="+mn-ea"/>
+                <a:cs typeface="+mn-cs"/>
+              </a:defRPr>
+            </a:lvl9pPr>
+          </a:lstStyle>
+          <a:p>
+            <a:pPr marL="0" indent="0" algn="just">
+              <a:buFont typeface="Arial" panose="020B0604020202020204" pitchFamily="34" charset="0"/>
+              <a:buNone/>
+            </a:pPr>
+            <a:endParaRPr lang="en-US" sz="2000" i="1"/>
+          </a:p>
+        </p:txBody>
+      </p:sp>
+      <p:sp>
+        <p:nvSpPr>
+          <p:cNvPr id="10" name="Rectangle 9"/>
+          <p:cNvSpPr/>
+          <p:nvPr/>
+        </p:nvSpPr>
+        <p:spPr>
+          <a:xfrm>
+            <a:off x="1115615" y="1054477"/>
+            <a:ext cx="7920879" cy="461665"/>
+          </a:xfrm>
+          <a:prstGeom prst="rect">
+            <a:avLst/>
+          </a:prstGeom>
+        </p:spPr>
+        <p:txBody>
+          <a:bodyPr wrap="square">
+            <a:spAutoFit/>
+          </a:bodyPr>
+          <a:lstStyle/>
+          <a:p>
+            <a:pPr>
+              <a:buFont typeface="Arial" panose="020B0604020202020204" pitchFamily="34" charset="0"/>
+              <a:buChar char="•"/>
+            </a:pPr>
+            <a:r>
+              <a:rPr lang="es-ES" sz="1200" dirty="0">
+                <a:solidFill>
+                  <a:srgbClr val="222222"/>
+                </a:solidFill>
+                <a:latin typeface="Segoe UI" panose="020B0502040204020203" pitchFamily="34" charset="0"/>
+              </a:rPr>
+              <a:t>Vista Anterior de la Pantalla de Impresión de etiquetas de orden, en esta pantalla nos permitía poner la orden con la que estaba ligada cuando eran números de Parte </a:t>
+            </a:r>
+            <a:r>
+              <a:rPr lang="es-ES" sz="1200" b="1" dirty="0">
+                <a:solidFill>
+                  <a:srgbClr val="222222"/>
+                </a:solidFill>
+                <a:latin typeface="Segoe UI" panose="020B0502040204020203" pitchFamily="34" charset="0"/>
+              </a:rPr>
+              <a:t>U</a:t>
+            </a:r>
+            <a:r>
+              <a:rPr lang="es-ES" sz="1200" dirty="0">
+                <a:solidFill>
+                  <a:srgbClr val="222222"/>
+                </a:solidFill>
+                <a:latin typeface="Segoe UI" panose="020B0502040204020203" pitchFamily="34" charset="0"/>
+              </a:rPr>
+              <a:t> aunque no fuera la orden que le correspondía.</a:t>
+            </a:r>
+            <a:endParaRPr lang="es-ES" sz="1200" i="0" dirty="0">
+              <a:solidFill>
+                <a:srgbClr val="222222"/>
+              </a:solidFill>
+              <a:effectLst/>
+              <a:latin typeface="Segoe UI" panose="020B0502040204020203" pitchFamily="34" charset="0"/>
+            </a:endParaRPr>
+          </a:p>
+        </p:txBody>
+      </p:sp>
+      <p:pic>
+        <p:nvPicPr>
+          <p:cNvPr id="3" name="Imagen 2" descr="Interfaz de usuario gráfica, Aplicación, Tabla&#10;&#10;Descripción generada automáticamente">
+            <a:extLst>
+              <a:ext uri="{FF2B5EF4-FFF2-40B4-BE49-F238E27FC236}">
+                <a16:creationId xmlns:a16="http://schemas.microsoft.com/office/drawing/2014/main" id="{E2632F26-83CE-4D0B-B033-193EAE1CEDEC}"/>
+              </a:ext>
+            </a:extLst>
+          </p:cNvPr>
+          <p:cNvPicPr>
+            <a:picLocks noChangeAspect="1"/>
+          </p:cNvPicPr>
+          <p:nvPr/>
+        </p:nvPicPr>
+        <p:blipFill>
+          <a:blip r:embed="rId2">
+            <a:extLst>
+              <a:ext uri="{28A0092B-C50C-407E-A947-70E740481C1C}">
+                <a14:useLocalDpi xmlns:a14="http://schemas.microsoft.com/office/drawing/2010/main" val="0"/>
+              </a:ext>
+            </a:extLst>
+          </a:blip>
+          <a:stretch>
+            <a:fillRect/>
+          </a:stretch>
+        </p:blipFill>
+        <p:spPr>
+          <a:xfrm>
+            <a:off x="1115615" y="1628800"/>
+            <a:ext cx="7920878" cy="5040560"/>
+          </a:xfrm>
+          <a:prstGeom prst="rect">
+            <a:avLst/>
+          </a:prstGeom>
+        </p:spPr>
+      </p:pic>
+      <p:sp>
+        <p:nvSpPr>
+          <p:cNvPr id="13" name="Rectángulo 12">
+            <a:extLst>
+              <a:ext uri="{FF2B5EF4-FFF2-40B4-BE49-F238E27FC236}">
+                <a16:creationId xmlns:a16="http://schemas.microsoft.com/office/drawing/2014/main" id="{A887EA70-6EB7-4763-8605-F1A40B6756E3}"/>
+              </a:ext>
+            </a:extLst>
+          </p:cNvPr>
+          <p:cNvSpPr/>
+          <p:nvPr/>
+        </p:nvSpPr>
+        <p:spPr>
+          <a:xfrm>
+            <a:off x="3635896" y="2564904"/>
+            <a:ext cx="864096" cy="648072"/>
+          </a:xfrm>
+          <a:prstGeom prst="rect">
+            <a:avLst/>
+          </a:prstGeom>
+          <a:noFill/>
+          <a:ln>
+            <a:solidFill>
+              <a:srgbClr val="FF0000"/>
+            </a:solidFill>
+          </a:ln>
+        </p:spPr>
+        <p:style>
+          <a:lnRef idx="2">
+            <a:schemeClr val="accent1">
+              <a:shade val="50000"/>
+            </a:schemeClr>
+          </a:lnRef>
+          <a:fillRef idx="1">
+            <a:schemeClr val="accent1"/>
+          </a:fillRef>
+          <a:effectRef idx="0">
+            <a:schemeClr val="accent1"/>
+          </a:effectRef>
+          <a:fontRef idx="minor">
+            <a:schemeClr val="lt1"/>
+          </a:fontRef>
+        </p:style>
+        <p:txBody>
+          <a:bodyPr rtlCol="0" anchor="ctr"/>
+          <a:lstStyle/>
+          <a:p>
+            <a:pPr algn="ctr"/>
+            <a:endParaRPr lang="en-US"/>
+          </a:p>
+        </p:txBody>
+      </p:sp>
+    </p:spTree>
+    <p:extLst>
+      <p:ext uri="{BB962C8B-B14F-4D97-AF65-F5344CB8AC3E}">
+        <p14:creationId xmlns:p14="http://schemas.microsoft.com/office/powerpoint/2010/main" val="3005023176"/>
+      </p:ext>
+    </p:extLst>
+  </p:cSld>
+  <p:clrMapOvr>
+    <a:masterClrMapping/>
+  </p:clrMapOvr>
+</p:sld>
+</file>
+
+<file path=ppt/slides/slide5.xml><?xml version="1.0" encoding="utf-8"?>
+<p:sld xmlns:a="http://schemas.openxmlformats.org/drawingml/2006/main" xmlns:r="http://schemas.openxmlformats.org/officeDocument/2006/relationships" xmlns:p="http://schemas.openxmlformats.org/presentationml/2006/main">
+  <p:cSld>
+    <p:spTree>
+      <p:nvGrpSpPr>
+        <p:cNvPr id="1" name=""/>
+        <p:cNvGrpSpPr/>
+        <p:nvPr/>
+      </p:nvGrpSpPr>
+      <p:grpSpPr>
+        <a:xfrm>
+          <a:off x="0" y="0"/>
+          <a:ext cx="0" cy="0"/>
+          <a:chOff x="0" y="0"/>
+          <a:chExt cx="0" cy="0"/>
+        </a:xfrm>
+      </p:grpSpPr>
+      <p:sp>
+        <p:nvSpPr>
+          <p:cNvPr id="8" name="Title 1"/>
+          <p:cNvSpPr txBox="1">
+            <a:spLocks/>
+          </p:cNvSpPr>
+          <p:nvPr/>
+        </p:nvSpPr>
+        <p:spPr>
+          <a:xfrm>
+            <a:off x="1087408" y="274638"/>
+            <a:ext cx="7229008" cy="634082"/>
+          </a:xfrm>
+          <a:prstGeom prst="rect">
+            <a:avLst/>
+          </a:prstGeom>
+        </p:spPr>
+        <p:txBody>
+          <a:bodyPr/>
+          <a:lstStyle>
+            <a:lvl1pPr algn="ctr" defTabSz="914400" rtl="0" eaLnBrk="1" latinLnBrk="0" hangingPunct="1">
+              <a:spcBef>
+                <a:spcPct val="0"/>
+              </a:spcBef>
+              <a:buNone/>
+              <a:defRPr sz="4400" kern="1200">
+                <a:solidFill>
+                  <a:schemeClr val="tx1"/>
+                </a:solidFill>
+                <a:latin typeface="+mj-lt"/>
+                <a:ea typeface="+mj-ea"/>
+                <a:cs typeface="+mj-cs"/>
+              </a:defRPr>
+            </a:lvl1pPr>
+          </a:lstStyle>
+          <a:p>
+            <a:pPr algn="l"/>
+            <a:r>
+              <a:rPr lang="es-ES" sz="2000" dirty="0">
+                <a:solidFill>
+                  <a:srgbClr val="3F1900"/>
+                </a:solidFill>
+              </a:rPr>
+              <a:t>Pantalla Labels</a:t>
+            </a:r>
+            <a:endParaRPr lang="en-US" sz="2000" dirty="0">
+              <a:solidFill>
+                <a:srgbClr val="3F1900"/>
+              </a:solidFill>
+            </a:endParaRPr>
+          </a:p>
+        </p:txBody>
+      </p:sp>
+      <p:sp>
+        <p:nvSpPr>
+          <p:cNvPr id="4" name="Content Placeholder 3"/>
+          <p:cNvSpPr txBox="1">
+            <a:spLocks/>
+          </p:cNvSpPr>
+          <p:nvPr/>
+        </p:nvSpPr>
+        <p:spPr>
+          <a:xfrm>
+            <a:off x="1331640" y="1196753"/>
+            <a:ext cx="7488832" cy="5137780"/>
+          </a:xfrm>
+          <a:prstGeom prst="rect">
+            <a:avLst/>
+          </a:prstGeom>
+        </p:spPr>
+        <p:txBody>
+          <a:bodyPr>
+            <a:normAutofit/>
+          </a:bodyPr>
+          <a:lstStyle>
+            <a:lvl1pPr marL="342900" indent="-342900" algn="l" defTabSz="914400" rtl="0" eaLnBrk="1" latinLnBrk="0" hangingPunct="1">
+              <a:spcBef>
+                <a:spcPct val="20000"/>
+              </a:spcBef>
+              <a:buFont typeface="Arial" panose="020B0604020202020204" pitchFamily="34" charset="0"/>
+              <a:buChar char="•"/>
+              <a:defRPr sz="3200" kern="1200">
+                <a:solidFill>
+                  <a:schemeClr val="tx1"/>
+                </a:solidFill>
+                <a:latin typeface="+mn-lt"/>
+                <a:ea typeface="+mn-ea"/>
+                <a:cs typeface="+mn-cs"/>
+              </a:defRPr>
+            </a:lvl1pPr>
+            <a:lvl2pPr marL="742950" indent="-285750" algn="l" defTabSz="914400" rtl="0" eaLnBrk="1" latinLnBrk="0" hangingPunct="1">
+              <a:spcBef>
+                <a:spcPct val="20000"/>
+              </a:spcBef>
+              <a:buFont typeface="Arial" panose="020B0604020202020204" pitchFamily="34" charset="0"/>
+              <a:buChar char="–"/>
+              <a:defRPr sz="2800" kern="1200">
+                <a:solidFill>
+                  <a:schemeClr val="tx1"/>
+                </a:solidFill>
+                <a:latin typeface="+mn-lt"/>
+                <a:ea typeface="+mn-ea"/>
+                <a:cs typeface="+mn-cs"/>
+              </a:defRPr>
+            </a:lvl2pPr>
+            <a:lvl3pPr marL="1143000" indent="-228600" algn="l" defTabSz="914400" rtl="0" eaLnBrk="1" latinLnBrk="0" hangingPunct="1">
+              <a:spcBef>
+                <a:spcPct val="20000"/>
+              </a:spcBef>
+              <a:buFont typeface="Arial" panose="020B0604020202020204" pitchFamily="34" charset="0"/>
+              <a:buChar char="•"/>
+              <a:defRPr sz="2400" kern="1200">
+                <a:solidFill>
+                  <a:schemeClr val="tx1"/>
+                </a:solidFill>
+                <a:latin typeface="+mn-lt"/>
+                <a:ea typeface="+mn-ea"/>
+                <a:cs typeface="+mn-cs"/>
+              </a:defRPr>
+            </a:lvl3pPr>
+            <a:lvl4pPr marL="1600200" indent="-228600" algn="l" defTabSz="914400" rtl="0" eaLnBrk="1" latinLnBrk="0" hangingPunct="1">
+              <a:spcBef>
+                <a:spcPct val="20000"/>
+              </a:spcBef>
+              <a:buFont typeface="Arial" panose="020B0604020202020204" pitchFamily="34" charset="0"/>
+              <a:buChar char="–"/>
+              <a:defRPr sz="2000" kern="1200">
+                <a:solidFill>
+                  <a:schemeClr val="tx1"/>
+                </a:solidFill>
+                <a:latin typeface="+mn-lt"/>
+                <a:ea typeface="+mn-ea"/>
+                <a:cs typeface="+mn-cs"/>
+              </a:defRPr>
+            </a:lvl4pPr>
+            <a:lvl5pPr marL="2057400" indent="-228600" algn="l" defTabSz="914400" rtl="0" eaLnBrk="1" latinLnBrk="0" hangingPunct="1">
+              <a:spcBef>
+                <a:spcPct val="20000"/>
+              </a:spcBef>
+              <a:buFont typeface="Arial" panose="020B0604020202020204" pitchFamily="34" charset="0"/>
+              <a:buChar char="»"/>
+              <a:defRPr sz="2000" kern="1200">
+                <a:solidFill>
+                  <a:schemeClr val="tx1"/>
+                </a:solidFill>
+                <a:latin typeface="+mn-lt"/>
+                <a:ea typeface="+mn-ea"/>
+                <a:cs typeface="+mn-cs"/>
+              </a:defRPr>
+            </a:lvl5pPr>
+            <a:lvl6pPr marL="2514600" indent="-228600" algn="l" defTabSz="914400" rtl="0" eaLnBrk="1" latinLnBrk="0" hangingPunct="1">
+              <a:spcBef>
+                <a:spcPct val="20000"/>
+              </a:spcBef>
+              <a:buFont typeface="Arial" panose="020B0604020202020204" pitchFamily="34" charset="0"/>
+              <a:buChar char="•"/>
+              <a:defRPr sz="2000" kern="1200">
+                <a:solidFill>
+                  <a:schemeClr val="tx1"/>
+                </a:solidFill>
+                <a:latin typeface="+mn-lt"/>
+                <a:ea typeface="+mn-ea"/>
+                <a:cs typeface="+mn-cs"/>
+              </a:defRPr>
+            </a:lvl6pPr>
+            <a:lvl7pPr marL="2971800" indent="-228600" algn="l" defTabSz="914400" rtl="0" eaLnBrk="1" latinLnBrk="0" hangingPunct="1">
+              <a:spcBef>
+                <a:spcPct val="20000"/>
+              </a:spcBef>
+              <a:buFont typeface="Arial" panose="020B0604020202020204" pitchFamily="34" charset="0"/>
+              <a:buChar char="•"/>
+              <a:defRPr sz="2000" kern="1200">
+                <a:solidFill>
+                  <a:schemeClr val="tx1"/>
+                </a:solidFill>
+                <a:latin typeface="+mn-lt"/>
+                <a:ea typeface="+mn-ea"/>
+                <a:cs typeface="+mn-cs"/>
+              </a:defRPr>
+            </a:lvl7pPr>
+            <a:lvl8pPr marL="3429000" indent="-228600" algn="l" defTabSz="914400" rtl="0" eaLnBrk="1" latinLnBrk="0" hangingPunct="1">
+              <a:spcBef>
+                <a:spcPct val="20000"/>
+              </a:spcBef>
+              <a:buFont typeface="Arial" panose="020B0604020202020204" pitchFamily="34" charset="0"/>
+              <a:buChar char="•"/>
+              <a:defRPr sz="2000" kern="1200">
+                <a:solidFill>
+                  <a:schemeClr val="tx1"/>
+                </a:solidFill>
+                <a:latin typeface="+mn-lt"/>
+                <a:ea typeface="+mn-ea"/>
+                <a:cs typeface="+mn-cs"/>
+              </a:defRPr>
+            </a:lvl8pPr>
+            <a:lvl9pPr marL="3886200" indent="-228600" algn="l" defTabSz="914400" rtl="0" eaLnBrk="1" latinLnBrk="0" hangingPunct="1">
+              <a:spcBef>
+                <a:spcPct val="20000"/>
+              </a:spcBef>
+              <a:buFont typeface="Arial" panose="020B0604020202020204" pitchFamily="34" charset="0"/>
+              <a:buChar char="•"/>
+              <a:defRPr sz="2000" kern="1200">
+                <a:solidFill>
+                  <a:schemeClr val="tx1"/>
+                </a:solidFill>
+                <a:latin typeface="+mn-lt"/>
+                <a:ea typeface="+mn-ea"/>
+                <a:cs typeface="+mn-cs"/>
+              </a:defRPr>
+            </a:lvl9pPr>
+          </a:lstStyle>
+          <a:p>
+            <a:pPr marL="0" indent="0" algn="just">
+              <a:buFont typeface="Arial" panose="020B0604020202020204" pitchFamily="34" charset="0"/>
+              <a:buNone/>
+            </a:pPr>
+            <a:endParaRPr lang="en-US" sz="2000" i="1"/>
+          </a:p>
+        </p:txBody>
+      </p:sp>
+      <p:sp>
+        <p:nvSpPr>
+          <p:cNvPr id="10" name="Rectangle 9"/>
+          <p:cNvSpPr/>
+          <p:nvPr/>
+        </p:nvSpPr>
+        <p:spPr>
+          <a:xfrm>
+            <a:off x="1115615" y="1054477"/>
+            <a:ext cx="7920879" cy="830997"/>
+          </a:xfrm>
+          <a:prstGeom prst="rect">
+            <a:avLst/>
+          </a:prstGeom>
+        </p:spPr>
+        <p:txBody>
+          <a:bodyPr wrap="square">
+            <a:spAutoFit/>
+          </a:bodyPr>
+          <a:lstStyle/>
+          <a:p>
+            <a:pPr>
+              <a:buFont typeface="Arial" panose="020B0604020202020204" pitchFamily="34" charset="0"/>
+              <a:buChar char="•"/>
+            </a:pPr>
+            <a:r>
+              <a:rPr lang="es-ES" sz="1200" dirty="0">
+                <a:solidFill>
+                  <a:srgbClr val="222222"/>
+                </a:solidFill>
+                <a:latin typeface="Segoe UI" panose="020B0502040204020203" pitchFamily="34" charset="0"/>
+              </a:rPr>
+              <a:t>Vista Nueva de la Pantalla de Impresión de etiquetas de orden, en esta pantalla buscamos la orden y si esta cuenta con números parte U automáticamente nos mostrara la orden con la cual esta ligada en el campo </a:t>
+            </a:r>
+            <a:r>
+              <a:rPr lang="es-ES" sz="1200" b="1" dirty="0">
+                <a:solidFill>
+                  <a:srgbClr val="222222"/>
+                </a:solidFill>
+                <a:latin typeface="Segoe UI" panose="020B0502040204020203" pitchFamily="34" charset="0"/>
+              </a:rPr>
+              <a:t>Jobno 2</a:t>
+            </a:r>
+            <a:r>
+              <a:rPr lang="es-ES" sz="1200" dirty="0">
+                <a:solidFill>
+                  <a:srgbClr val="222222"/>
+                </a:solidFill>
+                <a:latin typeface="Segoe UI" panose="020B0502040204020203" pitchFamily="34" charset="0"/>
+              </a:rPr>
+              <a:t> y en el campo </a:t>
+            </a:r>
+            <a:r>
+              <a:rPr lang="es-ES" sz="1200" b="1" dirty="0">
+                <a:solidFill>
+                  <a:srgbClr val="222222"/>
+                </a:solidFill>
+                <a:latin typeface="Segoe UI" panose="020B0502040204020203" pitchFamily="34" charset="0"/>
+              </a:rPr>
+              <a:t>Jobno 1 </a:t>
+            </a:r>
+            <a:r>
+              <a:rPr lang="es-ES" sz="1200" dirty="0">
+                <a:solidFill>
+                  <a:srgbClr val="222222"/>
+                </a:solidFill>
+                <a:latin typeface="Segoe UI" panose="020B0502040204020203" pitchFamily="34" charset="0"/>
+              </a:rPr>
+              <a:t>nos pondrá el dato de la orden de mayor </a:t>
+            </a:r>
+            <a:r>
+              <a:rPr lang="es-ES" sz="1200" b="1" dirty="0">
+                <a:solidFill>
+                  <a:srgbClr val="222222"/>
+                </a:solidFill>
+                <a:latin typeface="Segoe UI" panose="020B0502040204020203" pitchFamily="34" charset="0"/>
+              </a:rPr>
+              <a:t>Gross</a:t>
+            </a:r>
+            <a:r>
+              <a:rPr lang="es-ES" sz="1200" dirty="0">
+                <a:solidFill>
+                  <a:srgbClr val="222222"/>
+                </a:solidFill>
+                <a:latin typeface="Segoe UI" panose="020B0502040204020203" pitchFamily="34" charset="0"/>
+              </a:rPr>
+              <a:t>. Las ordenes con números de </a:t>
+            </a:r>
+            <a:r>
+              <a:rPr lang="es-ES" sz="1200" b="1" dirty="0">
+                <a:solidFill>
+                  <a:srgbClr val="222222"/>
+                </a:solidFill>
+                <a:latin typeface="Segoe UI" panose="020B0502040204020203" pitchFamily="34" charset="0"/>
+              </a:rPr>
+              <a:t>Parte U </a:t>
+            </a:r>
+            <a:r>
+              <a:rPr lang="es-ES" sz="1200" dirty="0">
+                <a:solidFill>
+                  <a:srgbClr val="222222"/>
+                </a:solidFill>
+                <a:latin typeface="Segoe UI" panose="020B0502040204020203" pitchFamily="34" charset="0"/>
+              </a:rPr>
+              <a:t>se ligan en la pantalla </a:t>
+            </a:r>
+            <a:r>
+              <a:rPr lang="es-ES" sz="1200" b="1" dirty="0">
+                <a:solidFill>
+                  <a:srgbClr val="222222"/>
+                </a:solidFill>
+                <a:latin typeface="Segoe UI" panose="020B0502040204020203" pitchFamily="34" charset="0"/>
+              </a:rPr>
+              <a:t>Planning.</a:t>
+            </a:r>
+            <a:endParaRPr lang="es-ES" sz="1200" b="1" i="0" dirty="0">
+              <a:solidFill>
+                <a:srgbClr val="222222"/>
+              </a:solidFill>
+              <a:effectLst/>
+              <a:latin typeface="Segoe UI" panose="020B0502040204020203" pitchFamily="34" charset="0"/>
+            </a:endParaRPr>
+          </a:p>
+        </p:txBody>
+      </p:sp>
+      <p:pic>
+        <p:nvPicPr>
+          <p:cNvPr id="5" name="Imagen 4" descr="Tabla&#10;&#10;Descripción generada automáticamente">
+            <a:extLst>
+              <a:ext uri="{FF2B5EF4-FFF2-40B4-BE49-F238E27FC236}">
+                <a16:creationId xmlns:a16="http://schemas.microsoft.com/office/drawing/2014/main" id="{CE3BCE3C-16E5-4C8E-8F45-F7DFBFF6E8C5}"/>
+              </a:ext>
+            </a:extLst>
+          </p:cNvPr>
+          <p:cNvPicPr>
+            <a:picLocks noChangeAspect="1"/>
+          </p:cNvPicPr>
+          <p:nvPr/>
+        </p:nvPicPr>
+        <p:blipFill>
+          <a:blip r:embed="rId2">
+            <a:extLst>
+              <a:ext uri="{28A0092B-C50C-407E-A947-70E740481C1C}">
+                <a14:useLocalDpi xmlns:a14="http://schemas.microsoft.com/office/drawing/2010/main" val="0"/>
+              </a:ext>
+            </a:extLst>
+          </a:blip>
+          <a:stretch>
+            <a:fillRect/>
+          </a:stretch>
+        </p:blipFill>
+        <p:spPr>
+          <a:xfrm>
+            <a:off x="1188221" y="1885474"/>
+            <a:ext cx="7813374" cy="4946635"/>
+          </a:xfrm>
+          <a:prstGeom prst="rect">
+            <a:avLst/>
+          </a:prstGeom>
+        </p:spPr>
+      </p:pic>
+      <p:sp>
+        <p:nvSpPr>
+          <p:cNvPr id="6" name="Rectángulo 5">
+            <a:extLst>
+              <a:ext uri="{FF2B5EF4-FFF2-40B4-BE49-F238E27FC236}">
+                <a16:creationId xmlns:a16="http://schemas.microsoft.com/office/drawing/2014/main" id="{679BBCBE-BEB1-499D-A291-2F5999072EC3}"/>
+              </a:ext>
+            </a:extLst>
+          </p:cNvPr>
+          <p:cNvSpPr/>
+          <p:nvPr/>
+        </p:nvSpPr>
+        <p:spPr>
+          <a:xfrm>
+            <a:off x="1619672" y="2996952"/>
+            <a:ext cx="792088" cy="1152128"/>
+          </a:xfrm>
+          <a:prstGeom prst="rect">
+            <a:avLst/>
+          </a:prstGeom>
+          <a:noFill/>
+          <a:ln>
+            <a:solidFill>
+              <a:srgbClr val="FF0000"/>
+            </a:solidFill>
+          </a:ln>
+        </p:spPr>
+        <p:style>
+          <a:lnRef idx="2">
+            <a:schemeClr val="accent1">
+              <a:shade val="50000"/>
+            </a:schemeClr>
+          </a:lnRef>
+          <a:fillRef idx="1">
+            <a:schemeClr val="accent1"/>
+          </a:fillRef>
+          <a:effectRef idx="0">
+            <a:schemeClr val="accent1"/>
+          </a:effectRef>
+          <a:fontRef idx="minor">
+            <a:schemeClr val="lt1"/>
+          </a:fontRef>
+        </p:style>
+        <p:txBody>
+          <a:bodyPr rtlCol="0" anchor="ctr"/>
+          <a:lstStyle/>
+          <a:p>
+            <a:pPr algn="ctr"/>
+            <a:endParaRPr lang="en-US"/>
+          </a:p>
+        </p:txBody>
+      </p:sp>
+    </p:spTree>
+    <p:extLst>
+      <p:ext uri="{BB962C8B-B14F-4D97-AF65-F5344CB8AC3E}">
+        <p14:creationId xmlns:p14="http://schemas.microsoft.com/office/powerpoint/2010/main" val="46592018"/>
+      </p:ext>
+    </p:extLst>
+  </p:cSld>
+  <p:clrMapOvr>
+    <a:masterClrMapping/>
+  </p:clrMapOvr>
+</p:sld>
+</file>
+
+<file path=ppt/slides/slide6.xml><?xml version="1.0" encoding="utf-8"?>
+<p:sld xmlns:a="http://schemas.openxmlformats.org/drawingml/2006/main" xmlns:r="http://schemas.openxmlformats.org/officeDocument/2006/relationships" xmlns:p="http://schemas.openxmlformats.org/presentationml/2006/main">
+  <p:cSld>
+    <p:spTree>
+      <p:nvGrpSpPr>
+        <p:cNvPr id="1" name=""/>
+        <p:cNvGrpSpPr/>
+        <p:nvPr/>
+      </p:nvGrpSpPr>
+      <p:grpSpPr>
+        <a:xfrm>
+          <a:off x="0" y="0"/>
+          <a:ext cx="0" cy="0"/>
+          <a:chOff x="0" y="0"/>
+          <a:chExt cx="0" cy="0"/>
+        </a:xfrm>
+      </p:grpSpPr>
+      <p:sp>
+        <p:nvSpPr>
+          <p:cNvPr id="5" name="Title 1"/>
+          <p:cNvSpPr txBox="1">
+            <a:spLocks/>
+          </p:cNvSpPr>
+          <p:nvPr/>
+        </p:nvSpPr>
+        <p:spPr>
+          <a:xfrm>
+            <a:off x="1187624" y="2564904"/>
+            <a:ext cx="7772400" cy="1470025"/>
+          </a:xfrm>
+          <a:prstGeom prst="rect">
+            <a:avLst/>
+          </a:prstGeom>
+        </p:spPr>
+        <p:txBody>
+          <a:bodyPr vert="horz" lIns="91440" tIns="45720" rIns="91440" bIns="45720" rtlCol="0" anchor="ctr">
+            <a:normAutofit/>
+          </a:bodyPr>
+          <a:lstStyle>
+            <a:lvl1pPr algn="ctr" defTabSz="914400" rtl="0" eaLnBrk="1" latinLnBrk="0" hangingPunct="1">
+              <a:spcBef>
+                <a:spcPct val="0"/>
+              </a:spcBef>
+              <a:buNone/>
+              <a:defRPr sz="4400" kern="1200">
+                <a:solidFill>
+                  <a:schemeClr val="tx1"/>
+                </a:solidFill>
+                <a:latin typeface="+mj-lt"/>
+                <a:ea typeface="+mj-ea"/>
+                <a:cs typeface="+mj-cs"/>
+              </a:defRPr>
+            </a:lvl1pPr>
+          </a:lstStyle>
+          <a:p>
+            <a:r>
+              <a:rPr lang="es-MX" b="1" dirty="0">
+                <a:latin typeface="Century Gothic" panose="020B0502020202020204" pitchFamily="34" charset="0"/>
+              </a:rPr>
+              <a:t>26/04/2021 – 30/04/2021</a:t>
+            </a:r>
+            <a:endParaRPr lang="es-MX" dirty="0">
+              <a:latin typeface="Century Gothic" panose="020B0502020202020204" pitchFamily="34" charset="0"/>
+            </a:endParaRPr>
+          </a:p>
+        </p:txBody>
+      </p:sp>
+    </p:spTree>
+    <p:extLst>
+      <p:ext uri="{BB962C8B-B14F-4D97-AF65-F5344CB8AC3E}">
+        <p14:creationId xmlns:p14="http://schemas.microsoft.com/office/powerpoint/2010/main" val="1511288367"/>
+      </p:ext>
+    </p:extLst>
+  </p:cSld>
+  <p:clrMapOvr>
+    <a:masterClrMapping/>
+  </p:clrMapOvr>
+</p:sld>
+</file>
+
+<file path=ppt/slides/slide7.xml><?xml version="1.0" encoding="utf-8"?>
+<p:sld xmlns:a="http://schemas.openxmlformats.org/drawingml/2006/main" xmlns:r="http://schemas.openxmlformats.org/officeDocument/2006/relationships" xmlns:p="http://schemas.openxmlformats.org/presentationml/2006/main">
+  <p:cSld>
+    <p:spTree>
+      <p:nvGrpSpPr>
+        <p:cNvPr id="1" name=""/>
+        <p:cNvGrpSpPr/>
+        <p:nvPr/>
+      </p:nvGrpSpPr>
+      <p:grpSpPr>
+        <a:xfrm>
+          <a:off x="0" y="0"/>
+          <a:ext cx="0" cy="0"/>
+          <a:chOff x="0" y="0"/>
+          <a:chExt cx="0" cy="0"/>
+        </a:xfrm>
+      </p:grpSpPr>
+      <p:sp>
+        <p:nvSpPr>
+          <p:cNvPr id="8" name="Title 1"/>
+          <p:cNvSpPr txBox="1">
+            <a:spLocks/>
+          </p:cNvSpPr>
+          <p:nvPr/>
+        </p:nvSpPr>
+        <p:spPr>
+          <a:xfrm>
+            <a:off x="1087408" y="274638"/>
+            <a:ext cx="7229008" cy="634082"/>
+          </a:xfrm>
+          <a:prstGeom prst="rect">
+            <a:avLst/>
+          </a:prstGeom>
+        </p:spPr>
+        <p:txBody>
+          <a:bodyPr/>
+          <a:lstStyle>
+            <a:lvl1pPr algn="ctr" defTabSz="914400" rtl="0" eaLnBrk="1" latinLnBrk="0" hangingPunct="1">
+              <a:spcBef>
+                <a:spcPct val="0"/>
+              </a:spcBef>
+              <a:buNone/>
+              <a:defRPr sz="4400" kern="1200">
+                <a:solidFill>
+                  <a:schemeClr val="tx1"/>
+                </a:solidFill>
+                <a:latin typeface="+mj-lt"/>
+                <a:ea typeface="+mj-ea"/>
+                <a:cs typeface="+mj-cs"/>
+              </a:defRPr>
+            </a:lvl1pPr>
+          </a:lstStyle>
+          <a:p>
+            <a:pPr algn="l"/>
+            <a:r>
+              <a:rPr lang="es-ES" sz="2000" dirty="0">
+                <a:solidFill>
+                  <a:srgbClr val="3F1900"/>
+                </a:solidFill>
+              </a:rPr>
               <a:t>Pantalla Planning</a:t>
             </a:r>
             <a:endParaRPr lang="en-US" sz="2000" dirty="0">
@@ -4097,7 +7539,7 @@
 </p:sld>
 </file>
 
-<file path=ppt/slides/slide3.xml><?xml version="1.0" encoding="utf-8"?>
+<file path=ppt/slides/slide8.xml><?xml version="1.0" encoding="utf-8"?>
 <p:sld xmlns:a="http://schemas.openxmlformats.org/drawingml/2006/main" xmlns:r="http://schemas.openxmlformats.org/officeDocument/2006/relationships" xmlns:p="http://schemas.openxmlformats.org/presentationml/2006/main">
   <p:cSld>
     <p:spTree>
@@ -4630,7 +8072,7 @@
 </p:sld>
 </file>
 
-<file path=ppt/slides/slide4.xml><?xml version="1.0" encoding="utf-8"?>
+<file path=ppt/slides/slide9.xml><?xml version="1.0" encoding="utf-8"?>
 <p:sld xmlns:a="http://schemas.openxmlformats.org/drawingml/2006/main" xmlns:r="http://schemas.openxmlformats.org/officeDocument/2006/relationships" xmlns:p="http://schemas.openxmlformats.org/presentationml/2006/main">
   <p:cSld>
     <p:spTree>
@@ -5266,1735 +8708,6 @@
     <p:extLst>
       <p:ext uri="{BB962C8B-B14F-4D97-AF65-F5344CB8AC3E}">
         <p14:creationId xmlns:p14="http://schemas.microsoft.com/office/powerpoint/2010/main" val="3470145503"/>
-      </p:ext>
-    </p:extLst>
-  </p:cSld>
-  <p:clrMapOvr>
-    <a:masterClrMapping/>
-  </p:clrMapOvr>
-</p:sld>
-</file>
-
-<file path=ppt/slides/slide5.xml><?xml version="1.0" encoding="utf-8"?>
-<p:sld xmlns:a="http://schemas.openxmlformats.org/drawingml/2006/main" xmlns:r="http://schemas.openxmlformats.org/officeDocument/2006/relationships" xmlns:p="http://schemas.openxmlformats.org/presentationml/2006/main">
-  <p:cSld>
-    <p:spTree>
-      <p:nvGrpSpPr>
-        <p:cNvPr id="1" name=""/>
-        <p:cNvGrpSpPr/>
-        <p:nvPr/>
-      </p:nvGrpSpPr>
-      <p:grpSpPr>
-        <a:xfrm>
-          <a:off x="0" y="0"/>
-          <a:ext cx="0" cy="0"/>
-          <a:chOff x="0" y="0"/>
-          <a:chExt cx="0" cy="0"/>
-        </a:xfrm>
-      </p:grpSpPr>
-      <p:pic>
-        <p:nvPicPr>
-          <p:cNvPr id="5" name="Imagen 4" descr="Interfaz de usuario gráfica, Aplicación, Tabla, Excel&#10;&#10;Descripción generada automáticamente">
-            <a:extLst>
-              <a:ext uri="{FF2B5EF4-FFF2-40B4-BE49-F238E27FC236}">
-                <a16:creationId xmlns:a16="http://schemas.microsoft.com/office/drawing/2014/main" id="{70EE0B7D-6150-45FB-A817-BB56EDD19E84}"/>
-              </a:ext>
-            </a:extLst>
-          </p:cNvPr>
-          <p:cNvPicPr>
-            <a:picLocks noChangeAspect="1"/>
-          </p:cNvPicPr>
-          <p:nvPr/>
-        </p:nvPicPr>
-        <p:blipFill>
-          <a:blip r:embed="rId2">
-            <a:extLst>
-              <a:ext uri="{28A0092B-C50C-407E-A947-70E740481C1C}">
-                <a14:useLocalDpi xmlns:a14="http://schemas.microsoft.com/office/drawing/2010/main" val="0"/>
-              </a:ext>
-            </a:extLst>
-          </a:blip>
-          <a:stretch>
-            <a:fillRect/>
-          </a:stretch>
-        </p:blipFill>
-        <p:spPr>
-          <a:xfrm>
-            <a:off x="1187624" y="1843084"/>
-            <a:ext cx="7848869" cy="4898284"/>
-          </a:xfrm>
-          <a:prstGeom prst="rect">
-            <a:avLst/>
-          </a:prstGeom>
-        </p:spPr>
-      </p:pic>
-      <p:sp>
-        <p:nvSpPr>
-          <p:cNvPr id="8" name="Title 1"/>
-          <p:cNvSpPr txBox="1">
-            <a:spLocks/>
-          </p:cNvSpPr>
-          <p:nvPr/>
-        </p:nvSpPr>
-        <p:spPr>
-          <a:xfrm>
-            <a:off x="1087408" y="274638"/>
-            <a:ext cx="7229008" cy="634082"/>
-          </a:xfrm>
-          <a:prstGeom prst="rect">
-            <a:avLst/>
-          </a:prstGeom>
-        </p:spPr>
-        <p:txBody>
-          <a:bodyPr/>
-          <a:lstStyle>
-            <a:lvl1pPr algn="ctr" defTabSz="914400" rtl="0" eaLnBrk="1" latinLnBrk="0" hangingPunct="1">
-              <a:spcBef>
-                <a:spcPct val="0"/>
-              </a:spcBef>
-              <a:buNone/>
-              <a:defRPr sz="4400" kern="1200">
-                <a:solidFill>
-                  <a:schemeClr val="tx1"/>
-                </a:solidFill>
-                <a:latin typeface="+mj-lt"/>
-                <a:ea typeface="+mj-ea"/>
-                <a:cs typeface="+mj-cs"/>
-              </a:defRPr>
-            </a:lvl1pPr>
-          </a:lstStyle>
-          <a:p>
-            <a:pPr algn="l"/>
-            <a:r>
-              <a:rPr lang="es-ES" sz="2000" dirty="0">
-                <a:solidFill>
-                  <a:srgbClr val="3F1900"/>
-                </a:solidFill>
-              </a:rPr>
-              <a:t>Pantalla Planning</a:t>
-            </a:r>
-            <a:endParaRPr lang="en-US" sz="2000" dirty="0">
-              <a:solidFill>
-                <a:srgbClr val="3F1900"/>
-              </a:solidFill>
-            </a:endParaRPr>
-          </a:p>
-        </p:txBody>
-      </p:sp>
-      <p:sp>
-        <p:nvSpPr>
-          <p:cNvPr id="4" name="Content Placeholder 3"/>
-          <p:cNvSpPr txBox="1">
-            <a:spLocks/>
-          </p:cNvSpPr>
-          <p:nvPr/>
-        </p:nvSpPr>
-        <p:spPr>
-          <a:xfrm>
-            <a:off x="1331640" y="1196753"/>
-            <a:ext cx="7488832" cy="5137780"/>
-          </a:xfrm>
-          <a:prstGeom prst="rect">
-            <a:avLst/>
-          </a:prstGeom>
-        </p:spPr>
-        <p:txBody>
-          <a:bodyPr>
-            <a:normAutofit/>
-          </a:bodyPr>
-          <a:lstStyle>
-            <a:lvl1pPr marL="342900" indent="-342900" algn="l" defTabSz="914400" rtl="0" eaLnBrk="1" latinLnBrk="0" hangingPunct="1">
-              <a:spcBef>
-                <a:spcPct val="20000"/>
-              </a:spcBef>
-              <a:buFont typeface="Arial" panose="020B0604020202020204" pitchFamily="34" charset="0"/>
-              <a:buChar char="•"/>
-              <a:defRPr sz="3200" kern="1200">
-                <a:solidFill>
-                  <a:schemeClr val="tx1"/>
-                </a:solidFill>
-                <a:latin typeface="+mn-lt"/>
-                <a:ea typeface="+mn-ea"/>
-                <a:cs typeface="+mn-cs"/>
-              </a:defRPr>
-            </a:lvl1pPr>
-            <a:lvl2pPr marL="742950" indent="-285750" algn="l" defTabSz="914400" rtl="0" eaLnBrk="1" latinLnBrk="0" hangingPunct="1">
-              <a:spcBef>
-                <a:spcPct val="20000"/>
-              </a:spcBef>
-              <a:buFont typeface="Arial" panose="020B0604020202020204" pitchFamily="34" charset="0"/>
-              <a:buChar char="–"/>
-              <a:defRPr sz="2800" kern="1200">
-                <a:solidFill>
-                  <a:schemeClr val="tx1"/>
-                </a:solidFill>
-                <a:latin typeface="+mn-lt"/>
-                <a:ea typeface="+mn-ea"/>
-                <a:cs typeface="+mn-cs"/>
-              </a:defRPr>
-            </a:lvl2pPr>
-            <a:lvl3pPr marL="1143000" indent="-228600" algn="l" defTabSz="914400" rtl="0" eaLnBrk="1" latinLnBrk="0" hangingPunct="1">
-              <a:spcBef>
-                <a:spcPct val="20000"/>
-              </a:spcBef>
-              <a:buFont typeface="Arial" panose="020B0604020202020204" pitchFamily="34" charset="0"/>
-              <a:buChar char="•"/>
-              <a:defRPr sz="2400" kern="1200">
-                <a:solidFill>
-                  <a:schemeClr val="tx1"/>
-                </a:solidFill>
-                <a:latin typeface="+mn-lt"/>
-                <a:ea typeface="+mn-ea"/>
-                <a:cs typeface="+mn-cs"/>
-              </a:defRPr>
-            </a:lvl3pPr>
-            <a:lvl4pPr marL="1600200" indent="-228600" algn="l" defTabSz="914400" rtl="0" eaLnBrk="1" latinLnBrk="0" hangingPunct="1">
-              <a:spcBef>
-                <a:spcPct val="20000"/>
-              </a:spcBef>
-              <a:buFont typeface="Arial" panose="020B0604020202020204" pitchFamily="34" charset="0"/>
-              <a:buChar char="–"/>
-              <a:defRPr sz="2000" kern="1200">
-                <a:solidFill>
-                  <a:schemeClr val="tx1"/>
-                </a:solidFill>
-                <a:latin typeface="+mn-lt"/>
-                <a:ea typeface="+mn-ea"/>
-                <a:cs typeface="+mn-cs"/>
-              </a:defRPr>
-            </a:lvl4pPr>
-            <a:lvl5pPr marL="2057400" indent="-228600" algn="l" defTabSz="914400" rtl="0" eaLnBrk="1" latinLnBrk="0" hangingPunct="1">
-              <a:spcBef>
-                <a:spcPct val="20000"/>
-              </a:spcBef>
-              <a:buFont typeface="Arial" panose="020B0604020202020204" pitchFamily="34" charset="0"/>
-              <a:buChar char="»"/>
-              <a:defRPr sz="2000" kern="1200">
-                <a:solidFill>
-                  <a:schemeClr val="tx1"/>
-                </a:solidFill>
-                <a:latin typeface="+mn-lt"/>
-                <a:ea typeface="+mn-ea"/>
-                <a:cs typeface="+mn-cs"/>
-              </a:defRPr>
-            </a:lvl5pPr>
-            <a:lvl6pPr marL="2514600" indent="-228600" algn="l" defTabSz="914400" rtl="0" eaLnBrk="1" latinLnBrk="0" hangingPunct="1">
-              <a:spcBef>
-                <a:spcPct val="20000"/>
-              </a:spcBef>
-              <a:buFont typeface="Arial" panose="020B0604020202020204" pitchFamily="34" charset="0"/>
-              <a:buChar char="•"/>
-              <a:defRPr sz="2000" kern="1200">
-                <a:solidFill>
-                  <a:schemeClr val="tx1"/>
-                </a:solidFill>
-                <a:latin typeface="+mn-lt"/>
-                <a:ea typeface="+mn-ea"/>
-                <a:cs typeface="+mn-cs"/>
-              </a:defRPr>
-            </a:lvl6pPr>
-            <a:lvl7pPr marL="2971800" indent="-228600" algn="l" defTabSz="914400" rtl="0" eaLnBrk="1" latinLnBrk="0" hangingPunct="1">
-              <a:spcBef>
-                <a:spcPct val="20000"/>
-              </a:spcBef>
-              <a:buFont typeface="Arial" panose="020B0604020202020204" pitchFamily="34" charset="0"/>
-              <a:buChar char="•"/>
-              <a:defRPr sz="2000" kern="1200">
-                <a:solidFill>
-                  <a:schemeClr val="tx1"/>
-                </a:solidFill>
-                <a:latin typeface="+mn-lt"/>
-                <a:ea typeface="+mn-ea"/>
-                <a:cs typeface="+mn-cs"/>
-              </a:defRPr>
-            </a:lvl7pPr>
-            <a:lvl8pPr marL="3429000" indent="-228600" algn="l" defTabSz="914400" rtl="0" eaLnBrk="1" latinLnBrk="0" hangingPunct="1">
-              <a:spcBef>
-                <a:spcPct val="20000"/>
-              </a:spcBef>
-              <a:buFont typeface="Arial" panose="020B0604020202020204" pitchFamily="34" charset="0"/>
-              <a:buChar char="•"/>
-              <a:defRPr sz="2000" kern="1200">
-                <a:solidFill>
-                  <a:schemeClr val="tx1"/>
-                </a:solidFill>
-                <a:latin typeface="+mn-lt"/>
-                <a:ea typeface="+mn-ea"/>
-                <a:cs typeface="+mn-cs"/>
-              </a:defRPr>
-            </a:lvl8pPr>
-            <a:lvl9pPr marL="3886200" indent="-228600" algn="l" defTabSz="914400" rtl="0" eaLnBrk="1" latinLnBrk="0" hangingPunct="1">
-              <a:spcBef>
-                <a:spcPct val="20000"/>
-              </a:spcBef>
-              <a:buFont typeface="Arial" panose="020B0604020202020204" pitchFamily="34" charset="0"/>
-              <a:buChar char="•"/>
-              <a:defRPr sz="2000" kern="1200">
-                <a:solidFill>
-                  <a:schemeClr val="tx1"/>
-                </a:solidFill>
-                <a:latin typeface="+mn-lt"/>
-                <a:ea typeface="+mn-ea"/>
-                <a:cs typeface="+mn-cs"/>
-              </a:defRPr>
-            </a:lvl9pPr>
-          </a:lstStyle>
-          <a:p>
-            <a:pPr marL="0" indent="0" algn="just">
-              <a:buFont typeface="Arial" panose="020B0604020202020204" pitchFamily="34" charset="0"/>
-              <a:buNone/>
-            </a:pPr>
-            <a:endParaRPr lang="en-US" sz="2000" i="1"/>
-          </a:p>
-        </p:txBody>
-      </p:sp>
-      <p:sp>
-        <p:nvSpPr>
-          <p:cNvPr id="10" name="Rectangle 9"/>
-          <p:cNvSpPr/>
-          <p:nvPr/>
-        </p:nvSpPr>
-        <p:spPr>
-          <a:xfrm>
-            <a:off x="1115615" y="1054477"/>
-            <a:ext cx="7920879" cy="830997"/>
-          </a:xfrm>
-          <a:prstGeom prst="rect">
-            <a:avLst/>
-          </a:prstGeom>
-        </p:spPr>
-        <p:txBody>
-          <a:bodyPr wrap="square">
-            <a:spAutoFit/>
-          </a:bodyPr>
-          <a:lstStyle/>
-          <a:p>
-            <a:pPr>
-              <a:buFont typeface="Arial" panose="020B0604020202020204" pitchFamily="34" charset="0"/>
-              <a:buChar char="•"/>
-            </a:pPr>
-            <a:r>
-              <a:rPr lang="es-ES" sz="1200" b="1" i="0" dirty="0">
-                <a:solidFill>
-                  <a:srgbClr val="222222"/>
-                </a:solidFill>
-                <a:effectLst/>
-                <a:latin typeface="Segoe UI" panose="020B0502040204020203" pitchFamily="34" charset="0"/>
-              </a:rPr>
-              <a:t> Acción Clonar Orden: </a:t>
-            </a:r>
-            <a:r>
-              <a:rPr lang="es-ES" sz="1200" i="0" dirty="0">
-                <a:solidFill>
-                  <a:srgbClr val="222222"/>
-                </a:solidFill>
-                <a:effectLst/>
-                <a:latin typeface="Segoe UI" panose="020B0502040204020203" pitchFamily="34" charset="0"/>
-              </a:rPr>
-              <a:t>Una vez</a:t>
-            </a:r>
-            <a:r>
-              <a:rPr lang="es-ES" sz="1200" dirty="0">
-                <a:solidFill>
-                  <a:srgbClr val="222222"/>
-                </a:solidFill>
-                <a:latin typeface="Segoe UI" panose="020B0502040204020203" pitchFamily="34" charset="0"/>
-              </a:rPr>
-              <a:t> </a:t>
-            </a:r>
-            <a:r>
-              <a:rPr lang="es-ES" sz="1200" i="0" dirty="0">
-                <a:solidFill>
-                  <a:srgbClr val="222222"/>
-                </a:solidFill>
-                <a:effectLst/>
-                <a:latin typeface="Segoe UI" panose="020B0502040204020203" pitchFamily="34" charset="0"/>
-              </a:rPr>
-              <a:t>cargada la información de la orden que desea </a:t>
-            </a:r>
-            <a:r>
-              <a:rPr lang="es-ES" sz="1200" dirty="0">
-                <a:solidFill>
-                  <a:srgbClr val="222222"/>
-                </a:solidFill>
-                <a:latin typeface="Segoe UI" panose="020B0502040204020203" pitchFamily="34" charset="0"/>
-              </a:rPr>
-              <a:t>Clonar, </a:t>
-            </a:r>
-            <a:r>
-              <a:rPr lang="es-ES" sz="1200" b="1" dirty="0">
-                <a:solidFill>
-                  <a:srgbClr val="222222"/>
-                </a:solidFill>
-                <a:latin typeface="Segoe UI" panose="020B0502040204020203" pitchFamily="34" charset="0"/>
-              </a:rPr>
-              <a:t>1.- </a:t>
-            </a:r>
-            <a:r>
-              <a:rPr lang="es-ES" sz="1200" dirty="0">
-                <a:solidFill>
-                  <a:srgbClr val="222222"/>
-                </a:solidFill>
-                <a:latin typeface="Segoe UI" panose="020B0502040204020203" pitchFamily="34" charset="0"/>
-              </a:rPr>
-              <a:t>Dar Click sobre el </a:t>
-            </a:r>
-            <a:r>
-              <a:rPr lang="es-ES" sz="1200" b="1" i="0" dirty="0">
-                <a:solidFill>
-                  <a:srgbClr val="222222"/>
-                </a:solidFill>
-                <a:effectLst/>
-                <a:latin typeface="Segoe UI" panose="020B0502040204020203" pitchFamily="34" charset="0"/>
-              </a:rPr>
-              <a:t>Botón con icono de (ADN) </a:t>
-            </a:r>
-            <a:r>
-              <a:rPr lang="es-ES" sz="1200" i="0" dirty="0">
-                <a:solidFill>
-                  <a:srgbClr val="222222"/>
-                </a:solidFill>
-                <a:effectLst/>
-                <a:latin typeface="Segoe UI" panose="020B0502040204020203" pitchFamily="34" charset="0"/>
-              </a:rPr>
-              <a:t>esto limpiara la información de los campos que no se necesitan para crear una nueva orden marcados en recuadro verde y nos habilitara los campos que pueden cambiar para la orden que desea crear marcados en recuadro rojo </a:t>
-            </a:r>
-            <a:r>
-              <a:rPr lang="es-ES" sz="1200" b="1" i="0" dirty="0">
-                <a:solidFill>
-                  <a:srgbClr val="222222"/>
-                </a:solidFill>
-                <a:effectLst/>
-                <a:latin typeface="Segoe UI" panose="020B0502040204020203" pitchFamily="34" charset="0"/>
-              </a:rPr>
-              <a:t>2.- </a:t>
-            </a:r>
-            <a:r>
-              <a:rPr lang="es-ES" sz="1200" i="0" dirty="0">
-                <a:solidFill>
-                  <a:srgbClr val="222222"/>
-                </a:solidFill>
-                <a:effectLst/>
-                <a:latin typeface="Segoe UI" panose="020B0502040204020203" pitchFamily="34" charset="0"/>
-              </a:rPr>
-              <a:t>Para guardar la información dar Click en el </a:t>
-            </a:r>
-            <a:r>
-              <a:rPr lang="es-ES" sz="1200" b="1" i="0" dirty="0">
-                <a:solidFill>
-                  <a:srgbClr val="222222"/>
-                </a:solidFill>
-                <a:effectLst/>
-                <a:latin typeface="Segoe UI" panose="020B0502040204020203" pitchFamily="34" charset="0"/>
-              </a:rPr>
-              <a:t>Botón con icono(Disquete).</a:t>
-            </a:r>
-            <a:endParaRPr lang="es-ES" sz="1200" b="0" i="0" dirty="0">
-              <a:solidFill>
-                <a:srgbClr val="222222"/>
-              </a:solidFill>
-              <a:effectLst/>
-              <a:latin typeface="Segoe UI" panose="020B0502040204020203" pitchFamily="34" charset="0"/>
-            </a:endParaRPr>
-          </a:p>
-        </p:txBody>
-      </p:sp>
-      <p:sp>
-        <p:nvSpPr>
-          <p:cNvPr id="7" name="Rectángulo 6">
-            <a:extLst>
-              <a:ext uri="{FF2B5EF4-FFF2-40B4-BE49-F238E27FC236}">
-                <a16:creationId xmlns:a16="http://schemas.microsoft.com/office/drawing/2014/main" id="{F522F756-74C2-4FEF-9B51-87138DDE6496}"/>
-              </a:ext>
-            </a:extLst>
-          </p:cNvPr>
-          <p:cNvSpPr/>
-          <p:nvPr/>
-        </p:nvSpPr>
-        <p:spPr>
-          <a:xfrm>
-            <a:off x="2267744" y="2027750"/>
-            <a:ext cx="288032" cy="249122"/>
-          </a:xfrm>
-          <a:prstGeom prst="rect">
-            <a:avLst/>
-          </a:prstGeom>
-          <a:noFill/>
-          <a:ln>
-            <a:solidFill>
-              <a:srgbClr val="FF0000"/>
-            </a:solidFill>
-          </a:ln>
-        </p:spPr>
-        <p:style>
-          <a:lnRef idx="2">
-            <a:schemeClr val="accent1">
-              <a:shade val="50000"/>
-            </a:schemeClr>
-          </a:lnRef>
-          <a:fillRef idx="1">
-            <a:schemeClr val="accent1"/>
-          </a:fillRef>
-          <a:effectRef idx="0">
-            <a:schemeClr val="accent1"/>
-          </a:effectRef>
-          <a:fontRef idx="minor">
-            <a:schemeClr val="lt1"/>
-          </a:fontRef>
-        </p:style>
-        <p:txBody>
-          <a:bodyPr rtlCol="0" anchor="ctr"/>
-          <a:lstStyle/>
-          <a:p>
-            <a:pPr algn="ctr"/>
-            <a:endParaRPr lang="en-US"/>
-          </a:p>
-        </p:txBody>
-      </p:sp>
-      <p:sp>
-        <p:nvSpPr>
-          <p:cNvPr id="9" name="Rectángulo 8">
-            <a:extLst>
-              <a:ext uri="{FF2B5EF4-FFF2-40B4-BE49-F238E27FC236}">
-                <a16:creationId xmlns:a16="http://schemas.microsoft.com/office/drawing/2014/main" id="{1884257A-27C4-4F93-AE66-DE7AEBB5201C}"/>
-              </a:ext>
-            </a:extLst>
-          </p:cNvPr>
-          <p:cNvSpPr/>
-          <p:nvPr/>
-        </p:nvSpPr>
-        <p:spPr>
-          <a:xfrm>
-            <a:off x="5796136" y="2996952"/>
-            <a:ext cx="3240358" cy="3479857"/>
-          </a:xfrm>
-          <a:prstGeom prst="rect">
-            <a:avLst/>
-          </a:prstGeom>
-          <a:noFill/>
-          <a:ln>
-            <a:solidFill>
-              <a:srgbClr val="FF0000"/>
-            </a:solidFill>
-          </a:ln>
-        </p:spPr>
-        <p:style>
-          <a:lnRef idx="2">
-            <a:schemeClr val="accent1">
-              <a:shade val="50000"/>
-            </a:schemeClr>
-          </a:lnRef>
-          <a:fillRef idx="1">
-            <a:schemeClr val="accent1"/>
-          </a:fillRef>
-          <a:effectRef idx="0">
-            <a:schemeClr val="accent1"/>
-          </a:effectRef>
-          <a:fontRef idx="minor">
-            <a:schemeClr val="lt1"/>
-          </a:fontRef>
-        </p:style>
-        <p:txBody>
-          <a:bodyPr rtlCol="0" anchor="ctr"/>
-          <a:lstStyle/>
-          <a:p>
-            <a:pPr algn="ctr"/>
-            <a:endParaRPr lang="en-US"/>
-          </a:p>
-        </p:txBody>
-      </p:sp>
-      <p:sp>
-        <p:nvSpPr>
-          <p:cNvPr id="11" name="Rectángulo 10">
-            <a:extLst>
-              <a:ext uri="{FF2B5EF4-FFF2-40B4-BE49-F238E27FC236}">
-                <a16:creationId xmlns:a16="http://schemas.microsoft.com/office/drawing/2014/main" id="{0C50197D-BFBE-40DD-9437-3EE15B6815E8}"/>
-              </a:ext>
-            </a:extLst>
-          </p:cNvPr>
-          <p:cNvSpPr/>
-          <p:nvPr/>
-        </p:nvSpPr>
-        <p:spPr>
-          <a:xfrm>
-            <a:off x="2987824" y="2492896"/>
-            <a:ext cx="1152128" cy="288032"/>
-          </a:xfrm>
-          <a:prstGeom prst="rect">
-            <a:avLst/>
-          </a:prstGeom>
-          <a:noFill/>
-          <a:ln>
-            <a:solidFill>
-              <a:srgbClr val="FF0000"/>
-            </a:solidFill>
-          </a:ln>
-        </p:spPr>
-        <p:style>
-          <a:lnRef idx="2">
-            <a:schemeClr val="accent1">
-              <a:shade val="50000"/>
-            </a:schemeClr>
-          </a:lnRef>
-          <a:fillRef idx="1">
-            <a:schemeClr val="accent1"/>
-          </a:fillRef>
-          <a:effectRef idx="0">
-            <a:schemeClr val="accent1"/>
-          </a:effectRef>
-          <a:fontRef idx="minor">
-            <a:schemeClr val="lt1"/>
-          </a:fontRef>
-        </p:style>
-        <p:txBody>
-          <a:bodyPr rtlCol="0" anchor="ctr"/>
-          <a:lstStyle/>
-          <a:p>
-            <a:pPr algn="ctr"/>
-            <a:endParaRPr lang="en-US"/>
-          </a:p>
-        </p:txBody>
-      </p:sp>
-      <p:sp>
-        <p:nvSpPr>
-          <p:cNvPr id="12" name="Rectángulo 11">
-            <a:extLst>
-              <a:ext uri="{FF2B5EF4-FFF2-40B4-BE49-F238E27FC236}">
-                <a16:creationId xmlns:a16="http://schemas.microsoft.com/office/drawing/2014/main" id="{F88DE048-1B7F-4F7D-9245-482714354D4E}"/>
-              </a:ext>
-            </a:extLst>
-          </p:cNvPr>
-          <p:cNvSpPr/>
-          <p:nvPr/>
-        </p:nvSpPr>
-        <p:spPr>
-          <a:xfrm>
-            <a:off x="4139952" y="2780928"/>
-            <a:ext cx="2088232" cy="216024"/>
-          </a:xfrm>
-          <a:prstGeom prst="rect">
-            <a:avLst/>
-          </a:prstGeom>
-          <a:noFill/>
-          <a:ln>
-            <a:solidFill>
-              <a:srgbClr val="FF0000"/>
-            </a:solidFill>
-          </a:ln>
-        </p:spPr>
-        <p:style>
-          <a:lnRef idx="2">
-            <a:schemeClr val="accent1">
-              <a:shade val="50000"/>
-            </a:schemeClr>
-          </a:lnRef>
-          <a:fillRef idx="1">
-            <a:schemeClr val="accent1"/>
-          </a:fillRef>
-          <a:effectRef idx="0">
-            <a:schemeClr val="accent1"/>
-          </a:effectRef>
-          <a:fontRef idx="minor">
-            <a:schemeClr val="lt1"/>
-          </a:fontRef>
-        </p:style>
-        <p:txBody>
-          <a:bodyPr rtlCol="0" anchor="ctr"/>
-          <a:lstStyle/>
-          <a:p>
-            <a:pPr algn="ctr"/>
-            <a:endParaRPr lang="en-US"/>
-          </a:p>
-        </p:txBody>
-      </p:sp>
-      <p:sp>
-        <p:nvSpPr>
-          <p:cNvPr id="13" name="Rectángulo 12">
-            <a:extLst>
-              <a:ext uri="{FF2B5EF4-FFF2-40B4-BE49-F238E27FC236}">
-                <a16:creationId xmlns:a16="http://schemas.microsoft.com/office/drawing/2014/main" id="{5E0379D7-A0B6-4216-8EDD-305A1CE6F711}"/>
-              </a:ext>
-            </a:extLst>
-          </p:cNvPr>
-          <p:cNvSpPr/>
-          <p:nvPr/>
-        </p:nvSpPr>
-        <p:spPr>
-          <a:xfrm>
-            <a:off x="1259631" y="2492896"/>
-            <a:ext cx="1728191" cy="288032"/>
-          </a:xfrm>
-          <a:prstGeom prst="rect">
-            <a:avLst/>
-          </a:prstGeom>
-          <a:noFill/>
-          <a:ln>
-            <a:solidFill>
-              <a:srgbClr val="00B050"/>
-            </a:solidFill>
-          </a:ln>
-        </p:spPr>
-        <p:style>
-          <a:lnRef idx="2">
-            <a:schemeClr val="accent1">
-              <a:shade val="50000"/>
-            </a:schemeClr>
-          </a:lnRef>
-          <a:fillRef idx="1">
-            <a:schemeClr val="accent1"/>
-          </a:fillRef>
-          <a:effectRef idx="0">
-            <a:schemeClr val="accent1"/>
-          </a:effectRef>
-          <a:fontRef idx="minor">
-            <a:schemeClr val="lt1"/>
-          </a:fontRef>
-        </p:style>
-        <p:txBody>
-          <a:bodyPr rtlCol="0" anchor="ctr"/>
-          <a:lstStyle/>
-          <a:p>
-            <a:pPr algn="ctr"/>
-            <a:endParaRPr lang="en-US" dirty="0">
-              <a:highlight>
-                <a:srgbClr val="FFFF00"/>
-              </a:highlight>
-            </a:endParaRPr>
-          </a:p>
-        </p:txBody>
-      </p:sp>
-      <p:sp>
-        <p:nvSpPr>
-          <p:cNvPr id="14" name="Rectángulo 13">
-            <a:extLst>
-              <a:ext uri="{FF2B5EF4-FFF2-40B4-BE49-F238E27FC236}">
-                <a16:creationId xmlns:a16="http://schemas.microsoft.com/office/drawing/2014/main" id="{10CB6F9D-CC32-4522-9A35-4A0FD979FE3D}"/>
-              </a:ext>
-            </a:extLst>
-          </p:cNvPr>
-          <p:cNvSpPr/>
-          <p:nvPr/>
-        </p:nvSpPr>
-        <p:spPr>
-          <a:xfrm>
-            <a:off x="1259629" y="2780928"/>
-            <a:ext cx="1080123" cy="216024"/>
-          </a:xfrm>
-          <a:prstGeom prst="rect">
-            <a:avLst/>
-          </a:prstGeom>
-          <a:noFill/>
-          <a:ln>
-            <a:solidFill>
-              <a:srgbClr val="00B050"/>
-            </a:solidFill>
-          </a:ln>
-        </p:spPr>
-        <p:style>
-          <a:lnRef idx="2">
-            <a:schemeClr val="accent1">
-              <a:shade val="50000"/>
-            </a:schemeClr>
-          </a:lnRef>
-          <a:fillRef idx="1">
-            <a:schemeClr val="accent1"/>
-          </a:fillRef>
-          <a:effectRef idx="0">
-            <a:schemeClr val="accent1"/>
-          </a:effectRef>
-          <a:fontRef idx="minor">
-            <a:schemeClr val="lt1"/>
-          </a:fontRef>
-        </p:style>
-        <p:txBody>
-          <a:bodyPr rtlCol="0" anchor="ctr"/>
-          <a:lstStyle/>
-          <a:p>
-            <a:pPr algn="ctr"/>
-            <a:endParaRPr lang="en-US" dirty="0">
-              <a:highlight>
-                <a:srgbClr val="FFFF00"/>
-              </a:highlight>
-            </a:endParaRPr>
-          </a:p>
-        </p:txBody>
-      </p:sp>
-    </p:spTree>
-    <p:extLst>
-      <p:ext uri="{BB962C8B-B14F-4D97-AF65-F5344CB8AC3E}">
-        <p14:creationId xmlns:p14="http://schemas.microsoft.com/office/powerpoint/2010/main" val="1307672231"/>
-      </p:ext>
-    </p:extLst>
-  </p:cSld>
-  <p:clrMapOvr>
-    <a:masterClrMapping/>
-  </p:clrMapOvr>
-</p:sld>
-</file>
-
-<file path=ppt/slides/slide6.xml><?xml version="1.0" encoding="utf-8"?>
-<p:sld xmlns:a="http://schemas.openxmlformats.org/drawingml/2006/main" xmlns:r="http://schemas.openxmlformats.org/officeDocument/2006/relationships" xmlns:p="http://schemas.openxmlformats.org/presentationml/2006/main">
-  <p:cSld>
-    <p:spTree>
-      <p:nvGrpSpPr>
-        <p:cNvPr id="1" name=""/>
-        <p:cNvGrpSpPr/>
-        <p:nvPr/>
-      </p:nvGrpSpPr>
-      <p:grpSpPr>
-        <a:xfrm>
-          <a:off x="0" y="0"/>
-          <a:ext cx="0" cy="0"/>
-          <a:chOff x="0" y="0"/>
-          <a:chExt cx="0" cy="0"/>
-        </a:xfrm>
-      </p:grpSpPr>
-      <p:pic>
-        <p:nvPicPr>
-          <p:cNvPr id="3" name="Imagen 2" descr="Interfaz de usuario gráfica, Aplicación, Tabla&#10;&#10;Descripción generada automáticamente">
-            <a:extLst>
-              <a:ext uri="{FF2B5EF4-FFF2-40B4-BE49-F238E27FC236}">
-                <a16:creationId xmlns:a16="http://schemas.microsoft.com/office/drawing/2014/main" id="{D48E1C84-F2FC-406E-B145-2F488C5B91F8}"/>
-              </a:ext>
-            </a:extLst>
-          </p:cNvPr>
-          <p:cNvPicPr>
-            <a:picLocks noChangeAspect="1"/>
-          </p:cNvPicPr>
-          <p:nvPr/>
-        </p:nvPicPr>
-        <p:blipFill>
-          <a:blip r:embed="rId2">
-            <a:extLst>
-              <a:ext uri="{28A0092B-C50C-407E-A947-70E740481C1C}">
-                <a14:useLocalDpi xmlns:a14="http://schemas.microsoft.com/office/drawing/2010/main" val="0"/>
-              </a:ext>
-            </a:extLst>
-          </a:blip>
-          <a:stretch>
-            <a:fillRect/>
-          </a:stretch>
-        </p:blipFill>
-        <p:spPr>
-          <a:xfrm>
-            <a:off x="1187624" y="1516143"/>
-            <a:ext cx="7812360" cy="5153218"/>
-          </a:xfrm>
-          <a:prstGeom prst="rect">
-            <a:avLst/>
-          </a:prstGeom>
-        </p:spPr>
-      </p:pic>
-      <p:sp>
-        <p:nvSpPr>
-          <p:cNvPr id="8" name="Title 1"/>
-          <p:cNvSpPr txBox="1">
-            <a:spLocks/>
-          </p:cNvSpPr>
-          <p:nvPr/>
-        </p:nvSpPr>
-        <p:spPr>
-          <a:xfrm>
-            <a:off x="1087408" y="274638"/>
-            <a:ext cx="7229008" cy="634082"/>
-          </a:xfrm>
-          <a:prstGeom prst="rect">
-            <a:avLst/>
-          </a:prstGeom>
-        </p:spPr>
-        <p:txBody>
-          <a:bodyPr/>
-          <a:lstStyle>
-            <a:lvl1pPr algn="ctr" defTabSz="914400" rtl="0" eaLnBrk="1" latinLnBrk="0" hangingPunct="1">
-              <a:spcBef>
-                <a:spcPct val="0"/>
-              </a:spcBef>
-              <a:buNone/>
-              <a:defRPr sz="4400" kern="1200">
-                <a:solidFill>
-                  <a:schemeClr val="tx1"/>
-                </a:solidFill>
-                <a:latin typeface="+mj-lt"/>
-                <a:ea typeface="+mj-ea"/>
-                <a:cs typeface="+mj-cs"/>
-              </a:defRPr>
-            </a:lvl1pPr>
-          </a:lstStyle>
-          <a:p>
-            <a:pPr algn="l"/>
-            <a:r>
-              <a:rPr lang="es-ES" sz="2000" dirty="0">
-                <a:solidFill>
-                  <a:srgbClr val="3F1900"/>
-                </a:solidFill>
-              </a:rPr>
-              <a:t>Pantalla Planning</a:t>
-            </a:r>
-            <a:endParaRPr lang="en-US" sz="2000" dirty="0">
-              <a:solidFill>
-                <a:srgbClr val="3F1900"/>
-              </a:solidFill>
-            </a:endParaRPr>
-          </a:p>
-        </p:txBody>
-      </p:sp>
-      <p:sp>
-        <p:nvSpPr>
-          <p:cNvPr id="4" name="Content Placeholder 3"/>
-          <p:cNvSpPr txBox="1">
-            <a:spLocks/>
-          </p:cNvSpPr>
-          <p:nvPr/>
-        </p:nvSpPr>
-        <p:spPr>
-          <a:xfrm>
-            <a:off x="1331640" y="1196753"/>
-            <a:ext cx="7488832" cy="5137780"/>
-          </a:xfrm>
-          <a:prstGeom prst="rect">
-            <a:avLst/>
-          </a:prstGeom>
-        </p:spPr>
-        <p:txBody>
-          <a:bodyPr>
-            <a:normAutofit/>
-          </a:bodyPr>
-          <a:lstStyle>
-            <a:lvl1pPr marL="342900" indent="-342900" algn="l" defTabSz="914400" rtl="0" eaLnBrk="1" latinLnBrk="0" hangingPunct="1">
-              <a:spcBef>
-                <a:spcPct val="20000"/>
-              </a:spcBef>
-              <a:buFont typeface="Arial" panose="020B0604020202020204" pitchFamily="34" charset="0"/>
-              <a:buChar char="•"/>
-              <a:defRPr sz="3200" kern="1200">
-                <a:solidFill>
-                  <a:schemeClr val="tx1"/>
-                </a:solidFill>
-                <a:latin typeface="+mn-lt"/>
-                <a:ea typeface="+mn-ea"/>
-                <a:cs typeface="+mn-cs"/>
-              </a:defRPr>
-            </a:lvl1pPr>
-            <a:lvl2pPr marL="742950" indent="-285750" algn="l" defTabSz="914400" rtl="0" eaLnBrk="1" latinLnBrk="0" hangingPunct="1">
-              <a:spcBef>
-                <a:spcPct val="20000"/>
-              </a:spcBef>
-              <a:buFont typeface="Arial" panose="020B0604020202020204" pitchFamily="34" charset="0"/>
-              <a:buChar char="–"/>
-              <a:defRPr sz="2800" kern="1200">
-                <a:solidFill>
-                  <a:schemeClr val="tx1"/>
-                </a:solidFill>
-                <a:latin typeface="+mn-lt"/>
-                <a:ea typeface="+mn-ea"/>
-                <a:cs typeface="+mn-cs"/>
-              </a:defRPr>
-            </a:lvl2pPr>
-            <a:lvl3pPr marL="1143000" indent="-228600" algn="l" defTabSz="914400" rtl="0" eaLnBrk="1" latinLnBrk="0" hangingPunct="1">
-              <a:spcBef>
-                <a:spcPct val="20000"/>
-              </a:spcBef>
-              <a:buFont typeface="Arial" panose="020B0604020202020204" pitchFamily="34" charset="0"/>
-              <a:buChar char="•"/>
-              <a:defRPr sz="2400" kern="1200">
-                <a:solidFill>
-                  <a:schemeClr val="tx1"/>
-                </a:solidFill>
-                <a:latin typeface="+mn-lt"/>
-                <a:ea typeface="+mn-ea"/>
-                <a:cs typeface="+mn-cs"/>
-              </a:defRPr>
-            </a:lvl3pPr>
-            <a:lvl4pPr marL="1600200" indent="-228600" algn="l" defTabSz="914400" rtl="0" eaLnBrk="1" latinLnBrk="0" hangingPunct="1">
-              <a:spcBef>
-                <a:spcPct val="20000"/>
-              </a:spcBef>
-              <a:buFont typeface="Arial" panose="020B0604020202020204" pitchFamily="34" charset="0"/>
-              <a:buChar char="–"/>
-              <a:defRPr sz="2000" kern="1200">
-                <a:solidFill>
-                  <a:schemeClr val="tx1"/>
-                </a:solidFill>
-                <a:latin typeface="+mn-lt"/>
-                <a:ea typeface="+mn-ea"/>
-                <a:cs typeface="+mn-cs"/>
-              </a:defRPr>
-            </a:lvl4pPr>
-            <a:lvl5pPr marL="2057400" indent="-228600" algn="l" defTabSz="914400" rtl="0" eaLnBrk="1" latinLnBrk="0" hangingPunct="1">
-              <a:spcBef>
-                <a:spcPct val="20000"/>
-              </a:spcBef>
-              <a:buFont typeface="Arial" panose="020B0604020202020204" pitchFamily="34" charset="0"/>
-              <a:buChar char="»"/>
-              <a:defRPr sz="2000" kern="1200">
-                <a:solidFill>
-                  <a:schemeClr val="tx1"/>
-                </a:solidFill>
-                <a:latin typeface="+mn-lt"/>
-                <a:ea typeface="+mn-ea"/>
-                <a:cs typeface="+mn-cs"/>
-              </a:defRPr>
-            </a:lvl5pPr>
-            <a:lvl6pPr marL="2514600" indent="-228600" algn="l" defTabSz="914400" rtl="0" eaLnBrk="1" latinLnBrk="0" hangingPunct="1">
-              <a:spcBef>
-                <a:spcPct val="20000"/>
-              </a:spcBef>
-              <a:buFont typeface="Arial" panose="020B0604020202020204" pitchFamily="34" charset="0"/>
-              <a:buChar char="•"/>
-              <a:defRPr sz="2000" kern="1200">
-                <a:solidFill>
-                  <a:schemeClr val="tx1"/>
-                </a:solidFill>
-                <a:latin typeface="+mn-lt"/>
-                <a:ea typeface="+mn-ea"/>
-                <a:cs typeface="+mn-cs"/>
-              </a:defRPr>
-            </a:lvl6pPr>
-            <a:lvl7pPr marL="2971800" indent="-228600" algn="l" defTabSz="914400" rtl="0" eaLnBrk="1" latinLnBrk="0" hangingPunct="1">
-              <a:spcBef>
-                <a:spcPct val="20000"/>
-              </a:spcBef>
-              <a:buFont typeface="Arial" panose="020B0604020202020204" pitchFamily="34" charset="0"/>
-              <a:buChar char="•"/>
-              <a:defRPr sz="2000" kern="1200">
-                <a:solidFill>
-                  <a:schemeClr val="tx1"/>
-                </a:solidFill>
-                <a:latin typeface="+mn-lt"/>
-                <a:ea typeface="+mn-ea"/>
-                <a:cs typeface="+mn-cs"/>
-              </a:defRPr>
-            </a:lvl7pPr>
-            <a:lvl8pPr marL="3429000" indent="-228600" algn="l" defTabSz="914400" rtl="0" eaLnBrk="1" latinLnBrk="0" hangingPunct="1">
-              <a:spcBef>
-                <a:spcPct val="20000"/>
-              </a:spcBef>
-              <a:buFont typeface="Arial" panose="020B0604020202020204" pitchFamily="34" charset="0"/>
-              <a:buChar char="•"/>
-              <a:defRPr sz="2000" kern="1200">
-                <a:solidFill>
-                  <a:schemeClr val="tx1"/>
-                </a:solidFill>
-                <a:latin typeface="+mn-lt"/>
-                <a:ea typeface="+mn-ea"/>
-                <a:cs typeface="+mn-cs"/>
-              </a:defRPr>
-            </a:lvl8pPr>
-            <a:lvl9pPr marL="3886200" indent="-228600" algn="l" defTabSz="914400" rtl="0" eaLnBrk="1" latinLnBrk="0" hangingPunct="1">
-              <a:spcBef>
-                <a:spcPct val="20000"/>
-              </a:spcBef>
-              <a:buFont typeface="Arial" panose="020B0604020202020204" pitchFamily="34" charset="0"/>
-              <a:buChar char="•"/>
-              <a:defRPr sz="2000" kern="1200">
-                <a:solidFill>
-                  <a:schemeClr val="tx1"/>
-                </a:solidFill>
-                <a:latin typeface="+mn-lt"/>
-                <a:ea typeface="+mn-ea"/>
-                <a:cs typeface="+mn-cs"/>
-              </a:defRPr>
-            </a:lvl9pPr>
-          </a:lstStyle>
-          <a:p>
-            <a:pPr marL="0" indent="0" algn="just">
-              <a:buFont typeface="Arial" panose="020B0604020202020204" pitchFamily="34" charset="0"/>
-              <a:buNone/>
-            </a:pPr>
-            <a:endParaRPr lang="en-US" sz="2000" i="1"/>
-          </a:p>
-        </p:txBody>
-      </p:sp>
-      <p:sp>
-        <p:nvSpPr>
-          <p:cNvPr id="10" name="Rectangle 9"/>
-          <p:cNvSpPr/>
-          <p:nvPr/>
-        </p:nvSpPr>
-        <p:spPr>
-          <a:xfrm>
-            <a:off x="1115615" y="1054477"/>
-            <a:ext cx="7920879" cy="461665"/>
-          </a:xfrm>
-          <a:prstGeom prst="rect">
-            <a:avLst/>
-          </a:prstGeom>
-        </p:spPr>
-        <p:txBody>
-          <a:bodyPr wrap="square">
-            <a:spAutoFit/>
-          </a:bodyPr>
-          <a:lstStyle/>
-          <a:p>
-            <a:pPr>
-              <a:buFont typeface="Arial" panose="020B0604020202020204" pitchFamily="34" charset="0"/>
-              <a:buChar char="•"/>
-            </a:pPr>
-            <a:r>
-              <a:rPr lang="es-ES" sz="1200" b="1" i="0" dirty="0">
-                <a:solidFill>
-                  <a:srgbClr val="222222"/>
-                </a:solidFill>
-                <a:effectLst/>
-                <a:latin typeface="Segoe UI" panose="020B0502040204020203" pitchFamily="34" charset="0"/>
-              </a:rPr>
-              <a:t> Acción Eliminar Orden: </a:t>
-            </a:r>
-            <a:r>
-              <a:rPr lang="es-ES" sz="1200" i="0" dirty="0">
-                <a:solidFill>
-                  <a:srgbClr val="222222"/>
-                </a:solidFill>
-                <a:effectLst/>
-                <a:latin typeface="Segoe UI" panose="020B0502040204020203" pitchFamily="34" charset="0"/>
-              </a:rPr>
-              <a:t>Una vez</a:t>
-            </a:r>
-            <a:r>
-              <a:rPr lang="es-ES" sz="1200" dirty="0">
-                <a:solidFill>
-                  <a:srgbClr val="222222"/>
-                </a:solidFill>
-                <a:latin typeface="Segoe UI" panose="020B0502040204020203" pitchFamily="34" charset="0"/>
-              </a:rPr>
-              <a:t> </a:t>
-            </a:r>
-            <a:r>
-              <a:rPr lang="es-ES" sz="1200" i="0" dirty="0">
-                <a:solidFill>
-                  <a:srgbClr val="222222"/>
-                </a:solidFill>
-                <a:effectLst/>
-                <a:latin typeface="Segoe UI" panose="020B0502040204020203" pitchFamily="34" charset="0"/>
-              </a:rPr>
-              <a:t>cargada la información de la orden que desea Eliminar</a:t>
-            </a:r>
-            <a:r>
-              <a:rPr lang="es-ES" sz="1200" dirty="0">
-                <a:solidFill>
-                  <a:srgbClr val="222222"/>
-                </a:solidFill>
-                <a:latin typeface="Segoe UI" panose="020B0502040204020203" pitchFamily="34" charset="0"/>
-              </a:rPr>
-              <a:t>, </a:t>
-            </a:r>
-            <a:r>
-              <a:rPr lang="es-ES" sz="1200" b="1" dirty="0">
-                <a:solidFill>
-                  <a:srgbClr val="222222"/>
-                </a:solidFill>
-                <a:latin typeface="Segoe UI" panose="020B0502040204020203" pitchFamily="34" charset="0"/>
-              </a:rPr>
-              <a:t>1.- </a:t>
-            </a:r>
-            <a:r>
-              <a:rPr lang="es-ES" sz="1200" dirty="0">
-                <a:solidFill>
-                  <a:srgbClr val="222222"/>
-                </a:solidFill>
-                <a:latin typeface="Segoe UI" panose="020B0502040204020203" pitchFamily="34" charset="0"/>
-              </a:rPr>
-              <a:t>Dar Click sobre el </a:t>
-            </a:r>
-            <a:r>
-              <a:rPr lang="es-ES" sz="1200" b="1" i="0" dirty="0">
-                <a:solidFill>
-                  <a:srgbClr val="222222"/>
-                </a:solidFill>
-                <a:effectLst/>
-                <a:latin typeface="Segoe UI" panose="020B0502040204020203" pitchFamily="34" charset="0"/>
-              </a:rPr>
-              <a:t>Botón con icono de (X) </a:t>
-            </a:r>
-            <a:r>
-              <a:rPr lang="es-ES" sz="1200" i="0" dirty="0">
-                <a:solidFill>
-                  <a:srgbClr val="222222"/>
-                </a:solidFill>
-                <a:effectLst/>
-                <a:latin typeface="Segoe UI" panose="020B0502040204020203" pitchFamily="34" charset="0"/>
-              </a:rPr>
-              <a:t>esto permitirá Eliminar/Borrar la orden.</a:t>
-            </a:r>
-          </a:p>
-        </p:txBody>
-      </p:sp>
-      <p:sp>
-        <p:nvSpPr>
-          <p:cNvPr id="7" name="Rectángulo 6">
-            <a:extLst>
-              <a:ext uri="{FF2B5EF4-FFF2-40B4-BE49-F238E27FC236}">
-                <a16:creationId xmlns:a16="http://schemas.microsoft.com/office/drawing/2014/main" id="{F522F756-74C2-4FEF-9B51-87138DDE6496}"/>
-              </a:ext>
-            </a:extLst>
-          </p:cNvPr>
-          <p:cNvSpPr/>
-          <p:nvPr/>
-        </p:nvSpPr>
-        <p:spPr>
-          <a:xfrm>
-            <a:off x="1979712" y="1700808"/>
-            <a:ext cx="288032" cy="249122"/>
-          </a:xfrm>
-          <a:prstGeom prst="rect">
-            <a:avLst/>
-          </a:prstGeom>
-          <a:noFill/>
-          <a:ln>
-            <a:solidFill>
-              <a:srgbClr val="FF0000"/>
-            </a:solidFill>
-          </a:ln>
-        </p:spPr>
-        <p:style>
-          <a:lnRef idx="2">
-            <a:schemeClr val="accent1">
-              <a:shade val="50000"/>
-            </a:schemeClr>
-          </a:lnRef>
-          <a:fillRef idx="1">
-            <a:schemeClr val="accent1"/>
-          </a:fillRef>
-          <a:effectRef idx="0">
-            <a:schemeClr val="accent1"/>
-          </a:effectRef>
-          <a:fontRef idx="minor">
-            <a:schemeClr val="lt1"/>
-          </a:fontRef>
-        </p:style>
-        <p:txBody>
-          <a:bodyPr rtlCol="0" anchor="ctr"/>
-          <a:lstStyle/>
-          <a:p>
-            <a:pPr algn="ctr"/>
-            <a:endParaRPr lang="en-US"/>
-          </a:p>
-        </p:txBody>
-      </p:sp>
-    </p:spTree>
-    <p:extLst>
-      <p:ext uri="{BB962C8B-B14F-4D97-AF65-F5344CB8AC3E}">
-        <p14:creationId xmlns:p14="http://schemas.microsoft.com/office/powerpoint/2010/main" val="46686908"/>
-      </p:ext>
-    </p:extLst>
-  </p:cSld>
-  <p:clrMapOvr>
-    <a:masterClrMapping/>
-  </p:clrMapOvr>
-</p:sld>
-</file>
-
-<file path=ppt/slides/slide7.xml><?xml version="1.0" encoding="utf-8"?>
-<p:sld xmlns:a="http://schemas.openxmlformats.org/drawingml/2006/main" xmlns:r="http://schemas.openxmlformats.org/officeDocument/2006/relationships" xmlns:p="http://schemas.openxmlformats.org/presentationml/2006/main">
-  <p:cSld>
-    <p:spTree>
-      <p:nvGrpSpPr>
-        <p:cNvPr id="1" name=""/>
-        <p:cNvGrpSpPr/>
-        <p:nvPr/>
-      </p:nvGrpSpPr>
-      <p:grpSpPr>
-        <a:xfrm>
-          <a:off x="0" y="0"/>
-          <a:ext cx="0" cy="0"/>
-          <a:chOff x="0" y="0"/>
-          <a:chExt cx="0" cy="0"/>
-        </a:xfrm>
-      </p:grpSpPr>
-      <p:sp>
-        <p:nvSpPr>
-          <p:cNvPr id="5" name="Title 1"/>
-          <p:cNvSpPr txBox="1">
-            <a:spLocks/>
-          </p:cNvSpPr>
-          <p:nvPr/>
-        </p:nvSpPr>
-        <p:spPr>
-          <a:xfrm>
-            <a:off x="1187624" y="2564904"/>
-            <a:ext cx="7772400" cy="1470025"/>
-          </a:xfrm>
-          <a:prstGeom prst="rect">
-            <a:avLst/>
-          </a:prstGeom>
-        </p:spPr>
-        <p:txBody>
-          <a:bodyPr vert="horz" lIns="91440" tIns="45720" rIns="91440" bIns="45720" rtlCol="0" anchor="ctr">
-            <a:normAutofit/>
-          </a:bodyPr>
-          <a:lstStyle>
-            <a:lvl1pPr algn="ctr" defTabSz="914400" rtl="0" eaLnBrk="1" latinLnBrk="0" hangingPunct="1">
-              <a:spcBef>
-                <a:spcPct val="0"/>
-              </a:spcBef>
-              <a:buNone/>
-              <a:defRPr sz="4400" kern="1200">
-                <a:solidFill>
-                  <a:schemeClr val="tx1"/>
-                </a:solidFill>
-                <a:latin typeface="+mj-lt"/>
-                <a:ea typeface="+mj-ea"/>
-                <a:cs typeface="+mj-cs"/>
-              </a:defRPr>
-            </a:lvl1pPr>
-          </a:lstStyle>
-          <a:p>
-            <a:r>
-              <a:rPr lang="es-MX" b="1" dirty="0">
-                <a:latin typeface="Century Gothic" panose="020B0502020202020204" pitchFamily="34" charset="0"/>
-              </a:rPr>
-              <a:t>19/04/2021 – 23/04/2021</a:t>
-            </a:r>
-            <a:endParaRPr lang="es-MX" dirty="0">
-              <a:latin typeface="Century Gothic" panose="020B0502020202020204" pitchFamily="34" charset="0"/>
-            </a:endParaRPr>
-          </a:p>
-        </p:txBody>
-      </p:sp>
-    </p:spTree>
-    <p:extLst>
-      <p:ext uri="{BB962C8B-B14F-4D97-AF65-F5344CB8AC3E}">
-        <p14:creationId xmlns:p14="http://schemas.microsoft.com/office/powerpoint/2010/main" val="1388132571"/>
-      </p:ext>
-    </p:extLst>
-  </p:cSld>
-  <p:clrMapOvr>
-    <a:masterClrMapping/>
-  </p:clrMapOvr>
-</p:sld>
-</file>
-
-<file path=ppt/slides/slide8.xml><?xml version="1.0" encoding="utf-8"?>
-<p:sld xmlns:a="http://schemas.openxmlformats.org/drawingml/2006/main" xmlns:r="http://schemas.openxmlformats.org/officeDocument/2006/relationships" xmlns:p="http://schemas.openxmlformats.org/presentationml/2006/main">
-  <p:cSld>
-    <p:spTree>
-      <p:nvGrpSpPr>
-        <p:cNvPr id="1" name=""/>
-        <p:cNvGrpSpPr/>
-        <p:nvPr/>
-      </p:nvGrpSpPr>
-      <p:grpSpPr>
-        <a:xfrm>
-          <a:off x="0" y="0"/>
-          <a:ext cx="0" cy="0"/>
-          <a:chOff x="0" y="0"/>
-          <a:chExt cx="0" cy="0"/>
-        </a:xfrm>
-      </p:grpSpPr>
-      <p:sp>
-        <p:nvSpPr>
-          <p:cNvPr id="8" name="Title 1"/>
-          <p:cNvSpPr txBox="1">
-            <a:spLocks/>
-          </p:cNvSpPr>
-          <p:nvPr/>
-        </p:nvSpPr>
-        <p:spPr>
-          <a:xfrm>
-            <a:off x="1087408" y="274638"/>
-            <a:ext cx="7229008" cy="634082"/>
-          </a:xfrm>
-          <a:prstGeom prst="rect">
-            <a:avLst/>
-          </a:prstGeom>
-        </p:spPr>
-        <p:txBody>
-          <a:bodyPr/>
-          <a:lstStyle>
-            <a:lvl1pPr algn="ctr" defTabSz="914400" rtl="0" eaLnBrk="1" latinLnBrk="0" hangingPunct="1">
-              <a:spcBef>
-                <a:spcPct val="0"/>
-              </a:spcBef>
-              <a:buNone/>
-              <a:defRPr sz="4400" kern="1200">
-                <a:solidFill>
-                  <a:schemeClr val="tx1"/>
-                </a:solidFill>
-                <a:latin typeface="+mj-lt"/>
-                <a:ea typeface="+mj-ea"/>
-                <a:cs typeface="+mj-cs"/>
-              </a:defRPr>
-            </a:lvl1pPr>
-          </a:lstStyle>
-          <a:p>
-            <a:pPr algn="l"/>
-            <a:r>
-              <a:rPr lang="es-ES" sz="2000" dirty="0">
-                <a:solidFill>
-                  <a:srgbClr val="3F1900"/>
-                </a:solidFill>
-              </a:rPr>
-              <a:t>Pantalla Planning</a:t>
-            </a:r>
-            <a:endParaRPr lang="en-US" sz="2000" dirty="0">
-              <a:solidFill>
-                <a:srgbClr val="3F1900"/>
-              </a:solidFill>
-            </a:endParaRPr>
-          </a:p>
-        </p:txBody>
-      </p:sp>
-      <p:sp>
-        <p:nvSpPr>
-          <p:cNvPr id="4" name="Content Placeholder 3"/>
-          <p:cNvSpPr txBox="1">
-            <a:spLocks/>
-          </p:cNvSpPr>
-          <p:nvPr/>
-        </p:nvSpPr>
-        <p:spPr>
-          <a:xfrm>
-            <a:off x="1331640" y="1196753"/>
-            <a:ext cx="7488832" cy="5137780"/>
-          </a:xfrm>
-          <a:prstGeom prst="rect">
-            <a:avLst/>
-          </a:prstGeom>
-        </p:spPr>
-        <p:txBody>
-          <a:bodyPr>
-            <a:normAutofit/>
-          </a:bodyPr>
-          <a:lstStyle>
-            <a:lvl1pPr marL="342900" indent="-342900" algn="l" defTabSz="914400" rtl="0" eaLnBrk="1" latinLnBrk="0" hangingPunct="1">
-              <a:spcBef>
-                <a:spcPct val="20000"/>
-              </a:spcBef>
-              <a:buFont typeface="Arial" panose="020B0604020202020204" pitchFamily="34" charset="0"/>
-              <a:buChar char="•"/>
-              <a:defRPr sz="3200" kern="1200">
-                <a:solidFill>
-                  <a:schemeClr val="tx1"/>
-                </a:solidFill>
-                <a:latin typeface="+mn-lt"/>
-                <a:ea typeface="+mn-ea"/>
-                <a:cs typeface="+mn-cs"/>
-              </a:defRPr>
-            </a:lvl1pPr>
-            <a:lvl2pPr marL="742950" indent="-285750" algn="l" defTabSz="914400" rtl="0" eaLnBrk="1" latinLnBrk="0" hangingPunct="1">
-              <a:spcBef>
-                <a:spcPct val="20000"/>
-              </a:spcBef>
-              <a:buFont typeface="Arial" panose="020B0604020202020204" pitchFamily="34" charset="0"/>
-              <a:buChar char="–"/>
-              <a:defRPr sz="2800" kern="1200">
-                <a:solidFill>
-                  <a:schemeClr val="tx1"/>
-                </a:solidFill>
-                <a:latin typeface="+mn-lt"/>
-                <a:ea typeface="+mn-ea"/>
-                <a:cs typeface="+mn-cs"/>
-              </a:defRPr>
-            </a:lvl2pPr>
-            <a:lvl3pPr marL="1143000" indent="-228600" algn="l" defTabSz="914400" rtl="0" eaLnBrk="1" latinLnBrk="0" hangingPunct="1">
-              <a:spcBef>
-                <a:spcPct val="20000"/>
-              </a:spcBef>
-              <a:buFont typeface="Arial" panose="020B0604020202020204" pitchFamily="34" charset="0"/>
-              <a:buChar char="•"/>
-              <a:defRPr sz="2400" kern="1200">
-                <a:solidFill>
-                  <a:schemeClr val="tx1"/>
-                </a:solidFill>
-                <a:latin typeface="+mn-lt"/>
-                <a:ea typeface="+mn-ea"/>
-                <a:cs typeface="+mn-cs"/>
-              </a:defRPr>
-            </a:lvl3pPr>
-            <a:lvl4pPr marL="1600200" indent="-228600" algn="l" defTabSz="914400" rtl="0" eaLnBrk="1" latinLnBrk="0" hangingPunct="1">
-              <a:spcBef>
-                <a:spcPct val="20000"/>
-              </a:spcBef>
-              <a:buFont typeface="Arial" panose="020B0604020202020204" pitchFamily="34" charset="0"/>
-              <a:buChar char="–"/>
-              <a:defRPr sz="2000" kern="1200">
-                <a:solidFill>
-                  <a:schemeClr val="tx1"/>
-                </a:solidFill>
-                <a:latin typeface="+mn-lt"/>
-                <a:ea typeface="+mn-ea"/>
-                <a:cs typeface="+mn-cs"/>
-              </a:defRPr>
-            </a:lvl4pPr>
-            <a:lvl5pPr marL="2057400" indent="-228600" algn="l" defTabSz="914400" rtl="0" eaLnBrk="1" latinLnBrk="0" hangingPunct="1">
-              <a:spcBef>
-                <a:spcPct val="20000"/>
-              </a:spcBef>
-              <a:buFont typeface="Arial" panose="020B0604020202020204" pitchFamily="34" charset="0"/>
-              <a:buChar char="»"/>
-              <a:defRPr sz="2000" kern="1200">
-                <a:solidFill>
-                  <a:schemeClr val="tx1"/>
-                </a:solidFill>
-                <a:latin typeface="+mn-lt"/>
-                <a:ea typeface="+mn-ea"/>
-                <a:cs typeface="+mn-cs"/>
-              </a:defRPr>
-            </a:lvl5pPr>
-            <a:lvl6pPr marL="2514600" indent="-228600" algn="l" defTabSz="914400" rtl="0" eaLnBrk="1" latinLnBrk="0" hangingPunct="1">
-              <a:spcBef>
-                <a:spcPct val="20000"/>
-              </a:spcBef>
-              <a:buFont typeface="Arial" panose="020B0604020202020204" pitchFamily="34" charset="0"/>
-              <a:buChar char="•"/>
-              <a:defRPr sz="2000" kern="1200">
-                <a:solidFill>
-                  <a:schemeClr val="tx1"/>
-                </a:solidFill>
-                <a:latin typeface="+mn-lt"/>
-                <a:ea typeface="+mn-ea"/>
-                <a:cs typeface="+mn-cs"/>
-              </a:defRPr>
-            </a:lvl6pPr>
-            <a:lvl7pPr marL="2971800" indent="-228600" algn="l" defTabSz="914400" rtl="0" eaLnBrk="1" latinLnBrk="0" hangingPunct="1">
-              <a:spcBef>
-                <a:spcPct val="20000"/>
-              </a:spcBef>
-              <a:buFont typeface="Arial" panose="020B0604020202020204" pitchFamily="34" charset="0"/>
-              <a:buChar char="•"/>
-              <a:defRPr sz="2000" kern="1200">
-                <a:solidFill>
-                  <a:schemeClr val="tx1"/>
-                </a:solidFill>
-                <a:latin typeface="+mn-lt"/>
-                <a:ea typeface="+mn-ea"/>
-                <a:cs typeface="+mn-cs"/>
-              </a:defRPr>
-            </a:lvl7pPr>
-            <a:lvl8pPr marL="3429000" indent="-228600" algn="l" defTabSz="914400" rtl="0" eaLnBrk="1" latinLnBrk="0" hangingPunct="1">
-              <a:spcBef>
-                <a:spcPct val="20000"/>
-              </a:spcBef>
-              <a:buFont typeface="Arial" panose="020B0604020202020204" pitchFamily="34" charset="0"/>
-              <a:buChar char="•"/>
-              <a:defRPr sz="2000" kern="1200">
-                <a:solidFill>
-                  <a:schemeClr val="tx1"/>
-                </a:solidFill>
-                <a:latin typeface="+mn-lt"/>
-                <a:ea typeface="+mn-ea"/>
-                <a:cs typeface="+mn-cs"/>
-              </a:defRPr>
-            </a:lvl8pPr>
-            <a:lvl9pPr marL="3886200" indent="-228600" algn="l" defTabSz="914400" rtl="0" eaLnBrk="1" latinLnBrk="0" hangingPunct="1">
-              <a:spcBef>
-                <a:spcPct val="20000"/>
-              </a:spcBef>
-              <a:buFont typeface="Arial" panose="020B0604020202020204" pitchFamily="34" charset="0"/>
-              <a:buChar char="•"/>
-              <a:defRPr sz="2000" kern="1200">
-                <a:solidFill>
-                  <a:schemeClr val="tx1"/>
-                </a:solidFill>
-                <a:latin typeface="+mn-lt"/>
-                <a:ea typeface="+mn-ea"/>
-                <a:cs typeface="+mn-cs"/>
-              </a:defRPr>
-            </a:lvl9pPr>
-          </a:lstStyle>
-          <a:p>
-            <a:pPr marL="0" indent="0" algn="just">
-              <a:buFont typeface="Arial" panose="020B0604020202020204" pitchFamily="34" charset="0"/>
-              <a:buNone/>
-            </a:pPr>
-            <a:endParaRPr lang="en-US" sz="2000" i="1"/>
-          </a:p>
-        </p:txBody>
-      </p:sp>
-      <p:sp>
-        <p:nvSpPr>
-          <p:cNvPr id="10" name="Rectangle 9"/>
-          <p:cNvSpPr/>
-          <p:nvPr/>
-        </p:nvSpPr>
-        <p:spPr>
-          <a:xfrm>
-            <a:off x="1115615" y="1054477"/>
-            <a:ext cx="7920879" cy="1015663"/>
-          </a:xfrm>
-          <a:prstGeom prst="rect">
-            <a:avLst/>
-          </a:prstGeom>
-        </p:spPr>
-        <p:txBody>
-          <a:bodyPr wrap="square">
-            <a:spAutoFit/>
-          </a:bodyPr>
-          <a:lstStyle/>
-          <a:p>
-            <a:pPr>
-              <a:buFont typeface="Arial" panose="020B0604020202020204" pitchFamily="34" charset="0"/>
-              <a:buChar char="•"/>
-            </a:pPr>
-            <a:r>
-              <a:rPr lang="es-ES" sz="1200" b="0" i="0" dirty="0">
-                <a:solidFill>
-                  <a:srgbClr val="222222"/>
-                </a:solidFill>
-                <a:effectLst/>
-                <a:latin typeface="Segoe UI" panose="020B0502040204020203" pitchFamily="34" charset="0"/>
-              </a:rPr>
-              <a:t> Se inicio con el rediseño de la pantalla esto incluye cambios en lo visual como en lo funcional, en la imagen se presenta una propuesta de la nueva Vista, en la parte superior izquierda aparece </a:t>
-            </a:r>
-            <a:r>
-              <a:rPr lang="es-ES" sz="1200" i="0" dirty="0">
-                <a:solidFill>
-                  <a:srgbClr val="222222"/>
-                </a:solidFill>
-                <a:effectLst/>
-                <a:latin typeface="Segoe UI" panose="020B0502040204020203" pitchFamily="34" charset="0"/>
-              </a:rPr>
-              <a:t>un</a:t>
-            </a:r>
-            <a:r>
-              <a:rPr lang="es-ES" sz="1200" b="1" i="0" dirty="0">
-                <a:solidFill>
-                  <a:srgbClr val="222222"/>
-                </a:solidFill>
-                <a:effectLst/>
-                <a:latin typeface="Segoe UI" panose="020B0502040204020203" pitchFamily="34" charset="0"/>
-              </a:rPr>
-              <a:t> Botón con Icono de (+)</a:t>
-            </a:r>
-            <a:r>
-              <a:rPr lang="es-ES" sz="1200" b="0" i="0" dirty="0">
-                <a:solidFill>
-                  <a:srgbClr val="222222"/>
-                </a:solidFill>
-                <a:effectLst/>
-                <a:latin typeface="Segoe UI" panose="020B0502040204020203" pitchFamily="34" charset="0"/>
-              </a:rPr>
-              <a:t> el cual servirá para crear una orden, </a:t>
-            </a:r>
-            <a:r>
-              <a:rPr lang="es-ES" sz="1200" i="0" dirty="0">
-                <a:solidFill>
-                  <a:srgbClr val="222222"/>
-                </a:solidFill>
-                <a:effectLst/>
-                <a:latin typeface="Segoe UI" panose="020B0502040204020203" pitchFamily="34" charset="0"/>
-              </a:rPr>
-              <a:t>el</a:t>
-            </a:r>
-            <a:r>
-              <a:rPr lang="es-ES" sz="1200" b="1" i="0" dirty="0">
-                <a:solidFill>
-                  <a:srgbClr val="222222"/>
-                </a:solidFill>
-                <a:effectLst/>
-                <a:latin typeface="Segoe UI" panose="020B0502040204020203" pitchFamily="34" charset="0"/>
-              </a:rPr>
-              <a:t> Botón con icono de (Lápiz) </a:t>
-            </a:r>
-            <a:r>
-              <a:rPr lang="es-ES" sz="1200" b="0" i="0" dirty="0">
-                <a:solidFill>
-                  <a:srgbClr val="222222"/>
-                </a:solidFill>
-                <a:effectLst/>
-                <a:latin typeface="Segoe UI" panose="020B0502040204020203" pitchFamily="34" charset="0"/>
-              </a:rPr>
-              <a:t>servirá para Editar/Modificar una Orden, el </a:t>
-            </a:r>
-            <a:r>
-              <a:rPr lang="es-ES" sz="1200" b="1" i="0" dirty="0">
-                <a:solidFill>
-                  <a:srgbClr val="222222"/>
-                </a:solidFill>
-                <a:effectLst/>
-                <a:latin typeface="Segoe UI" panose="020B0502040204020203" pitchFamily="34" charset="0"/>
-              </a:rPr>
-              <a:t>Botón con icono(Lupa) </a:t>
-            </a:r>
-            <a:r>
-              <a:rPr lang="es-ES" sz="1200" b="0" i="0" dirty="0">
-                <a:solidFill>
-                  <a:srgbClr val="222222"/>
-                </a:solidFill>
-                <a:effectLst/>
-                <a:latin typeface="Segoe UI" panose="020B0502040204020203" pitchFamily="34" charset="0"/>
-              </a:rPr>
-              <a:t>permitirá realizar la Búsqueda de una orden y el </a:t>
-            </a:r>
-            <a:r>
-              <a:rPr lang="es-ES" sz="1200" b="1" i="0" dirty="0">
-                <a:solidFill>
-                  <a:srgbClr val="222222"/>
-                </a:solidFill>
-                <a:effectLst/>
-                <a:latin typeface="Segoe UI" panose="020B0502040204020203" pitchFamily="34" charset="0"/>
-              </a:rPr>
-              <a:t>Botón con icono(Disquete) </a:t>
-            </a:r>
-            <a:r>
-              <a:rPr lang="es-ES" sz="1200" b="0" i="0" dirty="0">
-                <a:solidFill>
-                  <a:srgbClr val="222222"/>
-                </a:solidFill>
-                <a:effectLst/>
-                <a:latin typeface="Segoe UI" panose="020B0502040204020203" pitchFamily="34" charset="0"/>
-              </a:rPr>
-              <a:t>que aparece en la parte superior derecha será para guardar la información de la orden</a:t>
-            </a:r>
-            <a:r>
-              <a:rPr lang="es-ES" sz="1200" dirty="0">
-                <a:solidFill>
-                  <a:srgbClr val="222222"/>
-                </a:solidFill>
-                <a:latin typeface="Segoe UI" panose="020B0502040204020203" pitchFamily="34" charset="0"/>
-              </a:rPr>
-              <a:t>.</a:t>
-            </a:r>
-            <a:endParaRPr lang="es-ES" sz="1200" b="0" i="0" dirty="0">
-              <a:solidFill>
-                <a:srgbClr val="222222"/>
-              </a:solidFill>
-              <a:effectLst/>
-              <a:latin typeface="Segoe UI" panose="020B0502040204020203" pitchFamily="34" charset="0"/>
-            </a:endParaRPr>
-          </a:p>
-        </p:txBody>
-      </p:sp>
-      <p:pic>
-        <p:nvPicPr>
-          <p:cNvPr id="3" name="Imagen 2" descr="Interfaz de usuario gráfica, Aplicación, Tabla, Excel&#10;&#10;Descripción generada automáticamente">
-            <a:extLst>
-              <a:ext uri="{FF2B5EF4-FFF2-40B4-BE49-F238E27FC236}">
-                <a16:creationId xmlns:a16="http://schemas.microsoft.com/office/drawing/2014/main" id="{DB444C37-12FF-49CB-BEE5-193A8CA5CBFB}"/>
-              </a:ext>
-            </a:extLst>
-          </p:cNvPr>
-          <p:cNvPicPr>
-            <a:picLocks noChangeAspect="1"/>
-          </p:cNvPicPr>
-          <p:nvPr/>
-        </p:nvPicPr>
-        <p:blipFill>
-          <a:blip r:embed="rId2">
-            <a:extLst>
-              <a:ext uri="{28A0092B-C50C-407E-A947-70E740481C1C}">
-                <a14:useLocalDpi xmlns:a14="http://schemas.microsoft.com/office/drawing/2010/main" val="0"/>
-              </a:ext>
-            </a:extLst>
-          </a:blip>
-          <a:stretch>
-            <a:fillRect/>
-          </a:stretch>
-        </p:blipFill>
-        <p:spPr>
-          <a:xfrm>
-            <a:off x="1115614" y="2070140"/>
-            <a:ext cx="7920879" cy="4743236"/>
-          </a:xfrm>
-          <a:prstGeom prst="rect">
-            <a:avLst/>
-          </a:prstGeom>
-        </p:spPr>
-      </p:pic>
-    </p:spTree>
-    <p:extLst>
-      <p:ext uri="{BB962C8B-B14F-4D97-AF65-F5344CB8AC3E}">
-        <p14:creationId xmlns:p14="http://schemas.microsoft.com/office/powerpoint/2010/main" val="2260937188"/>
       </p:ext>
     </p:extLst>
   </p:cSld>
